--- a/docs/presentation/Sistem-Informasi-Data-Siswa-Presentation.pptx
+++ b/docs/presentation/Sistem-Informasi-Data-Siswa-Presentation.pptx
@@ -3128,7 +3128,7 @@
     <p:bg>
       <p:bgPr>
         <a:solidFill>
-          <a:srgbClr val="0F172A"/>
+          <a:srgbClr val="0B3375"/>
         </a:solidFill>
         <a:effectLst/>
       </p:bgPr>
@@ -3157,7 +3157,7 @@
             </a:avLst>
           </a:prstGeom>
           <a:solidFill>
-            <a:srgbClr val="1D4ED8"/>
+            <a:srgbClr val="1668DC"/>
           </a:solidFill>
           <a:ln>
             <a:noFill/>
@@ -3214,7 +3214,7 @@
               </a:lnSpc>
               <a:defRPr sz="1300" b="1">
                 <a:solidFill>
-                  <a:srgbClr val="0891B2"/>
+                  <a:srgbClr val="35C6F3"/>
                 </a:solidFill>
                 <a:latin typeface="Inter"/>
               </a:defRPr>
@@ -3308,7 +3308,7 @@
               </a:lnSpc>
               <a:defRPr sz="1500" b="0">
                 <a:solidFill>
-                  <a:srgbClr val="94A3B8"/>
+                  <a:srgbClr val="B8C6E0"/>
                 </a:solidFill>
                 <a:latin typeface="Inter"/>
               </a:defRPr>
@@ -3324,7 +3324,7 @@
               </a:lnSpc>
               <a:defRPr sz="1500" b="0">
                 <a:solidFill>
-                  <a:srgbClr val="94A3B8"/>
+                  <a:srgbClr val="B8C6E0"/>
                 </a:solidFill>
                 <a:latin typeface="Inter"/>
               </a:defRPr>
@@ -3387,7 +3387,7 @@
               </a:lnSpc>
               <a:defRPr sz="1000" b="0">
                 <a:solidFill>
-                  <a:srgbClr val="64748B"/>
+                  <a:srgbClr val="8EA3C4"/>
                 </a:solidFill>
                 <a:latin typeface="Inter"/>
               </a:defRPr>
@@ -3452,7 +3452,7 @@
               </a:lnSpc>
               <a:defRPr sz="1100" b="1">
                 <a:solidFill>
-                  <a:srgbClr val="1D4ED8"/>
+                  <a:srgbClr val="1668DC"/>
                 </a:solidFill>
                 <a:latin typeface="Inter"/>
               </a:defRPr>
@@ -3491,7 +3491,7 @@
               </a:lnSpc>
               <a:defRPr sz="3000" b="1">
                 <a:solidFill>
-                  <a:srgbClr val="0F172A"/>
+                  <a:srgbClr val="0B3375"/>
                 </a:solidFill>
                 <a:latin typeface="Manrope"/>
               </a:defRPr>
@@ -3602,7 +3602,7 @@
               </a:lnSpc>
               <a:defRPr sz="900" b="0">
                 <a:solidFill>
-                  <a:srgbClr val="8A94A6"/>
+                  <a:srgbClr val="7A88A0"/>
                 </a:solidFill>
                 <a:latin typeface="Inter"/>
               </a:defRPr>
@@ -3644,7 +3644,7 @@
               </a:spcAft>
               <a:defRPr sz="1400">
                 <a:solidFill>
-                  <a:srgbClr val="475569"/>
+                  <a:srgbClr val="3A4A66"/>
                 </a:solidFill>
                 <a:latin typeface="Inter"/>
               </a:defRPr>
@@ -3663,7 +3663,7 @@
               </a:spcAft>
               <a:defRPr sz="1400">
                 <a:solidFill>
-                  <a:srgbClr val="475569"/>
+                  <a:srgbClr val="3A4A66"/>
                 </a:solidFill>
                 <a:latin typeface="Inter"/>
               </a:defRPr>
@@ -3682,7 +3682,7 @@
               </a:spcAft>
               <a:defRPr sz="1400">
                 <a:solidFill>
-                  <a:srgbClr val="475569"/>
+                  <a:srgbClr val="3A4A66"/>
                 </a:solidFill>
                 <a:latin typeface="Inter"/>
               </a:defRPr>
@@ -3701,7 +3701,7 @@
               </a:spcAft>
               <a:defRPr sz="1400">
                 <a:solidFill>
-                  <a:srgbClr val="475569"/>
+                  <a:srgbClr val="3A4A66"/>
                 </a:solidFill>
                 <a:latin typeface="Inter"/>
               </a:defRPr>
@@ -3720,7 +3720,7 @@
               </a:spcAft>
               <a:defRPr sz="1400">
                 <a:solidFill>
-                  <a:srgbClr val="475569"/>
+                  <a:srgbClr val="3A4A66"/>
                 </a:solidFill>
                 <a:latin typeface="Inter"/>
               </a:defRPr>
@@ -3748,7 +3748,7 @@
             </a:avLst>
           </a:prstGeom>
           <a:solidFill>
-            <a:srgbClr val="EEF2FF"/>
+            <a:srgbClr val="EEF4FD"/>
           </a:solidFill>
           <a:ln>
             <a:noFill/>
@@ -3805,7 +3805,7 @@
               </a:lnSpc>
               <a:defRPr sz="1200" b="1">
                 <a:solidFill>
-                  <a:srgbClr val="1D4ED8"/>
+                  <a:srgbClr val="1668DC"/>
                 </a:solidFill>
                 <a:latin typeface="Inter"/>
               </a:defRPr>
@@ -3844,7 +3844,7 @@
               </a:lnSpc>
               <a:defRPr sz="1200" b="1">
                 <a:solidFill>
-                  <a:srgbClr val="1D4ED8"/>
+                  <a:srgbClr val="1668DC"/>
                 </a:solidFill>
                 <a:latin typeface="Inter"/>
               </a:defRPr>
@@ -3883,7 +3883,7 @@
               </a:lnSpc>
               <a:defRPr sz="1200" b="0">
                 <a:solidFill>
-                  <a:srgbClr val="0F172A"/>
+                  <a:srgbClr val="0B3375"/>
                 </a:solidFill>
                 <a:latin typeface="Inter"/>
               </a:defRPr>
@@ -3922,7 +3922,7 @@
               </a:lnSpc>
               <a:defRPr sz="900" b="0">
                 <a:solidFill>
-                  <a:srgbClr val="8A94A6"/>
+                  <a:srgbClr val="7A88A0"/>
                 </a:solidFill>
                 <a:latin typeface="Inter"/>
               </a:defRPr>
@@ -3961,7 +3961,7 @@
               </a:lnSpc>
               <a:defRPr sz="900" b="0">
                 <a:solidFill>
-                  <a:srgbClr val="8A94A6"/>
+                  <a:srgbClr val="7A88A0"/>
                 </a:solidFill>
                 <a:latin typeface="Inter"/>
               </a:defRPr>
@@ -4026,7 +4026,7 @@
               </a:lnSpc>
               <a:defRPr sz="1100" b="1">
                 <a:solidFill>
-                  <a:srgbClr val="1D4ED8"/>
+                  <a:srgbClr val="1668DC"/>
                 </a:solidFill>
                 <a:latin typeface="Inter"/>
               </a:defRPr>
@@ -4065,7 +4065,7 @@
               </a:lnSpc>
               <a:defRPr sz="3000" b="1">
                 <a:solidFill>
-                  <a:srgbClr val="0F172A"/>
+                  <a:srgbClr val="0B3375"/>
                 </a:solidFill>
                 <a:latin typeface="Manrope"/>
               </a:defRPr>
@@ -4176,7 +4176,7 @@
               </a:lnSpc>
               <a:defRPr sz="900" b="0">
                 <a:solidFill>
-                  <a:srgbClr val="8A94A6"/>
+                  <a:srgbClr val="7A88A0"/>
                 </a:solidFill>
                 <a:latin typeface="Inter"/>
               </a:defRPr>
@@ -4215,7 +4215,7 @@
               </a:lnSpc>
               <a:defRPr sz="1300" b="1">
                 <a:solidFill>
-                  <a:srgbClr val="1D4ED8"/>
+                  <a:srgbClr val="1668DC"/>
                 </a:solidFill>
                 <a:latin typeface="Inter"/>
               </a:defRPr>
@@ -4257,7 +4257,7 @@
               </a:spcAft>
               <a:defRPr sz="1400">
                 <a:solidFill>
-                  <a:srgbClr val="475569"/>
+                  <a:srgbClr val="3A4A66"/>
                 </a:solidFill>
                 <a:latin typeface="Inter"/>
               </a:defRPr>
@@ -4276,7 +4276,7 @@
               </a:spcAft>
               <a:defRPr sz="1400">
                 <a:solidFill>
-                  <a:srgbClr val="475569"/>
+                  <a:srgbClr val="3A4A66"/>
                 </a:solidFill>
                 <a:latin typeface="Inter"/>
               </a:defRPr>
@@ -4295,7 +4295,7 @@
               </a:spcAft>
               <a:defRPr sz="1400">
                 <a:solidFill>
-                  <a:srgbClr val="475569"/>
+                  <a:srgbClr val="3A4A66"/>
                 </a:solidFill>
                 <a:latin typeface="Inter"/>
               </a:defRPr>
@@ -4314,7 +4314,7 @@
               </a:spcAft>
               <a:defRPr sz="1400">
                 <a:solidFill>
-                  <a:srgbClr val="475569"/>
+                  <a:srgbClr val="3A4A66"/>
                 </a:solidFill>
                 <a:latin typeface="Inter"/>
               </a:defRPr>
@@ -4353,7 +4353,7 @@
               </a:lnSpc>
               <a:defRPr sz="900" b="0">
                 <a:solidFill>
-                  <a:srgbClr val="8A94A6"/>
+                  <a:srgbClr val="7A88A0"/>
                 </a:solidFill>
                 <a:latin typeface="Inter"/>
               </a:defRPr>
@@ -4392,7 +4392,7 @@
               </a:lnSpc>
               <a:defRPr sz="900" b="0">
                 <a:solidFill>
-                  <a:srgbClr val="8A94A6"/>
+                  <a:srgbClr val="7A88A0"/>
                 </a:solidFill>
                 <a:latin typeface="Inter"/>
               </a:defRPr>
@@ -4457,7 +4457,7 @@
               </a:lnSpc>
               <a:defRPr sz="1100" b="1">
                 <a:solidFill>
-                  <a:srgbClr val="1D4ED8"/>
+                  <a:srgbClr val="1668DC"/>
                 </a:solidFill>
                 <a:latin typeface="Inter"/>
               </a:defRPr>
@@ -4496,7 +4496,7 @@
               </a:lnSpc>
               <a:defRPr sz="3000" b="1">
                 <a:solidFill>
-                  <a:srgbClr val="0F172A"/>
+                  <a:srgbClr val="0B3375"/>
                 </a:solidFill>
                 <a:latin typeface="Manrope"/>
               </a:defRPr>
@@ -4535,7 +4535,7 @@
               </a:lnSpc>
               <a:defRPr sz="1300" b="1">
                 <a:solidFill>
-                  <a:srgbClr val="1D4ED8"/>
+                  <a:srgbClr val="1668DC"/>
                 </a:solidFill>
                 <a:latin typeface="Inter"/>
               </a:defRPr>
@@ -4577,7 +4577,7 @@
               </a:spcAft>
               <a:defRPr sz="1400">
                 <a:solidFill>
-                  <a:srgbClr val="475569"/>
+                  <a:srgbClr val="3A4A66"/>
                 </a:solidFill>
                 <a:latin typeface="Inter"/>
               </a:defRPr>
@@ -4596,7 +4596,7 @@
               </a:spcAft>
               <a:defRPr sz="1400">
                 <a:solidFill>
-                  <a:srgbClr val="475569"/>
+                  <a:srgbClr val="3A4A66"/>
                 </a:solidFill>
                 <a:latin typeface="Inter"/>
               </a:defRPr>
@@ -4615,7 +4615,7 @@
               </a:spcAft>
               <a:defRPr sz="1400">
                 <a:solidFill>
-                  <a:srgbClr val="475569"/>
+                  <a:srgbClr val="3A4A66"/>
                 </a:solidFill>
                 <a:latin typeface="Inter"/>
               </a:defRPr>
@@ -4634,7 +4634,7 @@
               </a:spcAft>
               <a:defRPr sz="1400">
                 <a:solidFill>
-                  <a:srgbClr val="475569"/>
+                  <a:srgbClr val="3A4A66"/>
                 </a:solidFill>
                 <a:latin typeface="Inter"/>
               </a:defRPr>
@@ -4673,7 +4673,7 @@
               </a:lnSpc>
               <a:defRPr sz="900" b="0">
                 <a:solidFill>
-                  <a:srgbClr val="8A94A6"/>
+                  <a:srgbClr val="7A88A0"/>
                 </a:solidFill>
                 <a:latin typeface="Inter"/>
               </a:defRPr>
@@ -4712,7 +4712,7 @@
               </a:lnSpc>
               <a:defRPr sz="900" b="0">
                 <a:solidFill>
-                  <a:srgbClr val="8A94A6"/>
+                  <a:srgbClr val="7A88A0"/>
                 </a:solidFill>
                 <a:latin typeface="Inter"/>
               </a:defRPr>
@@ -4777,7 +4777,7 @@
               </a:lnSpc>
               <a:defRPr sz="1100" b="1">
                 <a:solidFill>
-                  <a:srgbClr val="1D4ED8"/>
+                  <a:srgbClr val="1668DC"/>
                 </a:solidFill>
                 <a:latin typeface="Inter"/>
               </a:defRPr>
@@ -4816,7 +4816,7 @@
               </a:lnSpc>
               <a:defRPr sz="3000" b="1">
                 <a:solidFill>
-                  <a:srgbClr val="0F172A"/>
+                  <a:srgbClr val="0B3375"/>
                 </a:solidFill>
                 <a:latin typeface="Manrope"/>
               </a:defRPr>
@@ -4927,7 +4927,7 @@
               </a:lnSpc>
               <a:defRPr sz="900" b="0">
                 <a:solidFill>
-                  <a:srgbClr val="8A94A6"/>
+                  <a:srgbClr val="7A88A0"/>
                 </a:solidFill>
                 <a:latin typeface="Inter"/>
               </a:defRPr>
@@ -4966,7 +4966,7 @@
               </a:lnSpc>
               <a:defRPr sz="1300" b="1">
                 <a:solidFill>
-                  <a:srgbClr val="1D4ED8"/>
+                  <a:srgbClr val="1668DC"/>
                 </a:solidFill>
                 <a:latin typeface="Inter"/>
               </a:defRPr>
@@ -5008,7 +5008,7 @@
               </a:spcAft>
               <a:defRPr sz="1400">
                 <a:solidFill>
-                  <a:srgbClr val="475569"/>
+                  <a:srgbClr val="3A4A66"/>
                 </a:solidFill>
                 <a:latin typeface="Inter"/>
               </a:defRPr>
@@ -5027,7 +5027,7 @@
               </a:spcAft>
               <a:defRPr sz="1400">
                 <a:solidFill>
-                  <a:srgbClr val="475569"/>
+                  <a:srgbClr val="3A4A66"/>
                 </a:solidFill>
                 <a:latin typeface="Inter"/>
               </a:defRPr>
@@ -5046,7 +5046,7 @@
               </a:spcAft>
               <a:defRPr sz="1400">
                 <a:solidFill>
-                  <a:srgbClr val="475569"/>
+                  <a:srgbClr val="3A4A66"/>
                 </a:solidFill>
                 <a:latin typeface="Inter"/>
               </a:defRPr>
@@ -5065,7 +5065,7 @@
               </a:spcAft>
               <a:defRPr sz="1400">
                 <a:solidFill>
-                  <a:srgbClr val="475569"/>
+                  <a:srgbClr val="3A4A66"/>
                 </a:solidFill>
                 <a:latin typeface="Inter"/>
               </a:defRPr>
@@ -5104,7 +5104,7 @@
               </a:lnSpc>
               <a:defRPr sz="900" b="0">
                 <a:solidFill>
-                  <a:srgbClr val="8A94A6"/>
+                  <a:srgbClr val="7A88A0"/>
                 </a:solidFill>
                 <a:latin typeface="Inter"/>
               </a:defRPr>
@@ -5143,7 +5143,7 @@
               </a:lnSpc>
               <a:defRPr sz="900" b="0">
                 <a:solidFill>
-                  <a:srgbClr val="8A94A6"/>
+                  <a:srgbClr val="7A88A0"/>
                 </a:solidFill>
                 <a:latin typeface="Inter"/>
               </a:defRPr>
@@ -5208,7 +5208,7 @@
               </a:lnSpc>
               <a:defRPr sz="1100" b="1">
                 <a:solidFill>
-                  <a:srgbClr val="1D4ED8"/>
+                  <a:srgbClr val="1668DC"/>
                 </a:solidFill>
                 <a:latin typeface="Inter"/>
               </a:defRPr>
@@ -5247,7 +5247,7 @@
               </a:lnSpc>
               <a:defRPr sz="3000" b="1">
                 <a:solidFill>
-                  <a:srgbClr val="0F172A"/>
+                  <a:srgbClr val="0B3375"/>
                 </a:solidFill>
                 <a:latin typeface="Manrope"/>
               </a:defRPr>
@@ -5358,7 +5358,7 @@
               </a:lnSpc>
               <a:defRPr sz="900" b="0">
                 <a:solidFill>
-                  <a:srgbClr val="8A94A6"/>
+                  <a:srgbClr val="7A88A0"/>
                 </a:solidFill>
                 <a:latin typeface="Inter"/>
               </a:defRPr>
@@ -5397,7 +5397,7 @@
               </a:lnSpc>
               <a:defRPr sz="1300" b="1">
                 <a:solidFill>
-                  <a:srgbClr val="1D4ED8"/>
+                  <a:srgbClr val="1668DC"/>
                 </a:solidFill>
                 <a:latin typeface="Inter"/>
               </a:defRPr>
@@ -5439,7 +5439,7 @@
               </a:spcAft>
               <a:defRPr sz="1400">
                 <a:solidFill>
-                  <a:srgbClr val="475569"/>
+                  <a:srgbClr val="3A4A66"/>
                 </a:solidFill>
                 <a:latin typeface="Inter"/>
               </a:defRPr>
@@ -5458,7 +5458,7 @@
               </a:spcAft>
               <a:defRPr sz="1400">
                 <a:solidFill>
-                  <a:srgbClr val="475569"/>
+                  <a:srgbClr val="3A4A66"/>
                 </a:solidFill>
                 <a:latin typeface="Inter"/>
               </a:defRPr>
@@ -5477,7 +5477,7 @@
               </a:spcAft>
               <a:defRPr sz="1400">
                 <a:solidFill>
-                  <a:srgbClr val="475569"/>
+                  <a:srgbClr val="3A4A66"/>
                 </a:solidFill>
                 <a:latin typeface="Inter"/>
               </a:defRPr>
@@ -5496,7 +5496,7 @@
               </a:spcAft>
               <a:defRPr sz="1400">
                 <a:solidFill>
-                  <a:srgbClr val="475569"/>
+                  <a:srgbClr val="3A4A66"/>
                 </a:solidFill>
                 <a:latin typeface="Inter"/>
               </a:defRPr>
@@ -5535,7 +5535,7 @@
               </a:lnSpc>
               <a:defRPr sz="900" b="0">
                 <a:solidFill>
-                  <a:srgbClr val="8A94A6"/>
+                  <a:srgbClr val="7A88A0"/>
                 </a:solidFill>
                 <a:latin typeface="Inter"/>
               </a:defRPr>
@@ -5574,7 +5574,7 @@
               </a:lnSpc>
               <a:defRPr sz="900" b="0">
                 <a:solidFill>
-                  <a:srgbClr val="8A94A6"/>
+                  <a:srgbClr val="7A88A0"/>
                 </a:solidFill>
                 <a:latin typeface="Inter"/>
               </a:defRPr>
@@ -5639,7 +5639,7 @@
               </a:lnSpc>
               <a:defRPr sz="1100" b="1">
                 <a:solidFill>
-                  <a:srgbClr val="1D4ED8"/>
+                  <a:srgbClr val="1668DC"/>
                 </a:solidFill>
                 <a:latin typeface="Inter"/>
               </a:defRPr>
@@ -5678,7 +5678,7 @@
               </a:lnSpc>
               <a:defRPr sz="3000" b="1">
                 <a:solidFill>
-                  <a:srgbClr val="0F172A"/>
+                  <a:srgbClr val="0B3375"/>
                 </a:solidFill>
                 <a:latin typeface="Manrope"/>
               </a:defRPr>
@@ -5789,7 +5789,7 @@
               </a:lnSpc>
               <a:defRPr sz="900" b="0">
                 <a:solidFill>
-                  <a:srgbClr val="8A94A6"/>
+                  <a:srgbClr val="7A88A0"/>
                 </a:solidFill>
                 <a:latin typeface="Inter"/>
               </a:defRPr>
@@ -5828,7 +5828,7 @@
               </a:lnSpc>
               <a:defRPr sz="1300" b="1">
                 <a:solidFill>
-                  <a:srgbClr val="1D4ED8"/>
+                  <a:srgbClr val="1668DC"/>
                 </a:solidFill>
                 <a:latin typeface="Inter"/>
               </a:defRPr>
@@ -5870,7 +5870,7 @@
               </a:spcAft>
               <a:defRPr sz="1400">
                 <a:solidFill>
-                  <a:srgbClr val="475569"/>
+                  <a:srgbClr val="3A4A66"/>
                 </a:solidFill>
                 <a:latin typeface="Inter"/>
               </a:defRPr>
@@ -5889,7 +5889,7 @@
               </a:spcAft>
               <a:defRPr sz="1400">
                 <a:solidFill>
-                  <a:srgbClr val="475569"/>
+                  <a:srgbClr val="3A4A66"/>
                 </a:solidFill>
                 <a:latin typeface="Inter"/>
               </a:defRPr>
@@ -5908,7 +5908,7 @@
               </a:spcAft>
               <a:defRPr sz="1400">
                 <a:solidFill>
-                  <a:srgbClr val="475569"/>
+                  <a:srgbClr val="3A4A66"/>
                 </a:solidFill>
                 <a:latin typeface="Inter"/>
               </a:defRPr>
@@ -5927,7 +5927,7 @@
               </a:spcAft>
               <a:defRPr sz="1400">
                 <a:solidFill>
-                  <a:srgbClr val="475569"/>
+                  <a:srgbClr val="3A4A66"/>
                 </a:solidFill>
                 <a:latin typeface="Inter"/>
               </a:defRPr>
@@ -5966,7 +5966,7 @@
               </a:lnSpc>
               <a:defRPr sz="900" b="0">
                 <a:solidFill>
-                  <a:srgbClr val="8A94A6"/>
+                  <a:srgbClr val="7A88A0"/>
                 </a:solidFill>
                 <a:latin typeface="Inter"/>
               </a:defRPr>
@@ -6005,7 +6005,7 @@
               </a:lnSpc>
               <a:defRPr sz="900" b="0">
                 <a:solidFill>
-                  <a:srgbClr val="8A94A6"/>
+                  <a:srgbClr val="7A88A0"/>
                 </a:solidFill>
                 <a:latin typeface="Inter"/>
               </a:defRPr>
@@ -6070,7 +6070,7 @@
               </a:lnSpc>
               <a:defRPr sz="1100" b="1">
                 <a:solidFill>
-                  <a:srgbClr val="1D4ED8"/>
+                  <a:srgbClr val="1668DC"/>
                 </a:solidFill>
                 <a:latin typeface="Inter"/>
               </a:defRPr>
@@ -6109,7 +6109,7 @@
               </a:lnSpc>
               <a:defRPr sz="3000" b="1">
                 <a:solidFill>
-                  <a:srgbClr val="0F172A"/>
+                  <a:srgbClr val="0B3375"/>
                 </a:solidFill>
                 <a:latin typeface="Manrope"/>
               </a:defRPr>
@@ -6220,7 +6220,7 @@
               </a:lnSpc>
               <a:defRPr sz="900" b="0">
                 <a:solidFill>
-                  <a:srgbClr val="8A94A6"/>
+                  <a:srgbClr val="7A88A0"/>
                 </a:solidFill>
                 <a:latin typeface="Inter"/>
               </a:defRPr>
@@ -6259,7 +6259,7 @@
               </a:lnSpc>
               <a:defRPr sz="1300" b="1">
                 <a:solidFill>
-                  <a:srgbClr val="1D4ED8"/>
+                  <a:srgbClr val="1668DC"/>
                 </a:solidFill>
                 <a:latin typeface="Inter"/>
               </a:defRPr>
@@ -6301,7 +6301,7 @@
               </a:spcAft>
               <a:defRPr sz="1400">
                 <a:solidFill>
-                  <a:srgbClr val="475569"/>
+                  <a:srgbClr val="3A4A66"/>
                 </a:solidFill>
                 <a:latin typeface="Inter"/>
               </a:defRPr>
@@ -6320,7 +6320,7 @@
               </a:spcAft>
               <a:defRPr sz="1400">
                 <a:solidFill>
-                  <a:srgbClr val="475569"/>
+                  <a:srgbClr val="3A4A66"/>
                 </a:solidFill>
                 <a:latin typeface="Inter"/>
               </a:defRPr>
@@ -6339,7 +6339,7 @@
               </a:spcAft>
               <a:defRPr sz="1400">
                 <a:solidFill>
-                  <a:srgbClr val="475569"/>
+                  <a:srgbClr val="3A4A66"/>
                 </a:solidFill>
                 <a:latin typeface="Inter"/>
               </a:defRPr>
@@ -6358,7 +6358,7 @@
               </a:spcAft>
               <a:defRPr sz="1400">
                 <a:solidFill>
-                  <a:srgbClr val="475569"/>
+                  <a:srgbClr val="3A4A66"/>
                 </a:solidFill>
                 <a:latin typeface="Inter"/>
               </a:defRPr>
@@ -6397,7 +6397,7 @@
               </a:lnSpc>
               <a:defRPr sz="900" b="0">
                 <a:solidFill>
-                  <a:srgbClr val="8A94A6"/>
+                  <a:srgbClr val="7A88A0"/>
                 </a:solidFill>
                 <a:latin typeface="Inter"/>
               </a:defRPr>
@@ -6436,7 +6436,7 @@
               </a:lnSpc>
               <a:defRPr sz="900" b="0">
                 <a:solidFill>
-                  <a:srgbClr val="8A94A6"/>
+                  <a:srgbClr val="7A88A0"/>
                 </a:solidFill>
                 <a:latin typeface="Inter"/>
               </a:defRPr>
@@ -6501,7 +6501,7 @@
               </a:lnSpc>
               <a:defRPr sz="1100" b="1">
                 <a:solidFill>
-                  <a:srgbClr val="1D4ED8"/>
+                  <a:srgbClr val="1668DC"/>
                 </a:solidFill>
                 <a:latin typeface="Inter"/>
               </a:defRPr>
@@ -6540,7 +6540,7 @@
               </a:lnSpc>
               <a:defRPr sz="3000" b="1">
                 <a:solidFill>
-                  <a:srgbClr val="0F172A"/>
+                  <a:srgbClr val="0B3375"/>
                 </a:solidFill>
                 <a:latin typeface="Manrope"/>
               </a:defRPr>
@@ -6651,7 +6651,7 @@
               </a:lnSpc>
               <a:defRPr sz="900" b="0">
                 <a:solidFill>
-                  <a:srgbClr val="8A94A6"/>
+                  <a:srgbClr val="7A88A0"/>
                 </a:solidFill>
                 <a:latin typeface="Inter"/>
               </a:defRPr>
@@ -6690,7 +6690,7 @@
               </a:lnSpc>
               <a:defRPr sz="1300" b="1">
                 <a:solidFill>
-                  <a:srgbClr val="1D4ED8"/>
+                  <a:srgbClr val="1668DC"/>
                 </a:solidFill>
                 <a:latin typeface="Inter"/>
               </a:defRPr>
@@ -6732,7 +6732,7 @@
               </a:spcAft>
               <a:defRPr sz="1400">
                 <a:solidFill>
-                  <a:srgbClr val="475569"/>
+                  <a:srgbClr val="3A4A66"/>
                 </a:solidFill>
                 <a:latin typeface="Inter"/>
               </a:defRPr>
@@ -6751,7 +6751,7 @@
               </a:spcAft>
               <a:defRPr sz="1400">
                 <a:solidFill>
-                  <a:srgbClr val="475569"/>
+                  <a:srgbClr val="3A4A66"/>
                 </a:solidFill>
                 <a:latin typeface="Inter"/>
               </a:defRPr>
@@ -6770,7 +6770,7 @@
               </a:spcAft>
               <a:defRPr sz="1400">
                 <a:solidFill>
-                  <a:srgbClr val="475569"/>
+                  <a:srgbClr val="3A4A66"/>
                 </a:solidFill>
                 <a:latin typeface="Inter"/>
               </a:defRPr>
@@ -6789,7 +6789,7 @@
               </a:spcAft>
               <a:defRPr sz="1400">
                 <a:solidFill>
-                  <a:srgbClr val="475569"/>
+                  <a:srgbClr val="3A4A66"/>
                 </a:solidFill>
                 <a:latin typeface="Inter"/>
               </a:defRPr>
@@ -6828,7 +6828,7 @@
               </a:lnSpc>
               <a:defRPr sz="900" b="0">
                 <a:solidFill>
-                  <a:srgbClr val="8A94A6"/>
+                  <a:srgbClr val="7A88A0"/>
                 </a:solidFill>
                 <a:latin typeface="Inter"/>
               </a:defRPr>
@@ -6867,7 +6867,7 @@
               </a:lnSpc>
               <a:defRPr sz="900" b="0">
                 <a:solidFill>
-                  <a:srgbClr val="8A94A6"/>
+                  <a:srgbClr val="7A88A0"/>
                 </a:solidFill>
                 <a:latin typeface="Inter"/>
               </a:defRPr>
@@ -6932,7 +6932,7 @@
               </a:lnSpc>
               <a:defRPr sz="1100" b="1">
                 <a:solidFill>
-                  <a:srgbClr val="1D4ED8"/>
+                  <a:srgbClr val="1668DC"/>
                 </a:solidFill>
                 <a:latin typeface="Inter"/>
               </a:defRPr>
@@ -6971,7 +6971,7 @@
               </a:lnSpc>
               <a:defRPr sz="3000" b="1">
                 <a:solidFill>
-                  <a:srgbClr val="0F172A"/>
+                  <a:srgbClr val="0B3375"/>
                 </a:solidFill>
                 <a:latin typeface="Manrope"/>
               </a:defRPr>
@@ -7082,7 +7082,7 @@
               </a:lnSpc>
               <a:defRPr sz="900" b="0">
                 <a:solidFill>
-                  <a:srgbClr val="8A94A6"/>
+                  <a:srgbClr val="7A88A0"/>
                 </a:solidFill>
                 <a:latin typeface="Inter"/>
               </a:defRPr>
@@ -7124,7 +7124,7 @@
               </a:spcAft>
               <a:defRPr sz="1400">
                 <a:solidFill>
-                  <a:srgbClr val="475569"/>
+                  <a:srgbClr val="3A4A66"/>
                 </a:solidFill>
                 <a:latin typeface="Inter"/>
               </a:defRPr>
@@ -7143,7 +7143,7 @@
               </a:spcAft>
               <a:defRPr sz="1400">
                 <a:solidFill>
-                  <a:srgbClr val="475569"/>
+                  <a:srgbClr val="3A4A66"/>
                 </a:solidFill>
                 <a:latin typeface="Inter"/>
               </a:defRPr>
@@ -7162,7 +7162,7 @@
               </a:spcAft>
               <a:defRPr sz="1400">
                 <a:solidFill>
-                  <a:srgbClr val="475569"/>
+                  <a:srgbClr val="3A4A66"/>
                 </a:solidFill>
                 <a:latin typeface="Inter"/>
               </a:defRPr>
@@ -7181,7 +7181,7 @@
               </a:spcAft>
               <a:defRPr sz="1400">
                 <a:solidFill>
-                  <a:srgbClr val="475569"/>
+                  <a:srgbClr val="3A4A66"/>
                 </a:solidFill>
                 <a:latin typeface="Inter"/>
               </a:defRPr>
@@ -7209,7 +7209,7 @@
             </a:avLst>
           </a:prstGeom>
           <a:solidFill>
-            <a:srgbClr val="EEF2FF"/>
+            <a:srgbClr val="EEF4FD"/>
           </a:solidFill>
           <a:ln>
             <a:noFill/>
@@ -7266,7 +7266,7 @@
               </a:lnSpc>
               <a:defRPr sz="1300" b="0">
                 <a:solidFill>
-                  <a:srgbClr val="1D4ED8"/>
+                  <a:srgbClr val="1668DC"/>
                 </a:solidFill>
                 <a:latin typeface="Inter"/>
               </a:defRPr>
@@ -7282,7 +7282,7 @@
               </a:lnSpc>
               <a:defRPr sz="1300" b="0">
                 <a:solidFill>
-                  <a:srgbClr val="1D4ED8"/>
+                  <a:srgbClr val="1668DC"/>
                 </a:solidFill>
                 <a:latin typeface="Inter"/>
               </a:defRPr>
@@ -7321,7 +7321,7 @@
               </a:lnSpc>
               <a:defRPr sz="900" b="0">
                 <a:solidFill>
-                  <a:srgbClr val="8A94A6"/>
+                  <a:srgbClr val="7A88A0"/>
                 </a:solidFill>
                 <a:latin typeface="Inter"/>
               </a:defRPr>
@@ -7360,7 +7360,7 @@
               </a:lnSpc>
               <a:defRPr sz="900" b="0">
                 <a:solidFill>
-                  <a:srgbClr val="8A94A6"/>
+                  <a:srgbClr val="7A88A0"/>
                 </a:solidFill>
                 <a:latin typeface="Inter"/>
               </a:defRPr>
@@ -7425,7 +7425,7 @@
               </a:lnSpc>
               <a:defRPr sz="1100" b="1">
                 <a:solidFill>
-                  <a:srgbClr val="1D4ED8"/>
+                  <a:srgbClr val="1668DC"/>
                 </a:solidFill>
                 <a:latin typeface="Inter"/>
               </a:defRPr>
@@ -7464,7 +7464,7 @@
               </a:lnSpc>
               <a:defRPr sz="3000" b="1">
                 <a:solidFill>
-                  <a:srgbClr val="0F172A"/>
+                  <a:srgbClr val="0B3375"/>
                 </a:solidFill>
                 <a:latin typeface="Manrope"/>
               </a:defRPr>
@@ -7503,7 +7503,7 @@
               </a:lnSpc>
               <a:defRPr sz="1400" b="0">
                 <a:solidFill>
-                  <a:srgbClr val="475569"/>
+                  <a:srgbClr val="3A4A66"/>
                 </a:solidFill>
                 <a:latin typeface="Inter"/>
               </a:defRPr>
@@ -7614,7 +7614,7 @@
               </a:lnSpc>
               <a:defRPr sz="900" b="0">
                 <a:solidFill>
-                  <a:srgbClr val="8A94A6"/>
+                  <a:srgbClr val="7A88A0"/>
                 </a:solidFill>
                 <a:latin typeface="Inter"/>
               </a:defRPr>
@@ -7642,7 +7642,7 @@
             </a:avLst>
           </a:prstGeom>
           <a:solidFill>
-            <a:srgbClr val="F7F9FC"/>
+            <a:srgbClr val="F5F7FB"/>
           </a:solidFill>
           <a:ln w="12700">
             <a:solidFill>
@@ -7701,7 +7701,7 @@
               </a:lnSpc>
               <a:defRPr sz="1200" b="1">
                 <a:solidFill>
-                  <a:srgbClr val="1D4ED8"/>
+                  <a:srgbClr val="1668DC"/>
                 </a:solidFill>
                 <a:latin typeface="Inter"/>
               </a:defRPr>
@@ -7740,7 +7740,7 @@
               </a:lnSpc>
               <a:defRPr sz="1300" b="1">
                 <a:solidFill>
-                  <a:srgbClr val="0F172A"/>
+                  <a:srgbClr val="0B3375"/>
                 </a:solidFill>
                 <a:latin typeface="Inter"/>
               </a:defRPr>
@@ -7768,7 +7768,7 @@
             </a:avLst>
           </a:prstGeom>
           <a:solidFill>
-            <a:srgbClr val="F7F9FC"/>
+            <a:srgbClr val="F5F7FB"/>
           </a:solidFill>
           <a:ln w="12700">
             <a:solidFill>
@@ -7827,7 +7827,7 @@
               </a:lnSpc>
               <a:defRPr sz="1200" b="1">
                 <a:solidFill>
-                  <a:srgbClr val="1D4ED8"/>
+                  <a:srgbClr val="1668DC"/>
                 </a:solidFill>
                 <a:latin typeface="Inter"/>
               </a:defRPr>
@@ -7866,7 +7866,7 @@
               </a:lnSpc>
               <a:defRPr sz="1300" b="1">
                 <a:solidFill>
-                  <a:srgbClr val="0F172A"/>
+                  <a:srgbClr val="0B3375"/>
                 </a:solidFill>
                 <a:latin typeface="Inter"/>
               </a:defRPr>
@@ -7894,7 +7894,7 @@
             </a:avLst>
           </a:prstGeom>
           <a:solidFill>
-            <a:srgbClr val="F7F9FC"/>
+            <a:srgbClr val="F5F7FB"/>
           </a:solidFill>
           <a:ln w="12700">
             <a:solidFill>
@@ -7953,7 +7953,7 @@
               </a:lnSpc>
               <a:defRPr sz="1200" b="1">
                 <a:solidFill>
-                  <a:srgbClr val="1D4ED8"/>
+                  <a:srgbClr val="1668DC"/>
                 </a:solidFill>
                 <a:latin typeface="Inter"/>
               </a:defRPr>
@@ -7992,7 +7992,7 @@
               </a:lnSpc>
               <a:defRPr sz="1300" b="1">
                 <a:solidFill>
-                  <a:srgbClr val="0F172A"/>
+                  <a:srgbClr val="0B3375"/>
                 </a:solidFill>
                 <a:latin typeface="Inter"/>
               </a:defRPr>
@@ -8020,7 +8020,7 @@
             </a:avLst>
           </a:prstGeom>
           <a:solidFill>
-            <a:srgbClr val="F7F9FC"/>
+            <a:srgbClr val="F5F7FB"/>
           </a:solidFill>
           <a:ln w="12700">
             <a:solidFill>
@@ -8079,7 +8079,7 @@
               </a:lnSpc>
               <a:defRPr sz="1200" b="1">
                 <a:solidFill>
-                  <a:srgbClr val="1D4ED8"/>
+                  <a:srgbClr val="1668DC"/>
                 </a:solidFill>
                 <a:latin typeface="Inter"/>
               </a:defRPr>
@@ -8118,7 +8118,7 @@
               </a:lnSpc>
               <a:defRPr sz="1300" b="1">
                 <a:solidFill>
-                  <a:srgbClr val="0F172A"/>
+                  <a:srgbClr val="0B3375"/>
                 </a:solidFill>
                 <a:latin typeface="Inter"/>
               </a:defRPr>
@@ -8146,7 +8146,7 @@
             </a:avLst>
           </a:prstGeom>
           <a:solidFill>
-            <a:srgbClr val="F7F9FC"/>
+            <a:srgbClr val="F5F7FB"/>
           </a:solidFill>
           <a:ln w="12700">
             <a:solidFill>
@@ -8205,7 +8205,7 @@
               </a:lnSpc>
               <a:defRPr sz="1200" b="1">
                 <a:solidFill>
-                  <a:srgbClr val="1D4ED8"/>
+                  <a:srgbClr val="1668DC"/>
                 </a:solidFill>
                 <a:latin typeface="Inter"/>
               </a:defRPr>
@@ -8244,7 +8244,7 @@
               </a:lnSpc>
               <a:defRPr sz="1300" b="1">
                 <a:solidFill>
-                  <a:srgbClr val="0F172A"/>
+                  <a:srgbClr val="0B3375"/>
                 </a:solidFill>
                 <a:latin typeface="Inter"/>
               </a:defRPr>
@@ -8272,7 +8272,7 @@
             </a:avLst>
           </a:prstGeom>
           <a:solidFill>
-            <a:srgbClr val="F7F9FC"/>
+            <a:srgbClr val="F5F7FB"/>
           </a:solidFill>
           <a:ln w="12700">
             <a:solidFill>
@@ -8331,7 +8331,7 @@
               </a:lnSpc>
               <a:defRPr sz="1200" b="1">
                 <a:solidFill>
-                  <a:srgbClr val="1D4ED8"/>
+                  <a:srgbClr val="1668DC"/>
                 </a:solidFill>
                 <a:latin typeface="Inter"/>
               </a:defRPr>
@@ -8370,7 +8370,7 @@
               </a:lnSpc>
               <a:defRPr sz="1300" b="1">
                 <a:solidFill>
-                  <a:srgbClr val="0F172A"/>
+                  <a:srgbClr val="0B3375"/>
                 </a:solidFill>
                 <a:latin typeface="Inter"/>
               </a:defRPr>
@@ -8409,7 +8409,7 @@
               </a:lnSpc>
               <a:defRPr sz="1200" b="0">
                 <a:solidFill>
-                  <a:srgbClr val="8A94A6"/>
+                  <a:srgbClr val="7A88A0"/>
                 </a:solidFill>
                 <a:latin typeface="Inter"/>
               </a:defRPr>
@@ -8425,7 +8425,7 @@
               </a:lnSpc>
               <a:defRPr sz="1200" b="0">
                 <a:solidFill>
-                  <a:srgbClr val="8A94A6"/>
+                  <a:srgbClr val="7A88A0"/>
                 </a:solidFill>
                 <a:latin typeface="Inter"/>
               </a:defRPr>
@@ -8464,7 +8464,7 @@
               </a:lnSpc>
               <a:defRPr sz="900" b="0">
                 <a:solidFill>
-                  <a:srgbClr val="8A94A6"/>
+                  <a:srgbClr val="7A88A0"/>
                 </a:solidFill>
                 <a:latin typeface="Inter"/>
               </a:defRPr>
@@ -8503,7 +8503,7 @@
               </a:lnSpc>
               <a:defRPr sz="900" b="0">
                 <a:solidFill>
-                  <a:srgbClr val="8A94A6"/>
+                  <a:srgbClr val="7A88A0"/>
                 </a:solidFill>
                 <a:latin typeface="Inter"/>
               </a:defRPr>
@@ -8568,7 +8568,7 @@
               </a:lnSpc>
               <a:defRPr sz="1100" b="1">
                 <a:solidFill>
-                  <a:srgbClr val="1D4ED8"/>
+                  <a:srgbClr val="1668DC"/>
                 </a:solidFill>
                 <a:latin typeface="Inter"/>
               </a:defRPr>
@@ -8607,7 +8607,7 @@
               </a:lnSpc>
               <a:defRPr sz="3000" b="1">
                 <a:solidFill>
-                  <a:srgbClr val="0F172A"/>
+                  <a:srgbClr val="0B3375"/>
                 </a:solidFill>
                 <a:latin typeface="Manrope"/>
               </a:defRPr>
@@ -8646,7 +8646,7 @@
               </a:lnSpc>
               <a:defRPr sz="1400" b="0">
                 <a:solidFill>
-                  <a:srgbClr val="475569"/>
+                  <a:srgbClr val="3A4A66"/>
                 </a:solidFill>
                 <a:latin typeface="Inter"/>
               </a:defRPr>
@@ -8674,7 +8674,7 @@
             </a:avLst>
           </a:prstGeom>
           <a:solidFill>
-            <a:srgbClr val="F7F9FC"/>
+            <a:srgbClr val="F5F7FB"/>
           </a:solidFill>
           <a:ln w="12700">
             <a:solidFill>
@@ -8733,7 +8733,7 @@
               </a:lnSpc>
               <a:defRPr sz="1500" b="1">
                 <a:solidFill>
-                  <a:srgbClr val="0F172A"/>
+                  <a:srgbClr val="0B3375"/>
                 </a:solidFill>
                 <a:latin typeface="Inter"/>
               </a:defRPr>
@@ -8772,7 +8772,7 @@
               </a:lnSpc>
               <a:defRPr sz="1200" b="0">
                 <a:solidFill>
-                  <a:srgbClr val="475569"/>
+                  <a:srgbClr val="3A4A66"/>
                 </a:solidFill>
                 <a:latin typeface="Inter"/>
               </a:defRPr>
@@ -8800,7 +8800,7 @@
             </a:avLst>
           </a:prstGeom>
           <a:solidFill>
-            <a:srgbClr val="F7F9FC"/>
+            <a:srgbClr val="F5F7FB"/>
           </a:solidFill>
           <a:ln w="12700">
             <a:solidFill>
@@ -8859,7 +8859,7 @@
               </a:lnSpc>
               <a:defRPr sz="1500" b="1">
                 <a:solidFill>
-                  <a:srgbClr val="0F172A"/>
+                  <a:srgbClr val="0B3375"/>
                 </a:solidFill>
                 <a:latin typeface="Inter"/>
               </a:defRPr>
@@ -8898,7 +8898,7 @@
               </a:lnSpc>
               <a:defRPr sz="1200" b="0">
                 <a:solidFill>
-                  <a:srgbClr val="475569"/>
+                  <a:srgbClr val="3A4A66"/>
                 </a:solidFill>
                 <a:latin typeface="Inter"/>
               </a:defRPr>
@@ -8926,7 +8926,7 @@
             </a:avLst>
           </a:prstGeom>
           <a:solidFill>
-            <a:srgbClr val="F7F9FC"/>
+            <a:srgbClr val="F5F7FB"/>
           </a:solidFill>
           <a:ln w="12700">
             <a:solidFill>
@@ -8985,7 +8985,7 @@
               </a:lnSpc>
               <a:defRPr sz="1500" b="1">
                 <a:solidFill>
-                  <a:srgbClr val="0F172A"/>
+                  <a:srgbClr val="0B3375"/>
                 </a:solidFill>
                 <a:latin typeface="Inter"/>
               </a:defRPr>
@@ -9024,7 +9024,7 @@
               </a:lnSpc>
               <a:defRPr sz="1200" b="0">
                 <a:solidFill>
-                  <a:srgbClr val="475569"/>
+                  <a:srgbClr val="3A4A66"/>
                 </a:solidFill>
                 <a:latin typeface="Inter"/>
               </a:defRPr>
@@ -9052,7 +9052,7 @@
             </a:avLst>
           </a:prstGeom>
           <a:solidFill>
-            <a:srgbClr val="F7F9FC"/>
+            <a:srgbClr val="F5F7FB"/>
           </a:solidFill>
           <a:ln w="12700">
             <a:solidFill>
@@ -9111,7 +9111,7 @@
               </a:lnSpc>
               <a:defRPr sz="1500" b="1">
                 <a:solidFill>
-                  <a:srgbClr val="0F172A"/>
+                  <a:srgbClr val="0B3375"/>
                 </a:solidFill>
                 <a:latin typeface="Inter"/>
               </a:defRPr>
@@ -9150,7 +9150,7 @@
               </a:lnSpc>
               <a:defRPr sz="1200" b="0">
                 <a:solidFill>
-                  <a:srgbClr val="475569"/>
+                  <a:srgbClr val="3A4A66"/>
                 </a:solidFill>
                 <a:latin typeface="Inter"/>
               </a:defRPr>
@@ -9178,7 +9178,7 @@
             </a:avLst>
           </a:prstGeom>
           <a:solidFill>
-            <a:srgbClr val="EEF2FF"/>
+            <a:srgbClr val="EEF4FD"/>
           </a:solidFill>
           <a:ln>
             <a:noFill/>
@@ -9235,7 +9235,7 @@
               </a:lnSpc>
               <a:defRPr sz="1300" b="1">
                 <a:solidFill>
-                  <a:srgbClr val="1D4ED8"/>
+                  <a:srgbClr val="1668DC"/>
                 </a:solidFill>
                 <a:latin typeface="Inter"/>
               </a:defRPr>
@@ -9274,7 +9274,7 @@
               </a:lnSpc>
               <a:defRPr sz="1400" b="0">
                 <a:solidFill>
-                  <a:srgbClr val="0F172A"/>
+                  <a:srgbClr val="0B3375"/>
                 </a:solidFill>
                 <a:latin typeface="Inter"/>
               </a:defRPr>
@@ -9290,7 +9290,7 @@
               </a:lnSpc>
               <a:defRPr sz="1400" b="0">
                 <a:solidFill>
-                  <a:srgbClr val="0F172A"/>
+                  <a:srgbClr val="0B3375"/>
                 </a:solidFill>
                 <a:latin typeface="Inter"/>
               </a:defRPr>
@@ -9329,7 +9329,7 @@
               </a:lnSpc>
               <a:defRPr sz="900" b="0">
                 <a:solidFill>
-                  <a:srgbClr val="8A94A6"/>
+                  <a:srgbClr val="7A88A0"/>
                 </a:solidFill>
                 <a:latin typeface="Inter"/>
               </a:defRPr>
@@ -9368,7 +9368,7 @@
               </a:lnSpc>
               <a:defRPr sz="900" b="0">
                 <a:solidFill>
-                  <a:srgbClr val="8A94A6"/>
+                  <a:srgbClr val="7A88A0"/>
                 </a:solidFill>
                 <a:latin typeface="Inter"/>
               </a:defRPr>
@@ -9433,7 +9433,7 @@
               </a:lnSpc>
               <a:defRPr sz="1100" b="1">
                 <a:solidFill>
-                  <a:srgbClr val="1D4ED8"/>
+                  <a:srgbClr val="1668DC"/>
                 </a:solidFill>
                 <a:latin typeface="Inter"/>
               </a:defRPr>
@@ -9472,7 +9472,7 @@
               </a:lnSpc>
               <a:defRPr sz="3000" b="1">
                 <a:solidFill>
-                  <a:srgbClr val="0F172A"/>
+                  <a:srgbClr val="0B3375"/>
                 </a:solidFill>
                 <a:latin typeface="Manrope"/>
               </a:defRPr>
@@ -9583,7 +9583,7 @@
               </a:lnSpc>
               <a:defRPr sz="900" b="0">
                 <a:solidFill>
-                  <a:srgbClr val="8A94A6"/>
+                  <a:srgbClr val="7A88A0"/>
                 </a:solidFill>
                 <a:latin typeface="Inter"/>
               </a:defRPr>
@@ -9625,7 +9625,7 @@
               </a:spcAft>
               <a:defRPr sz="1400">
                 <a:solidFill>
-                  <a:srgbClr val="475569"/>
+                  <a:srgbClr val="3A4A66"/>
                 </a:solidFill>
                 <a:latin typeface="Inter"/>
               </a:defRPr>
@@ -9644,7 +9644,7 @@
               </a:spcAft>
               <a:defRPr sz="1400">
                 <a:solidFill>
-                  <a:srgbClr val="475569"/>
+                  <a:srgbClr val="3A4A66"/>
                 </a:solidFill>
                 <a:latin typeface="Inter"/>
               </a:defRPr>
@@ -9663,7 +9663,7 @@
               </a:spcAft>
               <a:defRPr sz="1400">
                 <a:solidFill>
-                  <a:srgbClr val="475569"/>
+                  <a:srgbClr val="3A4A66"/>
                 </a:solidFill>
                 <a:latin typeface="Inter"/>
               </a:defRPr>
@@ -9682,7 +9682,7 @@
               </a:spcAft>
               <a:defRPr sz="1400">
                 <a:solidFill>
-                  <a:srgbClr val="475569"/>
+                  <a:srgbClr val="3A4A66"/>
                 </a:solidFill>
                 <a:latin typeface="Inter"/>
               </a:defRPr>
@@ -9721,7 +9721,7 @@
               </a:lnSpc>
               <a:defRPr sz="900" b="0">
                 <a:solidFill>
-                  <a:srgbClr val="8A94A6"/>
+                  <a:srgbClr val="7A88A0"/>
                 </a:solidFill>
                 <a:latin typeface="Inter"/>
               </a:defRPr>
@@ -9760,7 +9760,7 @@
               </a:lnSpc>
               <a:defRPr sz="900" b="0">
                 <a:solidFill>
-                  <a:srgbClr val="8A94A6"/>
+                  <a:srgbClr val="7A88A0"/>
                 </a:solidFill>
                 <a:latin typeface="Inter"/>
               </a:defRPr>
@@ -9825,7 +9825,7 @@
               </a:lnSpc>
               <a:defRPr sz="1100" b="1">
                 <a:solidFill>
-                  <a:srgbClr val="1D4ED8"/>
+                  <a:srgbClr val="1668DC"/>
                 </a:solidFill>
                 <a:latin typeface="Inter"/>
               </a:defRPr>
@@ -9864,7 +9864,7 @@
               </a:lnSpc>
               <a:defRPr sz="3000" b="1">
                 <a:solidFill>
-                  <a:srgbClr val="0F172A"/>
+                  <a:srgbClr val="0B3375"/>
                 </a:solidFill>
                 <a:latin typeface="Manrope"/>
               </a:defRPr>
@@ -9975,7 +9975,7 @@
               </a:lnSpc>
               <a:defRPr sz="900" b="0">
                 <a:solidFill>
-                  <a:srgbClr val="8A94A6"/>
+                  <a:srgbClr val="7A88A0"/>
                 </a:solidFill>
                 <a:latin typeface="Inter"/>
               </a:defRPr>
@@ -10003,7 +10003,7 @@
             </a:avLst>
           </a:prstGeom>
           <a:solidFill>
-            <a:srgbClr val="EEF2FF"/>
+            <a:srgbClr val="EEF4FD"/>
           </a:solidFill>
           <a:ln>
             <a:noFill/>
@@ -10060,7 +10060,7 @@
               </a:lnSpc>
               <a:defRPr sz="1200" b="1">
                 <a:solidFill>
-                  <a:srgbClr val="1D4ED8"/>
+                  <a:srgbClr val="1668DC"/>
                 </a:solidFill>
                 <a:latin typeface="Inter"/>
               </a:defRPr>
@@ -10099,7 +10099,7 @@
               </a:lnSpc>
               <a:defRPr sz="1200" b="1">
                 <a:solidFill>
-                  <a:srgbClr val="1D4ED8"/>
+                  <a:srgbClr val="1668DC"/>
                 </a:solidFill>
                 <a:latin typeface="Inter"/>
               </a:defRPr>
@@ -10138,7 +10138,7 @@
               </a:lnSpc>
               <a:defRPr sz="1200" b="0">
                 <a:solidFill>
-                  <a:srgbClr val="0F172A"/>
+                  <a:srgbClr val="0B3375"/>
                 </a:solidFill>
                 <a:latin typeface="Inter"/>
               </a:defRPr>
@@ -10177,7 +10177,7 @@
               </a:lnSpc>
               <a:defRPr sz="1200" b="1">
                 <a:solidFill>
-                  <a:srgbClr val="1D4ED8"/>
+                  <a:srgbClr val="1668DC"/>
                 </a:solidFill>
                 <a:latin typeface="Inter"/>
               </a:defRPr>
@@ -10216,7 +10216,7 @@
               </a:lnSpc>
               <a:defRPr sz="1200" b="0">
                 <a:solidFill>
-                  <a:srgbClr val="0F172A"/>
+                  <a:srgbClr val="0B3375"/>
                 </a:solidFill>
                 <a:latin typeface="Inter"/>
               </a:defRPr>
@@ -10255,7 +10255,7 @@
               </a:lnSpc>
               <a:defRPr sz="1200" b="1">
                 <a:solidFill>
-                  <a:srgbClr val="1D4ED8"/>
+                  <a:srgbClr val="1668DC"/>
                 </a:solidFill>
                 <a:latin typeface="Inter"/>
               </a:defRPr>
@@ -10294,7 +10294,7 @@
               </a:lnSpc>
               <a:defRPr sz="1200" b="0">
                 <a:solidFill>
-                  <a:srgbClr val="0F172A"/>
+                  <a:srgbClr val="0B3375"/>
                 </a:solidFill>
                 <a:latin typeface="Inter"/>
               </a:defRPr>
@@ -10333,7 +10333,7 @@
               </a:lnSpc>
               <a:defRPr sz="1200" b="1">
                 <a:solidFill>
-                  <a:srgbClr val="1D4ED8"/>
+                  <a:srgbClr val="1668DC"/>
                 </a:solidFill>
                 <a:latin typeface="Inter"/>
               </a:defRPr>
@@ -10372,7 +10372,7 @@
               </a:lnSpc>
               <a:defRPr sz="1200" b="0">
                 <a:solidFill>
-                  <a:srgbClr val="0F172A"/>
+                  <a:srgbClr val="0B3375"/>
                 </a:solidFill>
                 <a:latin typeface="Inter"/>
               </a:defRPr>
@@ -10411,7 +10411,7 @@
               </a:lnSpc>
               <a:defRPr sz="1300" b="0">
                 <a:solidFill>
-                  <a:srgbClr val="475569"/>
+                  <a:srgbClr val="3A4A66"/>
                 </a:solidFill>
                 <a:latin typeface="Inter"/>
               </a:defRPr>
@@ -10427,7 +10427,7 @@
               </a:lnSpc>
               <a:defRPr sz="1300" b="0">
                 <a:solidFill>
-                  <a:srgbClr val="475569"/>
+                  <a:srgbClr val="3A4A66"/>
                 </a:solidFill>
                 <a:latin typeface="Inter"/>
               </a:defRPr>
@@ -10443,7 +10443,7 @@
               </a:lnSpc>
               <a:defRPr sz="1300" b="0">
                 <a:solidFill>
-                  <a:srgbClr val="475569"/>
+                  <a:srgbClr val="3A4A66"/>
                 </a:solidFill>
                 <a:latin typeface="Inter"/>
               </a:defRPr>
@@ -10482,7 +10482,7 @@
               </a:lnSpc>
               <a:defRPr sz="900" b="0">
                 <a:solidFill>
-                  <a:srgbClr val="8A94A6"/>
+                  <a:srgbClr val="7A88A0"/>
                 </a:solidFill>
                 <a:latin typeface="Inter"/>
               </a:defRPr>
@@ -10521,7 +10521,7 @@
               </a:lnSpc>
               <a:defRPr sz="900" b="0">
                 <a:solidFill>
-                  <a:srgbClr val="8A94A6"/>
+                  <a:srgbClr val="7A88A0"/>
                 </a:solidFill>
                 <a:latin typeface="Inter"/>
               </a:defRPr>
@@ -10586,7 +10586,7 @@
               </a:lnSpc>
               <a:defRPr sz="1100" b="1">
                 <a:solidFill>
-                  <a:srgbClr val="1D4ED8"/>
+                  <a:srgbClr val="1668DC"/>
                 </a:solidFill>
                 <a:latin typeface="Inter"/>
               </a:defRPr>
@@ -10625,7 +10625,7 @@
               </a:lnSpc>
               <a:defRPr sz="3000" b="1">
                 <a:solidFill>
-                  <a:srgbClr val="0F172A"/>
+                  <a:srgbClr val="0B3375"/>
                 </a:solidFill>
                 <a:latin typeface="Manrope"/>
               </a:defRPr>
@@ -10736,7 +10736,7 @@
               </a:lnSpc>
               <a:defRPr sz="900" b="0">
                 <a:solidFill>
-                  <a:srgbClr val="8A94A6"/>
+                  <a:srgbClr val="7A88A0"/>
                 </a:solidFill>
                 <a:latin typeface="Inter"/>
               </a:defRPr>
@@ -10778,7 +10778,7 @@
               </a:spcAft>
               <a:defRPr sz="1400">
                 <a:solidFill>
-                  <a:srgbClr val="475569"/>
+                  <a:srgbClr val="3A4A66"/>
                 </a:solidFill>
                 <a:latin typeface="Inter"/>
               </a:defRPr>
@@ -10797,7 +10797,7 @@
               </a:spcAft>
               <a:defRPr sz="1400">
                 <a:solidFill>
-                  <a:srgbClr val="475569"/>
+                  <a:srgbClr val="3A4A66"/>
                 </a:solidFill>
                 <a:latin typeface="Inter"/>
               </a:defRPr>
@@ -10816,7 +10816,7 @@
               </a:spcAft>
               <a:defRPr sz="1400">
                 <a:solidFill>
-                  <a:srgbClr val="475569"/>
+                  <a:srgbClr val="3A4A66"/>
                 </a:solidFill>
                 <a:latin typeface="Inter"/>
               </a:defRPr>
@@ -10835,7 +10835,7 @@
               </a:spcAft>
               <a:defRPr sz="1400">
                 <a:solidFill>
-                  <a:srgbClr val="475569"/>
+                  <a:srgbClr val="3A4A66"/>
                 </a:solidFill>
                 <a:latin typeface="Inter"/>
               </a:defRPr>
@@ -10874,7 +10874,7 @@
               </a:lnSpc>
               <a:defRPr sz="900" b="0">
                 <a:solidFill>
-                  <a:srgbClr val="8A94A6"/>
+                  <a:srgbClr val="7A88A0"/>
                 </a:solidFill>
                 <a:latin typeface="Inter"/>
               </a:defRPr>
@@ -10913,7 +10913,7 @@
               </a:lnSpc>
               <a:defRPr sz="900" b="0">
                 <a:solidFill>
-                  <a:srgbClr val="8A94A6"/>
+                  <a:srgbClr val="7A88A0"/>
                 </a:solidFill>
                 <a:latin typeface="Inter"/>
               </a:defRPr>
@@ -10978,7 +10978,7 @@
               </a:lnSpc>
               <a:defRPr sz="1100" b="1">
                 <a:solidFill>
-                  <a:srgbClr val="1D4ED8"/>
+                  <a:srgbClr val="1668DC"/>
                 </a:solidFill>
                 <a:latin typeface="Inter"/>
               </a:defRPr>
@@ -11017,7 +11017,7 @@
               </a:lnSpc>
               <a:defRPr sz="3000" b="1">
                 <a:solidFill>
-                  <a:srgbClr val="0F172A"/>
+                  <a:srgbClr val="0B3375"/>
                 </a:solidFill>
                 <a:latin typeface="Manrope"/>
               </a:defRPr>
@@ -11128,7 +11128,7 @@
               </a:lnSpc>
               <a:defRPr sz="900" b="0">
                 <a:solidFill>
-                  <a:srgbClr val="8A94A6"/>
+                  <a:srgbClr val="7A88A0"/>
                 </a:solidFill>
                 <a:latin typeface="Inter"/>
               </a:defRPr>
@@ -11170,7 +11170,7 @@
               </a:spcAft>
               <a:defRPr sz="1400">
                 <a:solidFill>
-                  <a:srgbClr val="475569"/>
+                  <a:srgbClr val="3A4A66"/>
                 </a:solidFill>
                 <a:latin typeface="Inter"/>
               </a:defRPr>
@@ -11189,7 +11189,7 @@
               </a:spcAft>
               <a:defRPr sz="1400">
                 <a:solidFill>
-                  <a:srgbClr val="475569"/>
+                  <a:srgbClr val="3A4A66"/>
                 </a:solidFill>
                 <a:latin typeface="Inter"/>
               </a:defRPr>
@@ -11208,7 +11208,7 @@
               </a:spcAft>
               <a:defRPr sz="1400">
                 <a:solidFill>
-                  <a:srgbClr val="475569"/>
+                  <a:srgbClr val="3A4A66"/>
                 </a:solidFill>
                 <a:latin typeface="Inter"/>
               </a:defRPr>
@@ -11227,7 +11227,7 @@
               </a:spcAft>
               <a:defRPr sz="1400">
                 <a:solidFill>
-                  <a:srgbClr val="475569"/>
+                  <a:srgbClr val="3A4A66"/>
                 </a:solidFill>
                 <a:latin typeface="Inter"/>
               </a:defRPr>
@@ -11266,7 +11266,7 @@
               </a:lnSpc>
               <a:defRPr sz="900" b="0">
                 <a:solidFill>
-                  <a:srgbClr val="8A94A6"/>
+                  <a:srgbClr val="7A88A0"/>
                 </a:solidFill>
                 <a:latin typeface="Inter"/>
               </a:defRPr>
@@ -11305,7 +11305,7 @@
               </a:lnSpc>
               <a:defRPr sz="900" b="0">
                 <a:solidFill>
-                  <a:srgbClr val="8A94A6"/>
+                  <a:srgbClr val="7A88A0"/>
                 </a:solidFill>
                 <a:latin typeface="Inter"/>
               </a:defRPr>
@@ -11370,7 +11370,7 @@
               </a:lnSpc>
               <a:defRPr sz="1100" b="1">
                 <a:solidFill>
-                  <a:srgbClr val="1D4ED8"/>
+                  <a:srgbClr val="1668DC"/>
                 </a:solidFill>
                 <a:latin typeface="Inter"/>
               </a:defRPr>
@@ -11409,7 +11409,7 @@
               </a:lnSpc>
               <a:defRPr sz="3000" b="1">
                 <a:solidFill>
-                  <a:srgbClr val="0F172A"/>
+                  <a:srgbClr val="0B3375"/>
                 </a:solidFill>
                 <a:latin typeface="Manrope"/>
               </a:defRPr>
@@ -11448,7 +11448,7 @@
               </a:lnSpc>
               <a:defRPr sz="1400" b="0">
                 <a:solidFill>
-                  <a:srgbClr val="475569"/>
+                  <a:srgbClr val="3A4A66"/>
                 </a:solidFill>
                 <a:latin typeface="Inter"/>
               </a:defRPr>
@@ -11480,7 +11480,7 @@
           </a:solidFill>
           <a:ln w="12700">
             <a:solidFill>
-              <a:srgbClr val="1D4ED8"/>
+              <a:srgbClr val="1668DC"/>
             </a:solidFill>
           </a:ln>
           <a:effectLst/>
@@ -11524,7 +11524,7 @@
             </a:avLst>
           </a:prstGeom>
           <a:solidFill>
-            <a:srgbClr val="1D4ED8"/>
+            <a:srgbClr val="1668DC"/>
           </a:solidFill>
           <a:ln>
             <a:noFill/>
@@ -11581,7 +11581,7 @@
               </a:lnSpc>
               <a:defRPr sz="1300" b="1">
                 <a:solidFill>
-                  <a:srgbClr val="1D4ED8"/>
+                  <a:srgbClr val="1668DC"/>
                 </a:solidFill>
                 <a:latin typeface="Inter"/>
               </a:defRPr>
@@ -11620,7 +11620,7 @@
               </a:lnSpc>
               <a:defRPr sz="1200" b="0">
                 <a:solidFill>
-                  <a:srgbClr val="475569"/>
+                  <a:srgbClr val="3A4A66"/>
                 </a:solidFill>
                 <a:latin typeface="Inter"/>
               </a:defRPr>
@@ -11636,7 +11636,7 @@
               </a:lnSpc>
               <a:defRPr sz="1200" b="0">
                 <a:solidFill>
-                  <a:srgbClr val="475569"/>
+                  <a:srgbClr val="3A4A66"/>
                 </a:solidFill>
                 <a:latin typeface="Inter"/>
               </a:defRPr>
@@ -11675,7 +11675,7 @@
               </a:lnSpc>
               <a:defRPr sz="2400" b="0">
                 <a:solidFill>
-                  <a:srgbClr val="8A94A6"/>
+                  <a:srgbClr val="7A88A0"/>
                 </a:solidFill>
                 <a:latin typeface="Inter"/>
               </a:defRPr>
@@ -11707,7 +11707,7 @@
           </a:solidFill>
           <a:ln w="12700">
             <a:solidFill>
-              <a:srgbClr val="0891B2"/>
+              <a:srgbClr val="35C6F3"/>
             </a:solidFill>
           </a:ln>
           <a:effectLst/>
@@ -11751,7 +11751,7 @@
             </a:avLst>
           </a:prstGeom>
           <a:solidFill>
-            <a:srgbClr val="0891B2"/>
+            <a:srgbClr val="35C6F3"/>
           </a:solidFill>
           <a:ln>
             <a:noFill/>
@@ -11808,7 +11808,7 @@
               </a:lnSpc>
               <a:defRPr sz="1300" b="1">
                 <a:solidFill>
-                  <a:srgbClr val="0891B2"/>
+                  <a:srgbClr val="35C6F3"/>
                 </a:solidFill>
                 <a:latin typeface="Inter"/>
               </a:defRPr>
@@ -11847,7 +11847,7 @@
               </a:lnSpc>
               <a:defRPr sz="1200" b="0">
                 <a:solidFill>
-                  <a:srgbClr val="475569"/>
+                  <a:srgbClr val="3A4A66"/>
                 </a:solidFill>
                 <a:latin typeface="Inter"/>
               </a:defRPr>
@@ -11863,7 +11863,7 @@
               </a:lnSpc>
               <a:defRPr sz="1200" b="0">
                 <a:solidFill>
-                  <a:srgbClr val="475569"/>
+                  <a:srgbClr val="3A4A66"/>
                 </a:solidFill>
                 <a:latin typeface="Inter"/>
               </a:defRPr>
@@ -11902,7 +11902,7 @@
               </a:lnSpc>
               <a:defRPr sz="2400" b="0">
                 <a:solidFill>
-                  <a:srgbClr val="8A94A6"/>
+                  <a:srgbClr val="7A88A0"/>
                 </a:solidFill>
                 <a:latin typeface="Inter"/>
               </a:defRPr>
@@ -11934,7 +11934,7 @@
           </a:solidFill>
           <a:ln w="12700">
             <a:solidFill>
-              <a:srgbClr val="057A55"/>
+              <a:srgbClr val="0F9B7A"/>
             </a:solidFill>
           </a:ln>
           <a:effectLst/>
@@ -11978,7 +11978,7 @@
             </a:avLst>
           </a:prstGeom>
           <a:solidFill>
-            <a:srgbClr val="057A55"/>
+            <a:srgbClr val="0F9B7A"/>
           </a:solidFill>
           <a:ln>
             <a:noFill/>
@@ -12035,7 +12035,7 @@
               </a:lnSpc>
               <a:defRPr sz="1300" b="1">
                 <a:solidFill>
-                  <a:srgbClr val="057A55"/>
+                  <a:srgbClr val="0F9B7A"/>
                 </a:solidFill>
                 <a:latin typeface="Inter"/>
               </a:defRPr>
@@ -12074,7 +12074,7 @@
               </a:lnSpc>
               <a:defRPr sz="1200" b="0">
                 <a:solidFill>
-                  <a:srgbClr val="475569"/>
+                  <a:srgbClr val="3A4A66"/>
                 </a:solidFill>
                 <a:latin typeface="Inter"/>
               </a:defRPr>
@@ -12090,7 +12090,7 @@
               </a:lnSpc>
               <a:defRPr sz="1200" b="0">
                 <a:solidFill>
-                  <a:srgbClr val="475569"/>
+                  <a:srgbClr val="3A4A66"/>
                 </a:solidFill>
                 <a:latin typeface="Inter"/>
               </a:defRPr>
@@ -12118,7 +12118,7 @@
             </a:avLst>
           </a:prstGeom>
           <a:solidFill>
-            <a:srgbClr val="F7F9FC"/>
+            <a:srgbClr val="F5F7FB"/>
           </a:solidFill>
           <a:ln>
             <a:noFill/>
@@ -12175,7 +12175,7 @@
               </a:lnSpc>
               <a:defRPr sz="1400" b="0">
                 <a:solidFill>
-                  <a:srgbClr val="0F172A"/>
+                  <a:srgbClr val="0B3375"/>
                 </a:solidFill>
                 <a:latin typeface="Inter"/>
               </a:defRPr>
@@ -12191,7 +12191,7 @@
               </a:lnSpc>
               <a:defRPr sz="1400" b="0">
                 <a:solidFill>
-                  <a:srgbClr val="0F172A"/>
+                  <a:srgbClr val="0B3375"/>
                 </a:solidFill>
                 <a:latin typeface="Inter"/>
               </a:defRPr>
@@ -12230,7 +12230,7 @@
               </a:lnSpc>
               <a:defRPr sz="1200" b="0">
                 <a:solidFill>
-                  <a:srgbClr val="8A94A6"/>
+                  <a:srgbClr val="7A88A0"/>
                 </a:solidFill>
                 <a:latin typeface="Inter"/>
               </a:defRPr>
@@ -12269,7 +12269,7 @@
               </a:lnSpc>
               <a:defRPr sz="900" b="0">
                 <a:solidFill>
-                  <a:srgbClr val="8A94A6"/>
+                  <a:srgbClr val="7A88A0"/>
                 </a:solidFill>
                 <a:latin typeface="Inter"/>
               </a:defRPr>
@@ -12308,7 +12308,7 @@
               </a:lnSpc>
               <a:defRPr sz="900" b="0">
                 <a:solidFill>
-                  <a:srgbClr val="8A94A6"/>
+                  <a:srgbClr val="7A88A0"/>
                 </a:solidFill>
                 <a:latin typeface="Inter"/>
               </a:defRPr>
@@ -12373,7 +12373,7 @@
               </a:lnSpc>
               <a:defRPr sz="1100" b="1">
                 <a:solidFill>
-                  <a:srgbClr val="1D4ED8"/>
+                  <a:srgbClr val="1668DC"/>
                 </a:solidFill>
                 <a:latin typeface="Inter"/>
               </a:defRPr>
@@ -12412,7 +12412,7 @@
               </a:lnSpc>
               <a:defRPr sz="3000" b="1">
                 <a:solidFill>
-                  <a:srgbClr val="0F172A"/>
+                  <a:srgbClr val="0B3375"/>
                 </a:solidFill>
                 <a:latin typeface="Manrope"/>
               </a:defRPr>
@@ -12523,7 +12523,7 @@
               </a:lnSpc>
               <a:defRPr sz="900" b="0">
                 <a:solidFill>
-                  <a:srgbClr val="8A94A6"/>
+                  <a:srgbClr val="7A88A0"/>
                 </a:solidFill>
                 <a:latin typeface="Inter"/>
               </a:defRPr>
@@ -12562,7 +12562,7 @@
               </a:lnSpc>
               <a:defRPr sz="1300" b="1">
                 <a:solidFill>
-                  <a:srgbClr val="1D4ED8"/>
+                  <a:srgbClr val="1668DC"/>
                 </a:solidFill>
                 <a:latin typeface="Inter"/>
               </a:defRPr>
@@ -12604,7 +12604,7 @@
               </a:spcAft>
               <a:defRPr sz="1400">
                 <a:solidFill>
-                  <a:srgbClr val="475569"/>
+                  <a:srgbClr val="3A4A66"/>
                 </a:solidFill>
                 <a:latin typeface="Inter"/>
               </a:defRPr>
@@ -12623,7 +12623,7 @@
               </a:spcAft>
               <a:defRPr sz="1400">
                 <a:solidFill>
-                  <a:srgbClr val="475569"/>
+                  <a:srgbClr val="3A4A66"/>
                 </a:solidFill>
                 <a:latin typeface="Inter"/>
               </a:defRPr>
@@ -12642,7 +12642,7 @@
               </a:spcAft>
               <a:defRPr sz="1400">
                 <a:solidFill>
-                  <a:srgbClr val="475569"/>
+                  <a:srgbClr val="3A4A66"/>
                 </a:solidFill>
                 <a:latin typeface="Inter"/>
               </a:defRPr>
@@ -12661,7 +12661,7 @@
               </a:spcAft>
               <a:defRPr sz="1400">
                 <a:solidFill>
-                  <a:srgbClr val="475569"/>
+                  <a:srgbClr val="3A4A66"/>
                 </a:solidFill>
                 <a:latin typeface="Inter"/>
               </a:defRPr>
@@ -12689,7 +12689,7 @@
             </a:avLst>
           </a:prstGeom>
           <a:solidFill>
-            <a:srgbClr val="057A55"/>
+            <a:srgbClr val="0F9B7A"/>
           </a:solidFill>
           <a:ln>
             <a:noFill/>
@@ -12801,7 +12801,7 @@
               </a:lnSpc>
               <a:defRPr sz="900" b="0">
                 <a:solidFill>
-                  <a:srgbClr val="8A94A6"/>
+                  <a:srgbClr val="7A88A0"/>
                 </a:solidFill>
                 <a:latin typeface="Inter"/>
               </a:defRPr>
@@ -12840,7 +12840,7 @@
               </a:lnSpc>
               <a:defRPr sz="900" b="0">
                 <a:solidFill>
-                  <a:srgbClr val="8A94A6"/>
+                  <a:srgbClr val="7A88A0"/>
                 </a:solidFill>
                 <a:latin typeface="Inter"/>
               </a:defRPr>
@@ -12905,7 +12905,7 @@
               </a:lnSpc>
               <a:defRPr sz="1100" b="1">
                 <a:solidFill>
-                  <a:srgbClr val="1D4ED8"/>
+                  <a:srgbClr val="1668DC"/>
                 </a:solidFill>
                 <a:latin typeface="Inter"/>
               </a:defRPr>
@@ -12944,7 +12944,7 @@
               </a:lnSpc>
               <a:defRPr sz="3000" b="1">
                 <a:solidFill>
-                  <a:srgbClr val="0F172A"/>
+                  <a:srgbClr val="0B3375"/>
                 </a:solidFill>
                 <a:latin typeface="Manrope"/>
               </a:defRPr>
@@ -13079,7 +13079,7 @@
               </a:lnSpc>
               <a:defRPr sz="900" b="0">
                 <a:solidFill>
-                  <a:srgbClr val="8A94A6"/>
+                  <a:srgbClr val="7A88A0"/>
                 </a:solidFill>
                 <a:latin typeface="Inter"/>
               </a:defRPr>
@@ -13166,7 +13166,7 @@
               </a:lnSpc>
               <a:defRPr sz="900" b="0">
                 <a:solidFill>
-                  <a:srgbClr val="8A94A6"/>
+                  <a:srgbClr val="7A88A0"/>
                 </a:solidFill>
                 <a:latin typeface="Inter"/>
               </a:defRPr>
@@ -13205,7 +13205,7 @@
               </a:lnSpc>
               <a:defRPr sz="1200" b="1">
                 <a:solidFill>
-                  <a:srgbClr val="1D4ED8"/>
+                  <a:srgbClr val="1668DC"/>
                 </a:solidFill>
                 <a:latin typeface="Inter"/>
               </a:defRPr>
@@ -13247,7 +13247,7 @@
               </a:spcAft>
               <a:defRPr sz="1200">
                 <a:solidFill>
-                  <a:srgbClr val="475569"/>
+                  <a:srgbClr val="3A4A66"/>
                 </a:solidFill>
                 <a:latin typeface="Inter"/>
               </a:defRPr>
@@ -13266,7 +13266,7 @@
               </a:spcAft>
               <a:defRPr sz="1200">
                 <a:solidFill>
-                  <a:srgbClr val="475569"/>
+                  <a:srgbClr val="3A4A66"/>
                 </a:solidFill>
                 <a:latin typeface="Inter"/>
               </a:defRPr>
@@ -13285,7 +13285,7 @@
               </a:spcAft>
               <a:defRPr sz="1200">
                 <a:solidFill>
-                  <a:srgbClr val="475569"/>
+                  <a:srgbClr val="3A4A66"/>
                 </a:solidFill>
                 <a:latin typeface="Inter"/>
               </a:defRPr>
@@ -13304,7 +13304,7 @@
               </a:spcAft>
               <a:defRPr sz="1200">
                 <a:solidFill>
-                  <a:srgbClr val="475569"/>
+                  <a:srgbClr val="3A4A66"/>
                 </a:solidFill>
                 <a:latin typeface="Inter"/>
               </a:defRPr>
@@ -13343,7 +13343,7 @@
               </a:lnSpc>
               <a:defRPr sz="900" b="0">
                 <a:solidFill>
-                  <a:srgbClr val="8A94A6"/>
+                  <a:srgbClr val="7A88A0"/>
                 </a:solidFill>
                 <a:latin typeface="Inter"/>
               </a:defRPr>
@@ -13382,7 +13382,7 @@
               </a:lnSpc>
               <a:defRPr sz="900" b="0">
                 <a:solidFill>
-                  <a:srgbClr val="8A94A6"/>
+                  <a:srgbClr val="7A88A0"/>
                 </a:solidFill>
                 <a:latin typeface="Inter"/>
               </a:defRPr>
@@ -13447,7 +13447,7 @@
               </a:lnSpc>
               <a:defRPr sz="1100" b="1">
                 <a:solidFill>
-                  <a:srgbClr val="1D4ED8"/>
+                  <a:srgbClr val="1668DC"/>
                 </a:solidFill>
                 <a:latin typeface="Inter"/>
               </a:defRPr>
@@ -13486,7 +13486,7 @@
               </a:lnSpc>
               <a:defRPr sz="3000" b="1">
                 <a:solidFill>
-                  <a:srgbClr val="0F172A"/>
+                  <a:srgbClr val="0B3375"/>
                 </a:solidFill>
                 <a:latin typeface="Manrope"/>
               </a:defRPr>
@@ -13597,7 +13597,7 @@
               </a:lnSpc>
               <a:defRPr sz="900" b="0">
                 <a:solidFill>
-                  <a:srgbClr val="8A94A6"/>
+                  <a:srgbClr val="7A88A0"/>
                 </a:solidFill>
                 <a:latin typeface="Inter"/>
               </a:defRPr>
@@ -13639,7 +13639,7 @@
               </a:spcAft>
               <a:defRPr sz="1400">
                 <a:solidFill>
-                  <a:srgbClr val="475569"/>
+                  <a:srgbClr val="3A4A66"/>
                 </a:solidFill>
                 <a:latin typeface="Inter"/>
               </a:defRPr>
@@ -13658,7 +13658,7 @@
               </a:spcAft>
               <a:defRPr sz="1400">
                 <a:solidFill>
-                  <a:srgbClr val="475569"/>
+                  <a:srgbClr val="3A4A66"/>
                 </a:solidFill>
                 <a:latin typeface="Inter"/>
               </a:defRPr>
@@ -13677,7 +13677,7 @@
               </a:spcAft>
               <a:defRPr sz="1400">
                 <a:solidFill>
-                  <a:srgbClr val="475569"/>
+                  <a:srgbClr val="3A4A66"/>
                 </a:solidFill>
                 <a:latin typeface="Inter"/>
               </a:defRPr>
@@ -13696,7 +13696,7 @@
               </a:spcAft>
               <a:defRPr sz="1400">
                 <a:solidFill>
-                  <a:srgbClr val="475569"/>
+                  <a:srgbClr val="3A4A66"/>
                 </a:solidFill>
                 <a:latin typeface="Inter"/>
               </a:defRPr>
@@ -13735,7 +13735,7 @@
               </a:lnSpc>
               <a:defRPr sz="1200" b="0">
                 <a:solidFill>
-                  <a:srgbClr val="8A94A6"/>
+                  <a:srgbClr val="7A88A0"/>
                 </a:solidFill>
                 <a:latin typeface="Inter"/>
               </a:defRPr>
@@ -13751,7 +13751,7 @@
               </a:lnSpc>
               <a:defRPr sz="1200" b="0">
                 <a:solidFill>
-                  <a:srgbClr val="8A94A6"/>
+                  <a:srgbClr val="7A88A0"/>
                 </a:solidFill>
                 <a:latin typeface="Inter"/>
               </a:defRPr>
@@ -13790,7 +13790,7 @@
               </a:lnSpc>
               <a:defRPr sz="900" b="0">
                 <a:solidFill>
-                  <a:srgbClr val="8A94A6"/>
+                  <a:srgbClr val="7A88A0"/>
                 </a:solidFill>
                 <a:latin typeface="Inter"/>
               </a:defRPr>
@@ -13829,7 +13829,7 @@
               </a:lnSpc>
               <a:defRPr sz="900" b="0">
                 <a:solidFill>
-                  <a:srgbClr val="8A94A6"/>
+                  <a:srgbClr val="7A88A0"/>
                 </a:solidFill>
                 <a:latin typeface="Inter"/>
               </a:defRPr>
@@ -13894,7 +13894,7 @@
               </a:lnSpc>
               <a:defRPr sz="1100" b="1">
                 <a:solidFill>
-                  <a:srgbClr val="1D4ED8"/>
+                  <a:srgbClr val="1668DC"/>
                 </a:solidFill>
                 <a:latin typeface="Inter"/>
               </a:defRPr>
@@ -13933,7 +13933,7 @@
               </a:lnSpc>
               <a:defRPr sz="3000" b="1">
                 <a:solidFill>
-                  <a:srgbClr val="0F172A"/>
+                  <a:srgbClr val="0B3375"/>
                 </a:solidFill>
                 <a:latin typeface="Manrope"/>
               </a:defRPr>
@@ -13972,7 +13972,7 @@
               </a:lnSpc>
               <a:defRPr sz="1300" b="1">
                 <a:solidFill>
-                  <a:srgbClr val="1D4ED8"/>
+                  <a:srgbClr val="1668DC"/>
                 </a:solidFill>
                 <a:latin typeface="Inter"/>
               </a:defRPr>
@@ -14014,7 +14014,7 @@
               </a:spcAft>
               <a:defRPr sz="1400">
                 <a:solidFill>
-                  <a:srgbClr val="475569"/>
+                  <a:srgbClr val="3A4A66"/>
                 </a:solidFill>
                 <a:latin typeface="Inter"/>
               </a:defRPr>
@@ -14033,7 +14033,7 @@
               </a:spcAft>
               <a:defRPr sz="1400">
                 <a:solidFill>
-                  <a:srgbClr val="475569"/>
+                  <a:srgbClr val="3A4A66"/>
                 </a:solidFill>
                 <a:latin typeface="Inter"/>
               </a:defRPr>
@@ -14052,7 +14052,7 @@
               </a:spcAft>
               <a:defRPr sz="1400">
                 <a:solidFill>
-                  <a:srgbClr val="475569"/>
+                  <a:srgbClr val="3A4A66"/>
                 </a:solidFill>
                 <a:latin typeface="Inter"/>
               </a:defRPr>
@@ -14071,7 +14071,7 @@
               </a:spcAft>
               <a:defRPr sz="1400">
                 <a:solidFill>
-                  <a:srgbClr val="475569"/>
+                  <a:srgbClr val="3A4A66"/>
                 </a:solidFill>
                 <a:latin typeface="Inter"/>
               </a:defRPr>
@@ -14099,7 +14099,7 @@
             </a:avLst>
           </a:prstGeom>
           <a:solidFill>
-            <a:srgbClr val="057A55"/>
+            <a:srgbClr val="0F9B7A"/>
           </a:solidFill>
           <a:ln>
             <a:noFill/>
@@ -14299,7 +14299,7 @@
               </a:lnSpc>
               <a:defRPr sz="900" b="0">
                 <a:solidFill>
-                  <a:srgbClr val="8A94A6"/>
+                  <a:srgbClr val="7A88A0"/>
                 </a:solidFill>
                 <a:latin typeface="Inter"/>
               </a:defRPr>
@@ -14338,7 +14338,7 @@
               </a:lnSpc>
               <a:defRPr sz="900" b="0">
                 <a:solidFill>
-                  <a:srgbClr val="8A94A6"/>
+                  <a:srgbClr val="7A88A0"/>
                 </a:solidFill>
                 <a:latin typeface="Inter"/>
               </a:defRPr>
@@ -14377,7 +14377,7 @@
               </a:lnSpc>
               <a:defRPr sz="900" b="0">
                 <a:solidFill>
-                  <a:srgbClr val="8A94A6"/>
+                  <a:srgbClr val="7A88A0"/>
                 </a:solidFill>
                 <a:latin typeface="Inter"/>
               </a:defRPr>
@@ -14442,7 +14442,7 @@
               </a:lnSpc>
               <a:defRPr sz="1100" b="1">
                 <a:solidFill>
-                  <a:srgbClr val="1D4ED8"/>
+                  <a:srgbClr val="1668DC"/>
                 </a:solidFill>
                 <a:latin typeface="Inter"/>
               </a:defRPr>
@@ -14481,7 +14481,7 @@
               </a:lnSpc>
               <a:defRPr sz="3000" b="1">
                 <a:solidFill>
-                  <a:srgbClr val="0F172A"/>
+                  <a:srgbClr val="0B3375"/>
                 </a:solidFill>
                 <a:latin typeface="Manrope"/>
               </a:defRPr>
@@ -14520,7 +14520,7 @@
               </a:lnSpc>
               <a:defRPr sz="1400" b="0">
                 <a:solidFill>
-                  <a:srgbClr val="475569"/>
+                  <a:srgbClr val="3A4A66"/>
                 </a:solidFill>
                 <a:latin typeface="Inter"/>
               </a:defRPr>
@@ -14548,7 +14548,7 @@
         <p:spPr>
           <a:xfrm>
             <a:off x="1828800" y="1828800"/>
-            <a:ext cx="6184148" cy="4480560"/>
+            <a:ext cx="5972654" cy="4480560"/>
           </a:xfrm>
           <a:prstGeom prst="rect">
             <a:avLst/>
@@ -14583,7 +14583,7 @@
               </a:lnSpc>
               <a:defRPr sz="1200" b="0">
                 <a:solidFill>
-                  <a:srgbClr val="8A94A6"/>
+                  <a:srgbClr val="7A88A0"/>
                 </a:solidFill>
                 <a:latin typeface="Inter"/>
               </a:defRPr>
@@ -14622,7 +14622,7 @@
               </a:lnSpc>
               <a:defRPr sz="900" b="0">
                 <a:solidFill>
-                  <a:srgbClr val="8A94A6"/>
+                  <a:srgbClr val="7A88A0"/>
                 </a:solidFill>
                 <a:latin typeface="Inter"/>
               </a:defRPr>
@@ -14661,7 +14661,7 @@
               </a:lnSpc>
               <a:defRPr sz="900" b="0">
                 <a:solidFill>
-                  <a:srgbClr val="8A94A6"/>
+                  <a:srgbClr val="7A88A0"/>
                 </a:solidFill>
                 <a:latin typeface="Inter"/>
               </a:defRPr>
@@ -14726,7 +14726,7 @@
               </a:lnSpc>
               <a:defRPr sz="1100" b="1">
                 <a:solidFill>
-                  <a:srgbClr val="1D4ED8"/>
+                  <a:srgbClr val="1668DC"/>
                 </a:solidFill>
                 <a:latin typeface="Inter"/>
               </a:defRPr>
@@ -14765,7 +14765,7 @@
               </a:lnSpc>
               <a:defRPr sz="3000" b="1">
                 <a:solidFill>
-                  <a:srgbClr val="0F172A"/>
+                  <a:srgbClr val="0B3375"/>
                 </a:solidFill>
                 <a:latin typeface="Manrope"/>
               </a:defRPr>
@@ -14804,7 +14804,7 @@
               </a:lnSpc>
               <a:defRPr sz="1400" b="1">
                 <a:solidFill>
-                  <a:srgbClr val="1D4ED8"/>
+                  <a:srgbClr val="1668DC"/>
                 </a:solidFill>
                 <a:latin typeface="Inter"/>
               </a:defRPr>
@@ -14843,7 +14843,7 @@
               </a:lnSpc>
               <a:defRPr sz="1400" b="1">
                 <a:solidFill>
-                  <a:srgbClr val="0F172A"/>
+                  <a:srgbClr val="0B3375"/>
                 </a:solidFill>
                 <a:latin typeface="Inter"/>
               </a:defRPr>
@@ -14882,7 +14882,7 @@
               </a:lnSpc>
               <a:defRPr sz="1100" b="0">
                 <a:solidFill>
-                  <a:srgbClr val="8A94A6"/>
+                  <a:srgbClr val="7A88A0"/>
                 </a:solidFill>
                 <a:latin typeface="Inter"/>
               </a:defRPr>
@@ -14921,7 +14921,7 @@
               </a:lnSpc>
               <a:defRPr sz="1400" b="1">
                 <a:solidFill>
-                  <a:srgbClr val="1D4ED8"/>
+                  <a:srgbClr val="1668DC"/>
                 </a:solidFill>
                 <a:latin typeface="Inter"/>
               </a:defRPr>
@@ -14960,7 +14960,7 @@
               </a:lnSpc>
               <a:defRPr sz="1400" b="1">
                 <a:solidFill>
-                  <a:srgbClr val="0F172A"/>
+                  <a:srgbClr val="0B3375"/>
                 </a:solidFill>
                 <a:latin typeface="Inter"/>
               </a:defRPr>
@@ -14999,7 +14999,7 @@
               </a:lnSpc>
               <a:defRPr sz="1100" b="0">
                 <a:solidFill>
-                  <a:srgbClr val="8A94A6"/>
+                  <a:srgbClr val="7A88A0"/>
                 </a:solidFill>
                 <a:latin typeface="Inter"/>
               </a:defRPr>
@@ -15038,7 +15038,7 @@
               </a:lnSpc>
               <a:defRPr sz="1400" b="1">
                 <a:solidFill>
-                  <a:srgbClr val="1D4ED8"/>
+                  <a:srgbClr val="1668DC"/>
                 </a:solidFill>
                 <a:latin typeface="Inter"/>
               </a:defRPr>
@@ -15077,7 +15077,7 @@
               </a:lnSpc>
               <a:defRPr sz="1400" b="1">
                 <a:solidFill>
-                  <a:srgbClr val="0F172A"/>
+                  <a:srgbClr val="0B3375"/>
                 </a:solidFill>
                 <a:latin typeface="Inter"/>
               </a:defRPr>
@@ -15116,7 +15116,7 @@
               </a:lnSpc>
               <a:defRPr sz="1100" b="0">
                 <a:solidFill>
-                  <a:srgbClr val="8A94A6"/>
+                  <a:srgbClr val="7A88A0"/>
                 </a:solidFill>
                 <a:latin typeface="Inter"/>
               </a:defRPr>
@@ -15155,7 +15155,7 @@
               </a:lnSpc>
               <a:defRPr sz="1400" b="1">
                 <a:solidFill>
-                  <a:srgbClr val="1D4ED8"/>
+                  <a:srgbClr val="1668DC"/>
                 </a:solidFill>
                 <a:latin typeface="Inter"/>
               </a:defRPr>
@@ -15194,7 +15194,7 @@
               </a:lnSpc>
               <a:defRPr sz="1400" b="1">
                 <a:solidFill>
-                  <a:srgbClr val="0F172A"/>
+                  <a:srgbClr val="0B3375"/>
                 </a:solidFill>
                 <a:latin typeface="Inter"/>
               </a:defRPr>
@@ -15233,7 +15233,7 @@
               </a:lnSpc>
               <a:defRPr sz="1100" b="0">
                 <a:solidFill>
-                  <a:srgbClr val="8A94A6"/>
+                  <a:srgbClr val="7A88A0"/>
                 </a:solidFill>
                 <a:latin typeface="Inter"/>
               </a:defRPr>
@@ -15272,7 +15272,7 @@
               </a:lnSpc>
               <a:defRPr sz="1400" b="1">
                 <a:solidFill>
-                  <a:srgbClr val="1D4ED8"/>
+                  <a:srgbClr val="1668DC"/>
                 </a:solidFill>
                 <a:latin typeface="Inter"/>
               </a:defRPr>
@@ -15311,7 +15311,7 @@
               </a:lnSpc>
               <a:defRPr sz="1400" b="1">
                 <a:solidFill>
-                  <a:srgbClr val="0F172A"/>
+                  <a:srgbClr val="0B3375"/>
                 </a:solidFill>
                 <a:latin typeface="Inter"/>
               </a:defRPr>
@@ -15350,7 +15350,7 @@
               </a:lnSpc>
               <a:defRPr sz="1100" b="0">
                 <a:solidFill>
-                  <a:srgbClr val="8A94A6"/>
+                  <a:srgbClr val="7A88A0"/>
                 </a:solidFill>
                 <a:latin typeface="Inter"/>
               </a:defRPr>
@@ -15389,7 +15389,7 @@
               </a:lnSpc>
               <a:defRPr sz="1400" b="1">
                 <a:solidFill>
-                  <a:srgbClr val="1D4ED8"/>
+                  <a:srgbClr val="1668DC"/>
                 </a:solidFill>
                 <a:latin typeface="Inter"/>
               </a:defRPr>
@@ -15428,7 +15428,7 @@
               </a:lnSpc>
               <a:defRPr sz="1400" b="1">
                 <a:solidFill>
-                  <a:srgbClr val="0F172A"/>
+                  <a:srgbClr val="0B3375"/>
                 </a:solidFill>
                 <a:latin typeface="Inter"/>
               </a:defRPr>
@@ -15467,7 +15467,7 @@
               </a:lnSpc>
               <a:defRPr sz="1100" b="0">
                 <a:solidFill>
-                  <a:srgbClr val="8A94A6"/>
+                  <a:srgbClr val="7A88A0"/>
                 </a:solidFill>
                 <a:latin typeface="Inter"/>
               </a:defRPr>
@@ -15506,7 +15506,7 @@
               </a:lnSpc>
               <a:defRPr sz="1400" b="1">
                 <a:solidFill>
-                  <a:srgbClr val="1D4ED8"/>
+                  <a:srgbClr val="1668DC"/>
                 </a:solidFill>
                 <a:latin typeface="Inter"/>
               </a:defRPr>
@@ -15545,7 +15545,7 @@
               </a:lnSpc>
               <a:defRPr sz="1400" b="1">
                 <a:solidFill>
-                  <a:srgbClr val="0F172A"/>
+                  <a:srgbClr val="0B3375"/>
                 </a:solidFill>
                 <a:latin typeface="Inter"/>
               </a:defRPr>
@@ -15584,7 +15584,7 @@
               </a:lnSpc>
               <a:defRPr sz="1100" b="0">
                 <a:solidFill>
-                  <a:srgbClr val="8A94A6"/>
+                  <a:srgbClr val="7A88A0"/>
                 </a:solidFill>
                 <a:latin typeface="Inter"/>
               </a:defRPr>
@@ -15623,7 +15623,7 @@
               </a:lnSpc>
               <a:defRPr sz="900" b="0">
                 <a:solidFill>
-                  <a:srgbClr val="8A94A6"/>
+                  <a:srgbClr val="7A88A0"/>
                 </a:solidFill>
                 <a:latin typeface="Inter"/>
               </a:defRPr>
@@ -15662,7 +15662,7 @@
               </a:lnSpc>
               <a:defRPr sz="900" b="0">
                 <a:solidFill>
-                  <a:srgbClr val="8A94A6"/>
+                  <a:srgbClr val="7A88A0"/>
                 </a:solidFill>
                 <a:latin typeface="Inter"/>
               </a:defRPr>
@@ -15727,7 +15727,7 @@
               </a:lnSpc>
               <a:defRPr sz="1100" b="1">
                 <a:solidFill>
-                  <a:srgbClr val="1D4ED8"/>
+                  <a:srgbClr val="1668DC"/>
                 </a:solidFill>
                 <a:latin typeface="Inter"/>
               </a:defRPr>
@@ -15766,7 +15766,7 @@
               </a:lnSpc>
               <a:defRPr sz="3000" b="1">
                 <a:solidFill>
-                  <a:srgbClr val="0F172A"/>
+                  <a:srgbClr val="0B3375"/>
                 </a:solidFill>
                 <a:latin typeface="Manrope"/>
               </a:defRPr>
@@ -15805,7 +15805,7 @@
               </a:lnSpc>
               <a:defRPr sz="1400" b="0">
                 <a:solidFill>
-                  <a:srgbClr val="475569"/>
+                  <a:srgbClr val="3A4A66"/>
                 </a:solidFill>
                 <a:latin typeface="Inter"/>
               </a:defRPr>
@@ -15833,7 +15833,7 @@
             </a:avLst>
           </a:prstGeom>
           <a:solidFill>
-            <a:srgbClr val="F7F9FC"/>
+            <a:srgbClr val="F5F7FB"/>
           </a:solidFill>
           <a:ln w="12700">
             <a:solidFill>
@@ -15892,7 +15892,7 @@
               </a:lnSpc>
               <a:defRPr sz="1300" b="1">
                 <a:solidFill>
-                  <a:srgbClr val="057A55"/>
+                  <a:srgbClr val="0F9B7A"/>
                 </a:solidFill>
                 <a:latin typeface="Inter"/>
               </a:defRPr>
@@ -15934,7 +15934,7 @@
               </a:spcAft>
               <a:defRPr sz="1300">
                 <a:solidFill>
-                  <a:srgbClr val="475569"/>
+                  <a:srgbClr val="3A4A66"/>
                 </a:solidFill>
                 <a:latin typeface="Inter"/>
               </a:defRPr>
@@ -15953,7 +15953,7 @@
               </a:spcAft>
               <a:defRPr sz="1300">
                 <a:solidFill>
-                  <a:srgbClr val="475569"/>
+                  <a:srgbClr val="3A4A66"/>
                 </a:solidFill>
                 <a:latin typeface="Inter"/>
               </a:defRPr>
@@ -15972,7 +15972,7 @@
               </a:spcAft>
               <a:defRPr sz="1300">
                 <a:solidFill>
-                  <a:srgbClr val="475569"/>
+                  <a:srgbClr val="3A4A66"/>
                 </a:solidFill>
                 <a:latin typeface="Inter"/>
               </a:defRPr>
@@ -16000,7 +16000,7 @@
             </a:avLst>
           </a:prstGeom>
           <a:solidFill>
-            <a:srgbClr val="F7F9FC"/>
+            <a:srgbClr val="F5F7FB"/>
           </a:solidFill>
           <a:ln w="12700">
             <a:solidFill>
@@ -16101,7 +16101,7 @@
               </a:spcAft>
               <a:defRPr sz="1300">
                 <a:solidFill>
-                  <a:srgbClr val="475569"/>
+                  <a:srgbClr val="3A4A66"/>
                 </a:solidFill>
                 <a:latin typeface="Inter"/>
               </a:defRPr>
@@ -16120,7 +16120,7 @@
               </a:spcAft>
               <a:defRPr sz="1300">
                 <a:solidFill>
-                  <a:srgbClr val="475569"/>
+                  <a:srgbClr val="3A4A66"/>
                 </a:solidFill>
                 <a:latin typeface="Inter"/>
               </a:defRPr>
@@ -16139,7 +16139,7 @@
               </a:spcAft>
               <a:defRPr sz="1300">
                 <a:solidFill>
-                  <a:srgbClr val="475569"/>
+                  <a:srgbClr val="3A4A66"/>
                 </a:solidFill>
                 <a:latin typeface="Inter"/>
               </a:defRPr>
@@ -16178,7 +16178,7 @@
               </a:lnSpc>
               <a:defRPr sz="1200" b="0">
                 <a:solidFill>
-                  <a:srgbClr val="8A94A6"/>
+                  <a:srgbClr val="7A88A0"/>
                 </a:solidFill>
                 <a:latin typeface="Inter"/>
               </a:defRPr>
@@ -16217,7 +16217,7 @@
               </a:lnSpc>
               <a:defRPr sz="900" b="0">
                 <a:solidFill>
-                  <a:srgbClr val="8A94A6"/>
+                  <a:srgbClr val="7A88A0"/>
                 </a:solidFill>
                 <a:latin typeface="Inter"/>
               </a:defRPr>
@@ -16256,7 +16256,7 @@
               </a:lnSpc>
               <a:defRPr sz="900" b="0">
                 <a:solidFill>
-                  <a:srgbClr val="8A94A6"/>
+                  <a:srgbClr val="7A88A0"/>
                 </a:solidFill>
                 <a:latin typeface="Inter"/>
               </a:defRPr>
@@ -16321,7 +16321,7 @@
               </a:lnSpc>
               <a:defRPr sz="1100" b="1">
                 <a:solidFill>
-                  <a:srgbClr val="1D4ED8"/>
+                  <a:srgbClr val="1668DC"/>
                 </a:solidFill>
                 <a:latin typeface="Inter"/>
               </a:defRPr>
@@ -16360,7 +16360,7 @@
               </a:lnSpc>
               <a:defRPr sz="3000" b="1">
                 <a:solidFill>
-                  <a:srgbClr val="0F172A"/>
+                  <a:srgbClr val="0B3375"/>
                 </a:solidFill>
                 <a:latin typeface="Manrope"/>
               </a:defRPr>
@@ -16471,7 +16471,7 @@
               </a:lnSpc>
               <a:defRPr sz="900" b="0">
                 <a:solidFill>
-                  <a:srgbClr val="8A94A6"/>
+                  <a:srgbClr val="7A88A0"/>
                 </a:solidFill>
                 <a:latin typeface="Inter"/>
               </a:defRPr>
@@ -16513,7 +16513,7 @@
               </a:spcAft>
               <a:defRPr sz="1400">
                 <a:solidFill>
-                  <a:srgbClr val="475569"/>
+                  <a:srgbClr val="3A4A66"/>
                 </a:solidFill>
                 <a:latin typeface="Inter"/>
               </a:defRPr>
@@ -16532,7 +16532,7 @@
               </a:spcAft>
               <a:defRPr sz="1400">
                 <a:solidFill>
-                  <a:srgbClr val="475569"/>
+                  <a:srgbClr val="3A4A66"/>
                 </a:solidFill>
                 <a:latin typeface="Inter"/>
               </a:defRPr>
@@ -16551,7 +16551,7 @@
               </a:spcAft>
               <a:defRPr sz="1400">
                 <a:solidFill>
-                  <a:srgbClr val="475569"/>
+                  <a:srgbClr val="3A4A66"/>
                 </a:solidFill>
                 <a:latin typeface="Inter"/>
               </a:defRPr>
@@ -16570,7 +16570,7 @@
               </a:spcAft>
               <a:defRPr sz="1400">
                 <a:solidFill>
-                  <a:srgbClr val="475569"/>
+                  <a:srgbClr val="3A4A66"/>
                 </a:solidFill>
                 <a:latin typeface="Inter"/>
               </a:defRPr>
@@ -16609,7 +16609,7 @@
               </a:lnSpc>
               <a:defRPr sz="900" b="0">
                 <a:solidFill>
-                  <a:srgbClr val="8A94A6"/>
+                  <a:srgbClr val="7A88A0"/>
                 </a:solidFill>
                 <a:latin typeface="Inter"/>
               </a:defRPr>
@@ -16648,7 +16648,7 @@
               </a:lnSpc>
               <a:defRPr sz="900" b="0">
                 <a:solidFill>
-                  <a:srgbClr val="8A94A6"/>
+                  <a:srgbClr val="7A88A0"/>
                 </a:solidFill>
                 <a:latin typeface="Inter"/>
               </a:defRPr>
@@ -16713,7 +16713,7 @@
               </a:lnSpc>
               <a:defRPr sz="1100" b="1">
                 <a:solidFill>
-                  <a:srgbClr val="1D4ED8"/>
+                  <a:srgbClr val="1668DC"/>
                 </a:solidFill>
                 <a:latin typeface="Inter"/>
               </a:defRPr>
@@ -16752,7 +16752,7 @@
               </a:lnSpc>
               <a:defRPr sz="3000" b="1">
                 <a:solidFill>
-                  <a:srgbClr val="0F172A"/>
+                  <a:srgbClr val="0B3375"/>
                 </a:solidFill>
                 <a:latin typeface="Manrope"/>
               </a:defRPr>
@@ -16863,7 +16863,7 @@
               </a:lnSpc>
               <a:defRPr sz="900" b="0">
                 <a:solidFill>
-                  <a:srgbClr val="8A94A6"/>
+                  <a:srgbClr val="7A88A0"/>
                 </a:solidFill>
                 <a:latin typeface="Inter"/>
               </a:defRPr>
@@ -16905,7 +16905,7 @@
               </a:spcAft>
               <a:defRPr sz="1400">
                 <a:solidFill>
-                  <a:srgbClr val="475569"/>
+                  <a:srgbClr val="3A4A66"/>
                 </a:solidFill>
                 <a:latin typeface="Inter"/>
               </a:defRPr>
@@ -16924,7 +16924,7 @@
               </a:spcAft>
               <a:defRPr sz="1400">
                 <a:solidFill>
-                  <a:srgbClr val="475569"/>
+                  <a:srgbClr val="3A4A66"/>
                 </a:solidFill>
                 <a:latin typeface="Inter"/>
               </a:defRPr>
@@ -16943,7 +16943,7 @@
               </a:spcAft>
               <a:defRPr sz="1400">
                 <a:solidFill>
-                  <a:srgbClr val="475569"/>
+                  <a:srgbClr val="3A4A66"/>
                 </a:solidFill>
                 <a:latin typeface="Inter"/>
               </a:defRPr>
@@ -16962,7 +16962,7 @@
               </a:spcAft>
               <a:defRPr sz="1400">
                 <a:solidFill>
-                  <a:srgbClr val="475569"/>
+                  <a:srgbClr val="3A4A66"/>
                 </a:solidFill>
                 <a:latin typeface="Inter"/>
               </a:defRPr>
@@ -17001,7 +17001,7 @@
               </a:lnSpc>
               <a:defRPr sz="1200" b="0">
                 <a:solidFill>
-                  <a:srgbClr val="8A94A6"/>
+                  <a:srgbClr val="7A88A0"/>
                 </a:solidFill>
                 <a:latin typeface="Inter"/>
               </a:defRPr>
@@ -17017,7 +17017,7 @@
               </a:lnSpc>
               <a:defRPr sz="1200" b="0">
                 <a:solidFill>
-                  <a:srgbClr val="8A94A6"/>
+                  <a:srgbClr val="7A88A0"/>
                 </a:solidFill>
                 <a:latin typeface="Inter"/>
               </a:defRPr>
@@ -17033,7 +17033,7 @@
               </a:lnSpc>
               <a:defRPr sz="1200" b="0">
                 <a:solidFill>
-                  <a:srgbClr val="8A94A6"/>
+                  <a:srgbClr val="7A88A0"/>
                 </a:solidFill>
                 <a:latin typeface="Inter"/>
               </a:defRPr>
@@ -17072,7 +17072,7 @@
               </a:lnSpc>
               <a:defRPr sz="900" b="0">
                 <a:solidFill>
-                  <a:srgbClr val="8A94A6"/>
+                  <a:srgbClr val="7A88A0"/>
                 </a:solidFill>
                 <a:latin typeface="Inter"/>
               </a:defRPr>
@@ -17111,7 +17111,7 @@
               </a:lnSpc>
               <a:defRPr sz="900" b="0">
                 <a:solidFill>
-                  <a:srgbClr val="8A94A6"/>
+                  <a:srgbClr val="7A88A0"/>
                 </a:solidFill>
                 <a:latin typeface="Inter"/>
               </a:defRPr>
@@ -17176,7 +17176,7 @@
               </a:lnSpc>
               <a:defRPr sz="1100" b="1">
                 <a:solidFill>
-                  <a:srgbClr val="1D4ED8"/>
+                  <a:srgbClr val="1668DC"/>
                 </a:solidFill>
                 <a:latin typeface="Inter"/>
               </a:defRPr>
@@ -17215,7 +17215,7 @@
               </a:lnSpc>
               <a:defRPr sz="3000" b="1">
                 <a:solidFill>
-                  <a:srgbClr val="0F172A"/>
+                  <a:srgbClr val="0B3375"/>
                 </a:solidFill>
                 <a:latin typeface="Manrope"/>
               </a:defRPr>
@@ -17326,7 +17326,7 @@
               </a:lnSpc>
               <a:defRPr sz="900" b="0">
                 <a:solidFill>
-                  <a:srgbClr val="8A94A6"/>
+                  <a:srgbClr val="7A88A0"/>
                 </a:solidFill>
                 <a:latin typeface="Inter"/>
               </a:defRPr>
@@ -17437,7 +17437,7 @@
               </a:lnSpc>
               <a:defRPr sz="900" b="0">
                 <a:solidFill>
-                  <a:srgbClr val="8A94A6"/>
+                  <a:srgbClr val="7A88A0"/>
                 </a:solidFill>
                 <a:latin typeface="Inter"/>
               </a:defRPr>
@@ -17476,7 +17476,7 @@
               </a:lnSpc>
               <a:defRPr sz="1200" b="0">
                 <a:solidFill>
-                  <a:srgbClr val="8A94A6"/>
+                  <a:srgbClr val="7A88A0"/>
                 </a:solidFill>
                 <a:latin typeface="Inter"/>
               </a:defRPr>
@@ -17515,7 +17515,7 @@
               </a:lnSpc>
               <a:defRPr sz="900" b="0">
                 <a:solidFill>
-                  <a:srgbClr val="8A94A6"/>
+                  <a:srgbClr val="7A88A0"/>
                 </a:solidFill>
                 <a:latin typeface="Inter"/>
               </a:defRPr>
@@ -17554,7 +17554,7 @@
               </a:lnSpc>
               <a:defRPr sz="900" b="0">
                 <a:solidFill>
-                  <a:srgbClr val="8A94A6"/>
+                  <a:srgbClr val="7A88A0"/>
                 </a:solidFill>
                 <a:latin typeface="Inter"/>
               </a:defRPr>
@@ -17619,7 +17619,7 @@
               </a:lnSpc>
               <a:defRPr sz="1100" b="1">
                 <a:solidFill>
-                  <a:srgbClr val="1D4ED8"/>
+                  <a:srgbClr val="1668DC"/>
                 </a:solidFill>
                 <a:latin typeface="Inter"/>
               </a:defRPr>
@@ -17658,7 +17658,7 @@
               </a:lnSpc>
               <a:defRPr sz="3000" b="1">
                 <a:solidFill>
-                  <a:srgbClr val="0F172A"/>
+                  <a:srgbClr val="0B3375"/>
                 </a:solidFill>
                 <a:latin typeface="Manrope"/>
               </a:defRPr>
@@ -17769,7 +17769,7 @@
               </a:lnSpc>
               <a:defRPr sz="900" b="0">
                 <a:solidFill>
-                  <a:srgbClr val="8A94A6"/>
+                  <a:srgbClr val="7A88A0"/>
                 </a:solidFill>
                 <a:latin typeface="Inter"/>
               </a:defRPr>
@@ -17811,7 +17811,7 @@
               </a:spcAft>
               <a:defRPr sz="1300">
                 <a:solidFill>
-                  <a:srgbClr val="475569"/>
+                  <a:srgbClr val="3A4A66"/>
                 </a:solidFill>
                 <a:latin typeface="Inter"/>
               </a:defRPr>
@@ -17830,7 +17830,7 @@
               </a:spcAft>
               <a:defRPr sz="1300">
                 <a:solidFill>
-                  <a:srgbClr val="475569"/>
+                  <a:srgbClr val="3A4A66"/>
                 </a:solidFill>
                 <a:latin typeface="Inter"/>
               </a:defRPr>
@@ -17849,7 +17849,7 @@
               </a:spcAft>
               <a:defRPr sz="1300">
                 <a:solidFill>
-                  <a:srgbClr val="475569"/>
+                  <a:srgbClr val="3A4A66"/>
                 </a:solidFill>
                 <a:latin typeface="Inter"/>
               </a:defRPr>
@@ -17868,7 +17868,7 @@
               </a:spcAft>
               <a:defRPr sz="1300">
                 <a:solidFill>
-                  <a:srgbClr val="475569"/>
+                  <a:srgbClr val="3A4A66"/>
                 </a:solidFill>
                 <a:latin typeface="Inter"/>
               </a:defRPr>
@@ -17907,7 +17907,7 @@
               </a:lnSpc>
               <a:defRPr sz="900" b="0">
                 <a:solidFill>
-                  <a:srgbClr val="8A94A6"/>
+                  <a:srgbClr val="7A88A0"/>
                 </a:solidFill>
                 <a:latin typeface="Inter"/>
               </a:defRPr>
@@ -17946,7 +17946,7 @@
               </a:lnSpc>
               <a:defRPr sz="900" b="0">
                 <a:solidFill>
-                  <a:srgbClr val="8A94A6"/>
+                  <a:srgbClr val="7A88A0"/>
                 </a:solidFill>
                 <a:latin typeface="Inter"/>
               </a:defRPr>
@@ -18011,7 +18011,7 @@
               </a:lnSpc>
               <a:defRPr sz="1100" b="1">
                 <a:solidFill>
-                  <a:srgbClr val="1D4ED8"/>
+                  <a:srgbClr val="1668DC"/>
                 </a:solidFill>
                 <a:latin typeface="Inter"/>
               </a:defRPr>
@@ -18050,7 +18050,7 @@
               </a:lnSpc>
               <a:defRPr sz="3000" b="1">
                 <a:solidFill>
-                  <a:srgbClr val="0F172A"/>
+                  <a:srgbClr val="0B3375"/>
                 </a:solidFill>
                 <a:latin typeface="Manrope"/>
               </a:defRPr>
@@ -18161,7 +18161,7 @@
               </a:lnSpc>
               <a:defRPr sz="900" b="0">
                 <a:solidFill>
-                  <a:srgbClr val="8A94A6"/>
+                  <a:srgbClr val="7A88A0"/>
                 </a:solidFill>
                 <a:latin typeface="Inter"/>
               </a:defRPr>
@@ -18189,7 +18189,7 @@
         <p:spPr>
           <a:xfrm>
             <a:off x="548640" y="1737360"/>
-            <a:ext cx="3183419" cy="4480560"/>
+            <a:ext cx="3170519" cy="4480560"/>
           </a:xfrm>
           <a:prstGeom prst="rect">
             <a:avLst/>
@@ -18224,7 +18224,7 @@
               </a:lnSpc>
               <a:defRPr sz="1100" b="0">
                 <a:solidFill>
-                  <a:srgbClr val="8A94A6"/>
+                  <a:srgbClr val="7A88A0"/>
                 </a:solidFill>
                 <a:latin typeface="Inter"/>
               </a:defRPr>
@@ -18240,7 +18240,7 @@
               </a:lnSpc>
               <a:defRPr sz="1100" b="0">
                 <a:solidFill>
-                  <a:srgbClr val="8A94A6"/>
+                  <a:srgbClr val="7A88A0"/>
                 </a:solidFill>
                 <a:latin typeface="Inter"/>
               </a:defRPr>
@@ -18256,7 +18256,7 @@
               </a:lnSpc>
               <a:defRPr sz="1100" b="0">
                 <a:solidFill>
-                  <a:srgbClr val="8A94A6"/>
+                  <a:srgbClr val="7A88A0"/>
                 </a:solidFill>
                 <a:latin typeface="Inter"/>
               </a:defRPr>
@@ -18295,7 +18295,7 @@
               </a:lnSpc>
               <a:defRPr sz="900" b="0">
                 <a:solidFill>
-                  <a:srgbClr val="8A94A6"/>
+                  <a:srgbClr val="7A88A0"/>
                 </a:solidFill>
                 <a:latin typeface="Inter"/>
               </a:defRPr>
@@ -18334,7 +18334,7 @@
               </a:lnSpc>
               <a:defRPr sz="900" b="0">
                 <a:solidFill>
-                  <a:srgbClr val="8A94A6"/>
+                  <a:srgbClr val="7A88A0"/>
                 </a:solidFill>
                 <a:latin typeface="Inter"/>
               </a:defRPr>
@@ -18399,7 +18399,7 @@
               </a:lnSpc>
               <a:defRPr sz="1100" b="1">
                 <a:solidFill>
-                  <a:srgbClr val="1D4ED8"/>
+                  <a:srgbClr val="1668DC"/>
                 </a:solidFill>
                 <a:latin typeface="Inter"/>
               </a:defRPr>
@@ -18438,7 +18438,7 @@
               </a:lnSpc>
               <a:defRPr sz="3000" b="1">
                 <a:solidFill>
-                  <a:srgbClr val="0F172A"/>
+                  <a:srgbClr val="0B3375"/>
                 </a:solidFill>
                 <a:latin typeface="Manrope"/>
               </a:defRPr>
@@ -18549,7 +18549,7 @@
               </a:lnSpc>
               <a:defRPr sz="900" b="0">
                 <a:solidFill>
-                  <a:srgbClr val="8A94A6"/>
+                  <a:srgbClr val="7A88A0"/>
                 </a:solidFill>
                 <a:latin typeface="Inter"/>
               </a:defRPr>
@@ -18660,7 +18660,7 @@
               </a:lnSpc>
               <a:defRPr sz="900" b="0">
                 <a:solidFill>
-                  <a:srgbClr val="8A94A6"/>
+                  <a:srgbClr val="7A88A0"/>
                 </a:solidFill>
                 <a:latin typeface="Inter"/>
               </a:defRPr>
@@ -18699,7 +18699,7 @@
               </a:lnSpc>
               <a:defRPr sz="1200" b="0">
                 <a:solidFill>
-                  <a:srgbClr val="8A94A6"/>
+                  <a:srgbClr val="7A88A0"/>
                 </a:solidFill>
                 <a:latin typeface="Inter"/>
               </a:defRPr>
@@ -18738,7 +18738,7 @@
               </a:lnSpc>
               <a:defRPr sz="900" b="0">
                 <a:solidFill>
-                  <a:srgbClr val="8A94A6"/>
+                  <a:srgbClr val="7A88A0"/>
                 </a:solidFill>
                 <a:latin typeface="Inter"/>
               </a:defRPr>
@@ -18777,7 +18777,7 @@
               </a:lnSpc>
               <a:defRPr sz="900" b="0">
                 <a:solidFill>
-                  <a:srgbClr val="8A94A6"/>
+                  <a:srgbClr val="7A88A0"/>
                 </a:solidFill>
                 <a:latin typeface="Inter"/>
               </a:defRPr>
@@ -18842,7 +18842,7 @@
               </a:lnSpc>
               <a:defRPr sz="1100" b="1">
                 <a:solidFill>
-                  <a:srgbClr val="1D4ED8"/>
+                  <a:srgbClr val="1668DC"/>
                 </a:solidFill>
                 <a:latin typeface="Inter"/>
               </a:defRPr>
@@ -18881,7 +18881,7 @@
               </a:lnSpc>
               <a:defRPr sz="3000" b="1">
                 <a:solidFill>
-                  <a:srgbClr val="0F172A"/>
+                  <a:srgbClr val="0B3375"/>
                 </a:solidFill>
                 <a:latin typeface="Manrope"/>
               </a:defRPr>
@@ -18920,7 +18920,7 @@
               </a:lnSpc>
               <a:defRPr sz="1400" b="0">
                 <a:solidFill>
-                  <a:srgbClr val="475569"/>
+                  <a:srgbClr val="3A4A66"/>
                 </a:solidFill>
                 <a:latin typeface="Inter"/>
               </a:defRPr>
@@ -19031,7 +19031,7 @@
               </a:lnSpc>
               <a:defRPr sz="900" b="0">
                 <a:solidFill>
-                  <a:srgbClr val="8A94A6"/>
+                  <a:srgbClr val="7A88A0"/>
                 </a:solidFill>
                 <a:latin typeface="Inter"/>
               </a:defRPr>
@@ -19142,7 +19142,7 @@
               </a:lnSpc>
               <a:defRPr sz="900" b="0">
                 <a:solidFill>
-                  <a:srgbClr val="8A94A6"/>
+                  <a:srgbClr val="7A88A0"/>
                 </a:solidFill>
                 <a:latin typeface="Inter"/>
               </a:defRPr>
@@ -19253,7 +19253,7 @@
               </a:lnSpc>
               <a:defRPr sz="900" b="0">
                 <a:solidFill>
-                  <a:srgbClr val="8A94A6"/>
+                  <a:srgbClr val="7A88A0"/>
                 </a:solidFill>
                 <a:latin typeface="Inter"/>
               </a:defRPr>
@@ -19292,7 +19292,7 @@
               </a:lnSpc>
               <a:defRPr sz="1200" b="1">
                 <a:solidFill>
-                  <a:srgbClr val="1D4ED8"/>
+                  <a:srgbClr val="1668DC"/>
                 </a:solidFill>
                 <a:latin typeface="Inter"/>
               </a:defRPr>
@@ -19331,7 +19331,7 @@
               </a:lnSpc>
               <a:defRPr sz="1200" b="0">
                 <a:solidFill>
-                  <a:srgbClr val="475569"/>
+                  <a:srgbClr val="3A4A66"/>
                 </a:solidFill>
                 <a:latin typeface="Inter"/>
               </a:defRPr>
@@ -19370,7 +19370,7 @@
               </a:lnSpc>
               <a:defRPr sz="1200" b="1">
                 <a:solidFill>
-                  <a:srgbClr val="1D4ED8"/>
+                  <a:srgbClr val="1668DC"/>
                 </a:solidFill>
                 <a:latin typeface="Inter"/>
               </a:defRPr>
@@ -19409,7 +19409,7 @@
               </a:lnSpc>
               <a:defRPr sz="1200" b="0">
                 <a:solidFill>
-                  <a:srgbClr val="475569"/>
+                  <a:srgbClr val="3A4A66"/>
                 </a:solidFill>
                 <a:latin typeface="Inter"/>
               </a:defRPr>
@@ -19448,7 +19448,7 @@
               </a:lnSpc>
               <a:defRPr sz="1200" b="1">
                 <a:solidFill>
-                  <a:srgbClr val="1D4ED8"/>
+                  <a:srgbClr val="1668DC"/>
                 </a:solidFill>
                 <a:latin typeface="Inter"/>
               </a:defRPr>
@@ -19487,7 +19487,7 @@
               </a:lnSpc>
               <a:defRPr sz="1200" b="0">
                 <a:solidFill>
-                  <a:srgbClr val="475569"/>
+                  <a:srgbClr val="3A4A66"/>
                 </a:solidFill>
                 <a:latin typeface="Inter"/>
               </a:defRPr>
@@ -19526,7 +19526,7 @@
               </a:lnSpc>
               <a:defRPr sz="1200" b="1">
                 <a:solidFill>
-                  <a:srgbClr val="1D4ED8"/>
+                  <a:srgbClr val="1668DC"/>
                 </a:solidFill>
                 <a:latin typeface="Inter"/>
               </a:defRPr>
@@ -19565,7 +19565,7 @@
               </a:lnSpc>
               <a:defRPr sz="1200" b="0">
                 <a:solidFill>
-                  <a:srgbClr val="475569"/>
+                  <a:srgbClr val="3A4A66"/>
                 </a:solidFill>
                 <a:latin typeface="Inter"/>
               </a:defRPr>
@@ -19604,7 +19604,7 @@
               </a:lnSpc>
               <a:defRPr sz="900" b="0">
                 <a:solidFill>
-                  <a:srgbClr val="8A94A6"/>
+                  <a:srgbClr val="7A88A0"/>
                 </a:solidFill>
                 <a:latin typeface="Inter"/>
               </a:defRPr>
@@ -19643,7 +19643,7 @@
               </a:lnSpc>
               <a:defRPr sz="900" b="0">
                 <a:solidFill>
-                  <a:srgbClr val="8A94A6"/>
+                  <a:srgbClr val="7A88A0"/>
                 </a:solidFill>
                 <a:latin typeface="Inter"/>
               </a:defRPr>
@@ -19708,7 +19708,7 @@
               </a:lnSpc>
               <a:defRPr sz="1100" b="1">
                 <a:solidFill>
-                  <a:srgbClr val="1D4ED8"/>
+                  <a:srgbClr val="1668DC"/>
                 </a:solidFill>
                 <a:latin typeface="Inter"/>
               </a:defRPr>
@@ -19747,7 +19747,7 @@
               </a:lnSpc>
               <a:defRPr sz="3000" b="1">
                 <a:solidFill>
-                  <a:srgbClr val="0F172A"/>
+                  <a:srgbClr val="0B3375"/>
                 </a:solidFill>
                 <a:latin typeface="Manrope"/>
               </a:defRPr>
@@ -19858,7 +19858,7 @@
               </a:lnSpc>
               <a:defRPr sz="900" b="0">
                 <a:solidFill>
-                  <a:srgbClr val="8A94A6"/>
+                  <a:srgbClr val="7A88A0"/>
                 </a:solidFill>
                 <a:latin typeface="Inter"/>
               </a:defRPr>
@@ -19900,7 +19900,7 @@
               </a:spcAft>
               <a:defRPr sz="1500">
                 <a:solidFill>
-                  <a:srgbClr val="475569"/>
+                  <a:srgbClr val="3A4A66"/>
                 </a:solidFill>
                 <a:latin typeface="Inter"/>
               </a:defRPr>
@@ -19919,7 +19919,7 @@
               </a:spcAft>
               <a:defRPr sz="1500">
                 <a:solidFill>
-                  <a:srgbClr val="475569"/>
+                  <a:srgbClr val="3A4A66"/>
                 </a:solidFill>
                 <a:latin typeface="Inter"/>
               </a:defRPr>
@@ -19938,7 +19938,7 @@
               </a:spcAft>
               <a:defRPr sz="1500">
                 <a:solidFill>
-                  <a:srgbClr val="475569"/>
+                  <a:srgbClr val="3A4A66"/>
                 </a:solidFill>
                 <a:latin typeface="Inter"/>
               </a:defRPr>
@@ -19957,7 +19957,7 @@
               </a:spcAft>
               <a:defRPr sz="1500">
                 <a:solidFill>
-                  <a:srgbClr val="475569"/>
+                  <a:srgbClr val="3A4A66"/>
                 </a:solidFill>
                 <a:latin typeface="Inter"/>
               </a:defRPr>
@@ -19985,7 +19985,7 @@
             </a:avLst>
           </a:prstGeom>
           <a:solidFill>
-            <a:srgbClr val="EEF2FF"/>
+            <a:srgbClr val="EEF4FD"/>
           </a:solidFill>
           <a:ln>
             <a:noFill/>
@@ -20042,7 +20042,7 @@
               </a:lnSpc>
               <a:defRPr sz="1300" b="0">
                 <a:solidFill>
-                  <a:srgbClr val="1D4ED8"/>
+                  <a:srgbClr val="1668DC"/>
                 </a:solidFill>
                 <a:latin typeface="Inter"/>
               </a:defRPr>
@@ -20058,7 +20058,7 @@
               </a:lnSpc>
               <a:defRPr sz="1300" b="0">
                 <a:solidFill>
-                  <a:srgbClr val="1D4ED8"/>
+                  <a:srgbClr val="1668DC"/>
                 </a:solidFill>
                 <a:latin typeface="Inter"/>
               </a:defRPr>
@@ -20097,7 +20097,7 @@
               </a:lnSpc>
               <a:defRPr sz="900" b="0">
                 <a:solidFill>
-                  <a:srgbClr val="8A94A6"/>
+                  <a:srgbClr val="7A88A0"/>
                 </a:solidFill>
                 <a:latin typeface="Inter"/>
               </a:defRPr>
@@ -20136,7 +20136,7 @@
               </a:lnSpc>
               <a:defRPr sz="900" b="0">
                 <a:solidFill>
-                  <a:srgbClr val="8A94A6"/>
+                  <a:srgbClr val="7A88A0"/>
                 </a:solidFill>
                 <a:latin typeface="Inter"/>
               </a:defRPr>
@@ -20201,7 +20201,7 @@
               </a:lnSpc>
               <a:defRPr sz="1100" b="1">
                 <a:solidFill>
-                  <a:srgbClr val="1D4ED8"/>
+                  <a:srgbClr val="1668DC"/>
                 </a:solidFill>
                 <a:latin typeface="Inter"/>
               </a:defRPr>
@@ -20240,7 +20240,7 @@
               </a:lnSpc>
               <a:defRPr sz="3000" b="1">
                 <a:solidFill>
-                  <a:srgbClr val="0F172A"/>
+                  <a:srgbClr val="0B3375"/>
                 </a:solidFill>
                 <a:latin typeface="Manrope"/>
               </a:defRPr>
@@ -20268,7 +20268,7 @@
             </a:avLst>
           </a:prstGeom>
           <a:solidFill>
-            <a:srgbClr val="F7F9FC"/>
+            <a:srgbClr val="F5F7FB"/>
           </a:solidFill>
           <a:ln w="12700">
             <a:solidFill>
@@ -20327,7 +20327,7 @@
               </a:lnSpc>
               <a:defRPr sz="1300" b="1">
                 <a:solidFill>
-                  <a:srgbClr val="0F172A"/>
+                  <a:srgbClr val="0B3375"/>
                 </a:solidFill>
                 <a:latin typeface="Inter"/>
               </a:defRPr>
@@ -20366,7 +20366,7 @@
               </a:lnSpc>
               <a:defRPr sz="1100" b="0">
                 <a:solidFill>
-                  <a:srgbClr val="8A94A6"/>
+                  <a:srgbClr val="7A88A0"/>
                 </a:solidFill>
                 <a:latin typeface="Inter"/>
               </a:defRPr>
@@ -20394,7 +20394,7 @@
             </a:avLst>
           </a:prstGeom>
           <a:solidFill>
-            <a:srgbClr val="F7F9FC"/>
+            <a:srgbClr val="F5F7FB"/>
           </a:solidFill>
           <a:ln w="12700">
             <a:solidFill>
@@ -20453,7 +20453,7 @@
               </a:lnSpc>
               <a:defRPr sz="1300" b="1">
                 <a:solidFill>
-                  <a:srgbClr val="0F172A"/>
+                  <a:srgbClr val="0B3375"/>
                 </a:solidFill>
                 <a:latin typeface="Inter"/>
               </a:defRPr>
@@ -20492,7 +20492,7 @@
               </a:lnSpc>
               <a:defRPr sz="1100" b="0">
                 <a:solidFill>
-                  <a:srgbClr val="8A94A6"/>
+                  <a:srgbClr val="7A88A0"/>
                 </a:solidFill>
                 <a:latin typeface="Inter"/>
               </a:defRPr>
@@ -20520,7 +20520,7 @@
             </a:avLst>
           </a:prstGeom>
           <a:solidFill>
-            <a:srgbClr val="F7F9FC"/>
+            <a:srgbClr val="F5F7FB"/>
           </a:solidFill>
           <a:ln w="12700">
             <a:solidFill>
@@ -20579,7 +20579,7 @@
               </a:lnSpc>
               <a:defRPr sz="1300" b="1">
                 <a:solidFill>
-                  <a:srgbClr val="0F172A"/>
+                  <a:srgbClr val="0B3375"/>
                 </a:solidFill>
                 <a:latin typeface="Inter"/>
               </a:defRPr>
@@ -20618,7 +20618,7 @@
               </a:lnSpc>
               <a:defRPr sz="1100" b="0">
                 <a:solidFill>
-                  <a:srgbClr val="8A94A6"/>
+                  <a:srgbClr val="7A88A0"/>
                 </a:solidFill>
                 <a:latin typeface="Inter"/>
               </a:defRPr>
@@ -20646,7 +20646,7 @@
             </a:avLst>
           </a:prstGeom>
           <a:solidFill>
-            <a:srgbClr val="F7F9FC"/>
+            <a:srgbClr val="F5F7FB"/>
           </a:solidFill>
           <a:ln w="12700">
             <a:solidFill>
@@ -20705,7 +20705,7 @@
               </a:lnSpc>
               <a:defRPr sz="1300" b="1">
                 <a:solidFill>
-                  <a:srgbClr val="0F172A"/>
+                  <a:srgbClr val="0B3375"/>
                 </a:solidFill>
                 <a:latin typeface="Inter"/>
               </a:defRPr>
@@ -20744,7 +20744,7 @@
               </a:lnSpc>
               <a:defRPr sz="1100" b="0">
                 <a:solidFill>
-                  <a:srgbClr val="8A94A6"/>
+                  <a:srgbClr val="7A88A0"/>
                 </a:solidFill>
                 <a:latin typeface="Inter"/>
               </a:defRPr>
@@ -20772,7 +20772,7 @@
             </a:avLst>
           </a:prstGeom>
           <a:solidFill>
-            <a:srgbClr val="F7F9FC"/>
+            <a:srgbClr val="F5F7FB"/>
           </a:solidFill>
           <a:ln w="12700">
             <a:solidFill>
@@ -20831,7 +20831,7 @@
               </a:lnSpc>
               <a:defRPr sz="1300" b="1">
                 <a:solidFill>
-                  <a:srgbClr val="0F172A"/>
+                  <a:srgbClr val="0B3375"/>
                 </a:solidFill>
                 <a:latin typeface="Inter"/>
               </a:defRPr>
@@ -20870,7 +20870,7 @@
               </a:lnSpc>
               <a:defRPr sz="1100" b="0">
                 <a:solidFill>
-                  <a:srgbClr val="8A94A6"/>
+                  <a:srgbClr val="7A88A0"/>
                 </a:solidFill>
                 <a:latin typeface="Inter"/>
               </a:defRPr>
@@ -20898,7 +20898,7 @@
             </a:avLst>
           </a:prstGeom>
           <a:solidFill>
-            <a:srgbClr val="F7F9FC"/>
+            <a:srgbClr val="F5F7FB"/>
           </a:solidFill>
           <a:ln w="12700">
             <a:solidFill>
@@ -20957,7 +20957,7 @@
               </a:lnSpc>
               <a:defRPr sz="1300" b="1">
                 <a:solidFill>
-                  <a:srgbClr val="0F172A"/>
+                  <a:srgbClr val="0B3375"/>
                 </a:solidFill>
                 <a:latin typeface="Inter"/>
               </a:defRPr>
@@ -20996,7 +20996,7 @@
               </a:lnSpc>
               <a:defRPr sz="1100" b="0">
                 <a:solidFill>
-                  <a:srgbClr val="8A94A6"/>
+                  <a:srgbClr val="7A88A0"/>
                 </a:solidFill>
                 <a:latin typeface="Inter"/>
               </a:defRPr>
@@ -21024,7 +21024,7 @@
             </a:avLst>
           </a:prstGeom>
           <a:solidFill>
-            <a:srgbClr val="F7F9FC"/>
+            <a:srgbClr val="F5F7FB"/>
           </a:solidFill>
           <a:ln w="12700">
             <a:solidFill>
@@ -21083,7 +21083,7 @@
               </a:lnSpc>
               <a:defRPr sz="1300" b="1">
                 <a:solidFill>
-                  <a:srgbClr val="0F172A"/>
+                  <a:srgbClr val="0B3375"/>
                 </a:solidFill>
                 <a:latin typeface="Inter"/>
               </a:defRPr>
@@ -21122,7 +21122,7 @@
               </a:lnSpc>
               <a:defRPr sz="1100" b="0">
                 <a:solidFill>
-                  <a:srgbClr val="8A94A6"/>
+                  <a:srgbClr val="7A88A0"/>
                 </a:solidFill>
                 <a:latin typeface="Inter"/>
               </a:defRPr>
@@ -21150,7 +21150,7 @@
             </a:avLst>
           </a:prstGeom>
           <a:solidFill>
-            <a:srgbClr val="F7F9FC"/>
+            <a:srgbClr val="F5F7FB"/>
           </a:solidFill>
           <a:ln w="12700">
             <a:solidFill>
@@ -21209,7 +21209,7 @@
               </a:lnSpc>
               <a:defRPr sz="1300" b="1">
                 <a:solidFill>
-                  <a:srgbClr val="0F172A"/>
+                  <a:srgbClr val="0B3375"/>
                 </a:solidFill>
                 <a:latin typeface="Inter"/>
               </a:defRPr>
@@ -21248,7 +21248,7 @@
               </a:lnSpc>
               <a:defRPr sz="1100" b="0">
                 <a:solidFill>
-                  <a:srgbClr val="8A94A6"/>
+                  <a:srgbClr val="7A88A0"/>
                 </a:solidFill>
                 <a:latin typeface="Inter"/>
               </a:defRPr>
@@ -21287,7 +21287,7 @@
               </a:lnSpc>
               <a:defRPr sz="900" b="0">
                 <a:solidFill>
-                  <a:srgbClr val="8A94A6"/>
+                  <a:srgbClr val="7A88A0"/>
                 </a:solidFill>
                 <a:latin typeface="Inter"/>
               </a:defRPr>
@@ -21326,7 +21326,7 @@
               </a:lnSpc>
               <a:defRPr sz="900" b="0">
                 <a:solidFill>
-                  <a:srgbClr val="8A94A6"/>
+                  <a:srgbClr val="7A88A0"/>
                 </a:solidFill>
                 <a:latin typeface="Inter"/>
               </a:defRPr>
@@ -21391,7 +21391,7 @@
               </a:lnSpc>
               <a:defRPr sz="1100" b="1">
                 <a:solidFill>
-                  <a:srgbClr val="1D4ED8"/>
+                  <a:srgbClr val="1668DC"/>
                 </a:solidFill>
                 <a:latin typeface="Inter"/>
               </a:defRPr>
@@ -21430,7 +21430,7 @@
               </a:lnSpc>
               <a:defRPr sz="3000" b="1">
                 <a:solidFill>
-                  <a:srgbClr val="0F172A"/>
+                  <a:srgbClr val="0B3375"/>
                 </a:solidFill>
                 <a:latin typeface="Manrope"/>
               </a:defRPr>
@@ -21506,7 +21506,7 @@
             </a:avLst>
           </a:prstGeom>
           <a:solidFill>
-            <a:srgbClr val="1D4ED8"/>
+            <a:srgbClr val="1668DC"/>
           </a:solidFill>
           <a:ln>
             <a:noFill/>
@@ -21563,7 +21563,7 @@
               </a:lnSpc>
               <a:defRPr sz="1600" b="1">
                 <a:solidFill>
-                  <a:srgbClr val="0F172A"/>
+                  <a:srgbClr val="0B3375"/>
                 </a:solidFill>
                 <a:latin typeface="Manrope"/>
               </a:defRPr>
@@ -21602,7 +21602,7 @@
               </a:lnSpc>
               <a:defRPr sz="1200" b="0">
                 <a:solidFill>
-                  <a:srgbClr val="475569"/>
+                  <a:srgbClr val="3A4A66"/>
                 </a:solidFill>
                 <a:latin typeface="Inter"/>
               </a:defRPr>
@@ -21678,7 +21678,7 @@
             </a:avLst>
           </a:prstGeom>
           <a:solidFill>
-            <a:srgbClr val="1D4ED8"/>
+            <a:srgbClr val="1668DC"/>
           </a:solidFill>
           <a:ln>
             <a:noFill/>
@@ -21735,7 +21735,7 @@
               </a:lnSpc>
               <a:defRPr sz="1600" b="1">
                 <a:solidFill>
-                  <a:srgbClr val="0F172A"/>
+                  <a:srgbClr val="0B3375"/>
                 </a:solidFill>
                 <a:latin typeface="Manrope"/>
               </a:defRPr>
@@ -21774,7 +21774,7 @@
               </a:lnSpc>
               <a:defRPr sz="1200" b="0">
                 <a:solidFill>
-                  <a:srgbClr val="475569"/>
+                  <a:srgbClr val="3A4A66"/>
                 </a:solidFill>
                 <a:latin typeface="Inter"/>
               </a:defRPr>
@@ -21850,7 +21850,7 @@
             </a:avLst>
           </a:prstGeom>
           <a:solidFill>
-            <a:srgbClr val="1D4ED8"/>
+            <a:srgbClr val="1668DC"/>
           </a:solidFill>
           <a:ln>
             <a:noFill/>
@@ -21907,7 +21907,7 @@
               </a:lnSpc>
               <a:defRPr sz="1600" b="1">
                 <a:solidFill>
-                  <a:srgbClr val="0F172A"/>
+                  <a:srgbClr val="0B3375"/>
                 </a:solidFill>
                 <a:latin typeface="Manrope"/>
               </a:defRPr>
@@ -21946,7 +21946,7 @@
               </a:lnSpc>
               <a:defRPr sz="1200" b="0">
                 <a:solidFill>
-                  <a:srgbClr val="475569"/>
+                  <a:srgbClr val="3A4A66"/>
                 </a:solidFill>
                 <a:latin typeface="Inter"/>
               </a:defRPr>
@@ -22022,7 +22022,7 @@
             </a:avLst>
           </a:prstGeom>
           <a:solidFill>
-            <a:srgbClr val="1D4ED8"/>
+            <a:srgbClr val="1668DC"/>
           </a:solidFill>
           <a:ln>
             <a:noFill/>
@@ -22079,7 +22079,7 @@
               </a:lnSpc>
               <a:defRPr sz="1600" b="1">
                 <a:solidFill>
-                  <a:srgbClr val="0F172A"/>
+                  <a:srgbClr val="0B3375"/>
                 </a:solidFill>
                 <a:latin typeface="Manrope"/>
               </a:defRPr>
@@ -22118,7 +22118,7 @@
               </a:lnSpc>
               <a:defRPr sz="1200" b="0">
                 <a:solidFill>
-                  <a:srgbClr val="475569"/>
+                  <a:srgbClr val="3A4A66"/>
                 </a:solidFill>
                 <a:latin typeface="Inter"/>
               </a:defRPr>
@@ -22194,7 +22194,7 @@
             </a:avLst>
           </a:prstGeom>
           <a:solidFill>
-            <a:srgbClr val="1D4ED8"/>
+            <a:srgbClr val="1668DC"/>
           </a:solidFill>
           <a:ln>
             <a:noFill/>
@@ -22251,7 +22251,7 @@
               </a:lnSpc>
               <a:defRPr sz="1600" b="1">
                 <a:solidFill>
-                  <a:srgbClr val="0F172A"/>
+                  <a:srgbClr val="0B3375"/>
                 </a:solidFill>
                 <a:latin typeface="Manrope"/>
               </a:defRPr>
@@ -22290,7 +22290,7 @@
               </a:lnSpc>
               <a:defRPr sz="1200" b="0">
                 <a:solidFill>
-                  <a:srgbClr val="475569"/>
+                  <a:srgbClr val="3A4A66"/>
                 </a:solidFill>
                 <a:latin typeface="Inter"/>
               </a:defRPr>
@@ -22318,7 +22318,7 @@
             </a:avLst>
           </a:prstGeom>
           <a:solidFill>
-            <a:srgbClr val="F7F9FC"/>
+            <a:srgbClr val="F5F7FB"/>
           </a:solidFill>
           <a:ln>
             <a:noFill/>
@@ -22375,7 +22375,7 @@
               </a:lnSpc>
               <a:defRPr sz="1500" b="0">
                 <a:solidFill>
-                  <a:srgbClr val="0F172A"/>
+                  <a:srgbClr val="0B3375"/>
                 </a:solidFill>
                 <a:latin typeface="Inter"/>
               </a:defRPr>
@@ -22391,7 +22391,7 @@
               </a:lnSpc>
               <a:defRPr sz="1500" b="0">
                 <a:solidFill>
-                  <a:srgbClr val="0F172A"/>
+                  <a:srgbClr val="0B3375"/>
                 </a:solidFill>
                 <a:latin typeface="Inter"/>
               </a:defRPr>
@@ -22430,7 +22430,7 @@
               </a:lnSpc>
               <a:defRPr sz="900" b="0">
                 <a:solidFill>
-                  <a:srgbClr val="8A94A6"/>
+                  <a:srgbClr val="7A88A0"/>
                 </a:solidFill>
                 <a:latin typeface="Inter"/>
               </a:defRPr>
@@ -22469,7 +22469,7 @@
               </a:lnSpc>
               <a:defRPr sz="900" b="0">
                 <a:solidFill>
-                  <a:srgbClr val="8A94A6"/>
+                  <a:srgbClr val="7A88A0"/>
                 </a:solidFill>
                 <a:latin typeface="Inter"/>
               </a:defRPr>
@@ -22534,7 +22534,7 @@
               </a:lnSpc>
               <a:defRPr sz="1100" b="1">
                 <a:solidFill>
-                  <a:srgbClr val="1D4ED8"/>
+                  <a:srgbClr val="1668DC"/>
                 </a:solidFill>
                 <a:latin typeface="Inter"/>
               </a:defRPr>
@@ -22573,7 +22573,7 @@
               </a:lnSpc>
               <a:defRPr sz="3000" b="1">
                 <a:solidFill>
-                  <a:srgbClr val="0F172A"/>
+                  <a:srgbClr val="0B3375"/>
                 </a:solidFill>
                 <a:latin typeface="Manrope"/>
               </a:defRPr>
@@ -22612,7 +22612,7 @@
               </a:lnSpc>
               <a:defRPr sz="1400" b="0">
                 <a:solidFill>
-                  <a:srgbClr val="475569"/>
+                  <a:srgbClr val="3A4A66"/>
                 </a:solidFill>
                 <a:latin typeface="Inter"/>
               </a:defRPr>
@@ -22623,9 +22623,72 @@
           </a:p>
         </p:txBody>
       </p:sp>
-      <p:sp>
-        <p:nvSpPr>
-          <p:cNvPr id="5" name="TextBox 4"/>
+      <p:pic>
+        <p:nvPicPr>
+          <p:cNvPr id="5" name="Picture 4" descr="database-erd-core.png"/>
+          <p:cNvPicPr>
+            <a:picLocks noChangeAspect="1"/>
+          </p:cNvPicPr>
+          <p:nvPr/>
+        </p:nvPicPr>
+        <p:blipFill>
+          <a:blip r:embed="rId2"/>
+          <a:stretch>
+            <a:fillRect/>
+          </a:stretch>
+        </p:blipFill>
+        <p:spPr>
+          <a:xfrm>
+            <a:off x="1737360" y="1828800"/>
+            <a:ext cx="3875346" cy="4480560"/>
+          </a:xfrm>
+          <a:prstGeom prst="rect">
+            <a:avLst/>
+          </a:prstGeom>
+        </p:spPr>
+      </p:pic>
+      <p:sp>
+        <p:nvSpPr>
+          <p:cNvPr id="6" name="TextBox 5"/>
+          <p:cNvSpPr txBox="1"/>
+          <p:nvPr/>
+        </p:nvSpPr>
+        <p:spPr>
+          <a:xfrm>
+            <a:off x="640080" y="6492240"/>
+            <a:ext cx="10881360" cy="365760"/>
+          </a:xfrm>
+          <a:prstGeom prst="rect">
+            <a:avLst/>
+          </a:prstGeom>
+          <a:noFill/>
+        </p:spPr>
+        <p:txBody>
+          <a:bodyPr wrap="square" anchor="t" lIns="0" rIns="0" tIns="0" bIns="0">
+            <a:spAutoFit/>
+          </a:bodyPr>
+          <a:lstStyle/>
+          <a:p>
+            <a:pPr algn="ctr">
+              <a:lnSpc>
+                <a:spcPct val="100000"/>
+              </a:lnSpc>
+              <a:defRPr sz="1100" b="0">
+                <a:solidFill>
+                  <a:srgbClr val="7A88A0"/>
+                </a:solidFill>
+                <a:latin typeface="Inter"/>
+              </a:defRPr>
+            </a:pPr>
+            <a:r>
+              <a:t>ERD penuh (95 tabel) tersedia sebagai diagrams/database-erd.png; di sini ditampilkan model intinya.</a:t>
+            </a:r>
+          </a:p>
+        </p:txBody>
+      </p:sp>
+      <p:sp>
+        <p:nvSpPr>
+          <p:cNvPr id="7" name="TextBox 6"/>
           <p:cNvSpPr txBox="1"/>
           <p:nvPr/>
         </p:nvSpPr>
@@ -22651,7 +22714,7 @@
               </a:lnSpc>
               <a:defRPr sz="900" b="0">
                 <a:solidFill>
-                  <a:srgbClr val="8A94A6"/>
+                  <a:srgbClr val="7A88A0"/>
                 </a:solidFill>
                 <a:latin typeface="Inter"/>
               </a:defRPr>
@@ -22664,7 +22727,7 @@
       </p:sp>
       <p:sp>
         <p:nvSpPr>
-          <p:cNvPr id="6" name="TextBox 5"/>
+          <p:cNvPr id="8" name="TextBox 7"/>
           <p:cNvSpPr txBox="1"/>
           <p:nvPr/>
         </p:nvSpPr>
@@ -22690,7 +22753,7 @@
               </a:lnSpc>
               <a:defRPr sz="900" b="0">
                 <a:solidFill>
-                  <a:srgbClr val="8A94A6"/>
+                  <a:srgbClr val="7A88A0"/>
                 </a:solidFill>
                 <a:latin typeface="Inter"/>
               </a:defRPr>
@@ -22755,7 +22818,7 @@
               </a:lnSpc>
               <a:defRPr sz="1100" b="1">
                 <a:solidFill>
-                  <a:srgbClr val="1D4ED8"/>
+                  <a:srgbClr val="1668DC"/>
                 </a:solidFill>
                 <a:latin typeface="Inter"/>
               </a:defRPr>
@@ -22794,7 +22857,7 @@
               </a:lnSpc>
               <a:defRPr sz="3000" b="1">
                 <a:solidFill>
-                  <a:srgbClr val="0F172A"/>
+                  <a:srgbClr val="0B3375"/>
                 </a:solidFill>
                 <a:latin typeface="Manrope"/>
               </a:defRPr>
@@ -22826,7 +22889,7 @@
           </a:solidFill>
           <a:ln w="12700">
             <a:solidFill>
-              <a:srgbClr val="1D4ED8"/>
+              <a:srgbClr val="1668DC"/>
             </a:solidFill>
           </a:ln>
           <a:effectLst/>
@@ -22881,7 +22944,7 @@
               </a:lnSpc>
               <a:defRPr sz="1500" b="1">
                 <a:solidFill>
-                  <a:srgbClr val="1D4ED8"/>
+                  <a:srgbClr val="1668DC"/>
                 </a:solidFill>
                 <a:latin typeface="Inter"/>
               </a:defRPr>
@@ -22920,7 +22983,7 @@
               </a:lnSpc>
               <a:defRPr sz="1100" b="0">
                 <a:solidFill>
-                  <a:srgbClr val="475569"/>
+                  <a:srgbClr val="3A4A66"/>
                 </a:solidFill>
                 <a:latin typeface="Inter"/>
               </a:defRPr>
@@ -22936,7 +22999,7 @@
               </a:lnSpc>
               <a:defRPr sz="1100" b="0">
                 <a:solidFill>
-                  <a:srgbClr val="475569"/>
+                  <a:srgbClr val="3A4A66"/>
                 </a:solidFill>
                 <a:latin typeface="Inter"/>
               </a:defRPr>
@@ -22975,7 +23038,7 @@
               </a:lnSpc>
               <a:defRPr sz="2200" b="0">
                 <a:solidFill>
-                  <a:srgbClr val="8A94A6"/>
+                  <a:srgbClr val="7A88A0"/>
                 </a:solidFill>
                 <a:latin typeface="Inter"/>
               </a:defRPr>
@@ -23007,7 +23070,7 @@
           </a:solidFill>
           <a:ln w="12700">
             <a:solidFill>
-              <a:srgbClr val="1D4ED8"/>
+              <a:srgbClr val="1668DC"/>
             </a:solidFill>
           </a:ln>
           <a:effectLst/>
@@ -23062,7 +23125,7 @@
               </a:lnSpc>
               <a:defRPr sz="1500" b="1">
                 <a:solidFill>
-                  <a:srgbClr val="1D4ED8"/>
+                  <a:srgbClr val="1668DC"/>
                 </a:solidFill>
                 <a:latin typeface="Inter"/>
               </a:defRPr>
@@ -23101,7 +23164,7 @@
               </a:lnSpc>
               <a:defRPr sz="1100" b="0">
                 <a:solidFill>
-                  <a:srgbClr val="475569"/>
+                  <a:srgbClr val="3A4A66"/>
                 </a:solidFill>
                 <a:latin typeface="Inter"/>
               </a:defRPr>
@@ -23117,7 +23180,7 @@
               </a:lnSpc>
               <a:defRPr sz="1100" b="0">
                 <a:solidFill>
-                  <a:srgbClr val="475569"/>
+                  <a:srgbClr val="3A4A66"/>
                 </a:solidFill>
                 <a:latin typeface="Inter"/>
               </a:defRPr>
@@ -23156,7 +23219,7 @@
               </a:lnSpc>
               <a:defRPr sz="2200" b="0">
                 <a:solidFill>
-                  <a:srgbClr val="8A94A6"/>
+                  <a:srgbClr val="7A88A0"/>
                 </a:solidFill>
                 <a:latin typeface="Inter"/>
               </a:defRPr>
@@ -23188,7 +23251,7 @@
           </a:solidFill>
           <a:ln w="12700">
             <a:solidFill>
-              <a:srgbClr val="1D4ED8"/>
+              <a:srgbClr val="1668DC"/>
             </a:solidFill>
           </a:ln>
           <a:effectLst/>
@@ -23243,7 +23306,7 @@
               </a:lnSpc>
               <a:defRPr sz="1500" b="1">
                 <a:solidFill>
-                  <a:srgbClr val="1D4ED8"/>
+                  <a:srgbClr val="1668DC"/>
                 </a:solidFill>
                 <a:latin typeface="Inter"/>
               </a:defRPr>
@@ -23282,7 +23345,7 @@
               </a:lnSpc>
               <a:defRPr sz="1100" b="0">
                 <a:solidFill>
-                  <a:srgbClr val="475569"/>
+                  <a:srgbClr val="3A4A66"/>
                 </a:solidFill>
                 <a:latin typeface="Inter"/>
               </a:defRPr>
@@ -23298,7 +23361,7 @@
               </a:lnSpc>
               <a:defRPr sz="1100" b="0">
                 <a:solidFill>
-                  <a:srgbClr val="475569"/>
+                  <a:srgbClr val="3A4A66"/>
                 </a:solidFill>
                 <a:latin typeface="Inter"/>
               </a:defRPr>
@@ -23337,7 +23400,7 @@
               </a:lnSpc>
               <a:defRPr sz="2200" b="0">
                 <a:solidFill>
-                  <a:srgbClr val="8A94A6"/>
+                  <a:srgbClr val="7A88A0"/>
                 </a:solidFill>
                 <a:latin typeface="Inter"/>
               </a:defRPr>
@@ -23369,7 +23432,7 @@
           </a:solidFill>
           <a:ln w="12700">
             <a:solidFill>
-              <a:srgbClr val="1D4ED8"/>
+              <a:srgbClr val="1668DC"/>
             </a:solidFill>
           </a:ln>
           <a:effectLst/>
@@ -23424,7 +23487,7 @@
               </a:lnSpc>
               <a:defRPr sz="1500" b="1">
                 <a:solidFill>
-                  <a:srgbClr val="1D4ED8"/>
+                  <a:srgbClr val="1668DC"/>
                 </a:solidFill>
                 <a:latin typeface="Inter"/>
               </a:defRPr>
@@ -23463,7 +23526,7 @@
               </a:lnSpc>
               <a:defRPr sz="1100" b="0">
                 <a:solidFill>
-                  <a:srgbClr val="475569"/>
+                  <a:srgbClr val="3A4A66"/>
                 </a:solidFill>
                 <a:latin typeface="Inter"/>
               </a:defRPr>
@@ -23479,7 +23542,7 @@
               </a:lnSpc>
               <a:defRPr sz="1100" b="0">
                 <a:solidFill>
-                  <a:srgbClr val="475569"/>
+                  <a:srgbClr val="3A4A66"/>
                 </a:solidFill>
                 <a:latin typeface="Inter"/>
               </a:defRPr>
@@ -23507,7 +23570,7 @@
             </a:avLst>
           </a:prstGeom>
           <a:solidFill>
-            <a:srgbClr val="F7F9FC"/>
+            <a:srgbClr val="F5F7FB"/>
           </a:solidFill>
           <a:ln w="12700">
             <a:solidFill>
@@ -23608,7 +23671,7 @@
               </a:spcAft>
               <a:defRPr sz="1200">
                 <a:solidFill>
-                  <a:srgbClr val="475569"/>
+                  <a:srgbClr val="3A4A66"/>
                 </a:solidFill>
                 <a:latin typeface="Inter"/>
               </a:defRPr>
@@ -23627,7 +23690,7 @@
               </a:spcAft>
               <a:defRPr sz="1200">
                 <a:solidFill>
-                  <a:srgbClr val="475569"/>
+                  <a:srgbClr val="3A4A66"/>
                 </a:solidFill>
                 <a:latin typeface="Inter"/>
               </a:defRPr>
@@ -23666,7 +23729,7 @@
               </a:lnSpc>
               <a:defRPr sz="1200" b="0">
                 <a:solidFill>
-                  <a:srgbClr val="8A94A6"/>
+                  <a:srgbClr val="7A88A0"/>
                 </a:solidFill>
                 <a:latin typeface="Inter"/>
               </a:defRPr>
@@ -23705,7 +23768,7 @@
               </a:lnSpc>
               <a:defRPr sz="900" b="0">
                 <a:solidFill>
-                  <a:srgbClr val="8A94A6"/>
+                  <a:srgbClr val="7A88A0"/>
                 </a:solidFill>
                 <a:latin typeface="Inter"/>
               </a:defRPr>
@@ -23744,7 +23807,7 @@
               </a:lnSpc>
               <a:defRPr sz="900" b="0">
                 <a:solidFill>
-                  <a:srgbClr val="8A94A6"/>
+                  <a:srgbClr val="7A88A0"/>
                 </a:solidFill>
                 <a:latin typeface="Inter"/>
               </a:defRPr>
@@ -23809,7 +23872,7 @@
               </a:lnSpc>
               <a:defRPr sz="1100" b="1">
                 <a:solidFill>
-                  <a:srgbClr val="1D4ED8"/>
+                  <a:srgbClr val="1668DC"/>
                 </a:solidFill>
                 <a:latin typeface="Inter"/>
               </a:defRPr>
@@ -23848,7 +23911,7 @@
               </a:lnSpc>
               <a:defRPr sz="3000" b="1">
                 <a:solidFill>
-                  <a:srgbClr val="0F172A"/>
+                  <a:srgbClr val="0B3375"/>
                 </a:solidFill>
                 <a:latin typeface="Manrope"/>
               </a:defRPr>
@@ -23924,7 +23987,7 @@
             </a:avLst>
           </a:prstGeom>
           <a:solidFill>
-            <a:srgbClr val="057A55"/>
+            <a:srgbClr val="0F9B7A"/>
           </a:solidFill>
           <a:ln>
             <a:noFill/>
@@ -23981,7 +24044,7 @@
               </a:lnSpc>
               <a:defRPr sz="1500" b="1">
                 <a:solidFill>
-                  <a:srgbClr val="0F172A"/>
+                  <a:srgbClr val="0B3375"/>
                 </a:solidFill>
                 <a:latin typeface="Inter"/>
               </a:defRPr>
@@ -24020,7 +24083,7 @@
               </a:lnSpc>
               <a:defRPr sz="1200" b="0">
                 <a:solidFill>
-                  <a:srgbClr val="475569"/>
+                  <a:srgbClr val="3A4A66"/>
                 </a:solidFill>
                 <a:latin typeface="Inter"/>
               </a:defRPr>
@@ -24096,7 +24159,7 @@
             </a:avLst>
           </a:prstGeom>
           <a:solidFill>
-            <a:srgbClr val="057A55"/>
+            <a:srgbClr val="0F9B7A"/>
           </a:solidFill>
           <a:ln>
             <a:noFill/>
@@ -24153,7 +24216,7 @@
               </a:lnSpc>
               <a:defRPr sz="1500" b="1">
                 <a:solidFill>
-                  <a:srgbClr val="0F172A"/>
+                  <a:srgbClr val="0B3375"/>
                 </a:solidFill>
                 <a:latin typeface="Inter"/>
               </a:defRPr>
@@ -24192,7 +24255,7 @@
               </a:lnSpc>
               <a:defRPr sz="1200" b="0">
                 <a:solidFill>
-                  <a:srgbClr val="475569"/>
+                  <a:srgbClr val="3A4A66"/>
                 </a:solidFill>
                 <a:latin typeface="Inter"/>
               </a:defRPr>
@@ -24268,7 +24331,7 @@
             </a:avLst>
           </a:prstGeom>
           <a:solidFill>
-            <a:srgbClr val="057A55"/>
+            <a:srgbClr val="0F9B7A"/>
           </a:solidFill>
           <a:ln>
             <a:noFill/>
@@ -24325,7 +24388,7 @@
               </a:lnSpc>
               <a:defRPr sz="1500" b="1">
                 <a:solidFill>
-                  <a:srgbClr val="0F172A"/>
+                  <a:srgbClr val="0B3375"/>
                 </a:solidFill>
                 <a:latin typeface="Inter"/>
               </a:defRPr>
@@ -24364,7 +24427,7 @@
               </a:lnSpc>
               <a:defRPr sz="1200" b="0">
                 <a:solidFill>
-                  <a:srgbClr val="475569"/>
+                  <a:srgbClr val="3A4A66"/>
                 </a:solidFill>
                 <a:latin typeface="Inter"/>
               </a:defRPr>
@@ -24440,7 +24503,7 @@
             </a:avLst>
           </a:prstGeom>
           <a:solidFill>
-            <a:srgbClr val="057A55"/>
+            <a:srgbClr val="0F9B7A"/>
           </a:solidFill>
           <a:ln>
             <a:noFill/>
@@ -24497,7 +24560,7 @@
               </a:lnSpc>
               <a:defRPr sz="1500" b="1">
                 <a:solidFill>
-                  <a:srgbClr val="0F172A"/>
+                  <a:srgbClr val="0B3375"/>
                 </a:solidFill>
                 <a:latin typeface="Inter"/>
               </a:defRPr>
@@ -24536,7 +24599,7 @@
               </a:lnSpc>
               <a:defRPr sz="1200" b="0">
                 <a:solidFill>
-                  <a:srgbClr val="475569"/>
+                  <a:srgbClr val="3A4A66"/>
                 </a:solidFill>
                 <a:latin typeface="Inter"/>
               </a:defRPr>
@@ -24612,7 +24675,7 @@
             </a:avLst>
           </a:prstGeom>
           <a:solidFill>
-            <a:srgbClr val="057A55"/>
+            <a:srgbClr val="0F9B7A"/>
           </a:solidFill>
           <a:ln>
             <a:noFill/>
@@ -24669,7 +24732,7 @@
               </a:lnSpc>
               <a:defRPr sz="1500" b="1">
                 <a:solidFill>
-                  <a:srgbClr val="0F172A"/>
+                  <a:srgbClr val="0B3375"/>
                 </a:solidFill>
                 <a:latin typeface="Inter"/>
               </a:defRPr>
@@ -24708,7 +24771,7 @@
               </a:lnSpc>
               <a:defRPr sz="1200" b="0">
                 <a:solidFill>
-                  <a:srgbClr val="475569"/>
+                  <a:srgbClr val="3A4A66"/>
                 </a:solidFill>
                 <a:latin typeface="Inter"/>
               </a:defRPr>
@@ -24784,7 +24847,7 @@
             </a:avLst>
           </a:prstGeom>
           <a:solidFill>
-            <a:srgbClr val="057A55"/>
+            <a:srgbClr val="0F9B7A"/>
           </a:solidFill>
           <a:ln>
             <a:noFill/>
@@ -24841,7 +24904,7 @@
               </a:lnSpc>
               <a:defRPr sz="1500" b="1">
                 <a:solidFill>
-                  <a:srgbClr val="0F172A"/>
+                  <a:srgbClr val="0B3375"/>
                 </a:solidFill>
                 <a:latin typeface="Inter"/>
               </a:defRPr>
@@ -24880,7 +24943,7 @@
               </a:lnSpc>
               <a:defRPr sz="1200" b="0">
                 <a:solidFill>
-                  <a:srgbClr val="475569"/>
+                  <a:srgbClr val="3A4A66"/>
                 </a:solidFill>
                 <a:latin typeface="Inter"/>
               </a:defRPr>
@@ -24919,7 +24982,7 @@
               </a:lnSpc>
               <a:defRPr sz="900" b="0">
                 <a:solidFill>
-                  <a:srgbClr val="8A94A6"/>
+                  <a:srgbClr val="7A88A0"/>
                 </a:solidFill>
                 <a:latin typeface="Inter"/>
               </a:defRPr>
@@ -24958,7 +25021,7 @@
               </a:lnSpc>
               <a:defRPr sz="900" b="0">
                 <a:solidFill>
-                  <a:srgbClr val="8A94A6"/>
+                  <a:srgbClr val="7A88A0"/>
                 </a:solidFill>
                 <a:latin typeface="Inter"/>
               </a:defRPr>
@@ -25023,7 +25086,7 @@
               </a:lnSpc>
               <a:defRPr sz="1100" b="1">
                 <a:solidFill>
-                  <a:srgbClr val="1D4ED8"/>
+                  <a:srgbClr val="1668DC"/>
                 </a:solidFill>
                 <a:latin typeface="Inter"/>
               </a:defRPr>
@@ -25062,7 +25125,7 @@
               </a:lnSpc>
               <a:defRPr sz="3000" b="1">
                 <a:solidFill>
-                  <a:srgbClr val="0F172A"/>
+                  <a:srgbClr val="0B3375"/>
                 </a:solidFill>
                 <a:latin typeface="Manrope"/>
               </a:defRPr>
@@ -25101,7 +25164,7 @@
               </a:lnSpc>
               <a:defRPr sz="1400" b="0">
                 <a:solidFill>
-                  <a:srgbClr val="475569"/>
+                  <a:srgbClr val="3A4A66"/>
                 </a:solidFill>
                 <a:latin typeface="Inter"/>
               </a:defRPr>
@@ -25177,7 +25240,7 @@
             </a:avLst>
           </a:prstGeom>
           <a:solidFill>
-            <a:srgbClr val="057A55"/>
+            <a:srgbClr val="0F9B7A"/>
           </a:solidFill>
           <a:ln>
             <a:noFill/>
@@ -25315,7 +25378,7 @@
               </a:spcAft>
               <a:defRPr sz="1100">
                 <a:solidFill>
-                  <a:srgbClr val="475569"/>
+                  <a:srgbClr val="3A4A66"/>
                 </a:solidFill>
                 <a:latin typeface="Inter"/>
               </a:defRPr>
@@ -25334,7 +25397,7 @@
               </a:spcAft>
               <a:defRPr sz="1100">
                 <a:solidFill>
-                  <a:srgbClr val="475569"/>
+                  <a:srgbClr val="3A4A66"/>
                 </a:solidFill>
                 <a:latin typeface="Inter"/>
               </a:defRPr>
@@ -25353,7 +25416,7 @@
               </a:spcAft>
               <a:defRPr sz="1100">
                 <a:solidFill>
-                  <a:srgbClr val="475569"/>
+                  <a:srgbClr val="3A4A66"/>
                 </a:solidFill>
                 <a:latin typeface="Inter"/>
               </a:defRPr>
@@ -25372,7 +25435,7 @@
               </a:spcAft>
               <a:defRPr sz="1100">
                 <a:solidFill>
-                  <a:srgbClr val="475569"/>
+                  <a:srgbClr val="3A4A66"/>
                 </a:solidFill>
                 <a:latin typeface="Inter"/>
               </a:defRPr>
@@ -25391,7 +25454,7 @@
               </a:spcAft>
               <a:defRPr sz="1100">
                 <a:solidFill>
-                  <a:srgbClr val="475569"/>
+                  <a:srgbClr val="3A4A66"/>
                 </a:solidFill>
                 <a:latin typeface="Inter"/>
               </a:defRPr>
@@ -25410,7 +25473,7 @@
               </a:spcAft>
               <a:defRPr sz="1100">
                 <a:solidFill>
-                  <a:srgbClr val="475569"/>
+                  <a:srgbClr val="3A4A66"/>
                 </a:solidFill>
                 <a:latin typeface="Inter"/>
               </a:defRPr>
@@ -25429,7 +25492,7 @@
               </a:spcAft>
               <a:defRPr sz="1100">
                 <a:solidFill>
-                  <a:srgbClr val="475569"/>
+                  <a:srgbClr val="3A4A66"/>
                 </a:solidFill>
                 <a:latin typeface="Inter"/>
               </a:defRPr>
@@ -25643,7 +25706,7 @@
               </a:spcAft>
               <a:defRPr sz="1100">
                 <a:solidFill>
-                  <a:srgbClr val="475569"/>
+                  <a:srgbClr val="3A4A66"/>
                 </a:solidFill>
                 <a:latin typeface="Inter"/>
               </a:defRPr>
@@ -25662,7 +25725,7 @@
               </a:spcAft>
               <a:defRPr sz="1100">
                 <a:solidFill>
-                  <a:srgbClr val="475569"/>
+                  <a:srgbClr val="3A4A66"/>
                 </a:solidFill>
                 <a:latin typeface="Inter"/>
               </a:defRPr>
@@ -25681,7 +25744,7 @@
               </a:spcAft>
               <a:defRPr sz="1100">
                 <a:solidFill>
-                  <a:srgbClr val="475569"/>
+                  <a:srgbClr val="3A4A66"/>
                 </a:solidFill>
                 <a:latin typeface="Inter"/>
               </a:defRPr>
@@ -25700,7 +25763,7 @@
               </a:spcAft>
               <a:defRPr sz="1100">
                 <a:solidFill>
-                  <a:srgbClr val="475569"/>
+                  <a:srgbClr val="3A4A66"/>
                 </a:solidFill>
                 <a:latin typeface="Inter"/>
               </a:defRPr>
@@ -25776,7 +25839,7 @@
             </a:avLst>
           </a:prstGeom>
           <a:solidFill>
-            <a:srgbClr val="8A94A6"/>
+            <a:srgbClr val="7A88A0"/>
           </a:solidFill>
           <a:ln>
             <a:noFill/>
@@ -25914,7 +25977,7 @@
               </a:spcAft>
               <a:defRPr sz="1100">
                 <a:solidFill>
-                  <a:srgbClr val="475569"/>
+                  <a:srgbClr val="3A4A66"/>
                 </a:solidFill>
                 <a:latin typeface="Inter"/>
               </a:defRPr>
@@ -25933,7 +25996,7 @@
               </a:spcAft>
               <a:defRPr sz="1100">
                 <a:solidFill>
-                  <a:srgbClr val="475569"/>
+                  <a:srgbClr val="3A4A66"/>
                 </a:solidFill>
                 <a:latin typeface="Inter"/>
               </a:defRPr>
@@ -25972,7 +26035,7 @@
               </a:lnSpc>
               <a:defRPr sz="1200" b="0">
                 <a:solidFill>
-                  <a:srgbClr val="475569"/>
+                  <a:srgbClr val="3A4A66"/>
                 </a:solidFill>
                 <a:latin typeface="Inter"/>
               </a:defRPr>
@@ -26011,7 +26074,7 @@
               </a:lnSpc>
               <a:defRPr sz="900" b="0">
                 <a:solidFill>
-                  <a:srgbClr val="8A94A6"/>
+                  <a:srgbClr val="7A88A0"/>
                 </a:solidFill>
                 <a:latin typeface="Inter"/>
               </a:defRPr>
@@ -26050,7 +26113,7 @@
               </a:lnSpc>
               <a:defRPr sz="900" b="0">
                 <a:solidFill>
-                  <a:srgbClr val="8A94A6"/>
+                  <a:srgbClr val="7A88A0"/>
                 </a:solidFill>
                 <a:latin typeface="Inter"/>
               </a:defRPr>
@@ -26115,7 +26178,7 @@
               </a:lnSpc>
               <a:defRPr sz="1100" b="1">
                 <a:solidFill>
-                  <a:srgbClr val="1D4ED8"/>
+                  <a:srgbClr val="1668DC"/>
                 </a:solidFill>
                 <a:latin typeface="Inter"/>
               </a:defRPr>
@@ -26154,7 +26217,7 @@
               </a:lnSpc>
               <a:defRPr sz="3000" b="1">
                 <a:solidFill>
-                  <a:srgbClr val="0F172A"/>
+                  <a:srgbClr val="0B3375"/>
                 </a:solidFill>
                 <a:latin typeface="Manrope"/>
               </a:defRPr>
@@ -26182,7 +26245,7 @@
             </a:avLst>
           </a:prstGeom>
           <a:solidFill>
-            <a:srgbClr val="F7F9FC"/>
+            <a:srgbClr val="F5F7FB"/>
           </a:solidFill>
           <a:ln w="12700">
             <a:solidFill>
@@ -26241,7 +26304,7 @@
               </a:lnSpc>
               <a:defRPr sz="1200" b="1">
                 <a:solidFill>
-                  <a:srgbClr val="0F172A"/>
+                  <a:srgbClr val="0B3375"/>
                 </a:solidFill>
                 <a:latin typeface="Inter"/>
               </a:defRPr>
@@ -26280,7 +26343,7 @@
               </a:lnSpc>
               <a:defRPr sz="1100" b="0">
                 <a:solidFill>
-                  <a:srgbClr val="1D4ED8"/>
+                  <a:srgbClr val="1668DC"/>
                 </a:solidFill>
                 <a:latin typeface="Inter"/>
               </a:defRPr>
@@ -26319,7 +26382,7 @@
               </a:lnSpc>
               <a:defRPr sz="1100" b="0">
                 <a:solidFill>
-                  <a:srgbClr val="8A94A6"/>
+                  <a:srgbClr val="7A88A0"/>
                 </a:solidFill>
                 <a:latin typeface="Inter"/>
               </a:defRPr>
@@ -26347,7 +26410,7 @@
             </a:avLst>
           </a:prstGeom>
           <a:solidFill>
-            <a:srgbClr val="F7F9FC"/>
+            <a:srgbClr val="F5F7FB"/>
           </a:solidFill>
           <a:ln w="12700">
             <a:solidFill>
@@ -26406,7 +26469,7 @@
               </a:lnSpc>
               <a:defRPr sz="1200" b="1">
                 <a:solidFill>
-                  <a:srgbClr val="0F172A"/>
+                  <a:srgbClr val="0B3375"/>
                 </a:solidFill>
                 <a:latin typeface="Inter"/>
               </a:defRPr>
@@ -26445,7 +26508,7 @@
               </a:lnSpc>
               <a:defRPr sz="1100" b="0">
                 <a:solidFill>
-                  <a:srgbClr val="1D4ED8"/>
+                  <a:srgbClr val="1668DC"/>
                 </a:solidFill>
                 <a:latin typeface="Inter"/>
               </a:defRPr>
@@ -26484,7 +26547,7 @@
               </a:lnSpc>
               <a:defRPr sz="1100" b="0">
                 <a:solidFill>
-                  <a:srgbClr val="8A94A6"/>
+                  <a:srgbClr val="7A88A0"/>
                 </a:solidFill>
                 <a:latin typeface="Inter"/>
               </a:defRPr>
@@ -26512,7 +26575,7 @@
             </a:avLst>
           </a:prstGeom>
           <a:solidFill>
-            <a:srgbClr val="F7F9FC"/>
+            <a:srgbClr val="F5F7FB"/>
           </a:solidFill>
           <a:ln w="12700">
             <a:solidFill>
@@ -26571,7 +26634,7 @@
               </a:lnSpc>
               <a:defRPr sz="1200" b="1">
                 <a:solidFill>
-                  <a:srgbClr val="0F172A"/>
+                  <a:srgbClr val="0B3375"/>
                 </a:solidFill>
                 <a:latin typeface="Inter"/>
               </a:defRPr>
@@ -26610,7 +26673,7 @@
               </a:lnSpc>
               <a:defRPr sz="1100" b="0">
                 <a:solidFill>
-                  <a:srgbClr val="1D4ED8"/>
+                  <a:srgbClr val="1668DC"/>
                 </a:solidFill>
                 <a:latin typeface="Inter"/>
               </a:defRPr>
@@ -26649,7 +26712,7 @@
               </a:lnSpc>
               <a:defRPr sz="1100" b="0">
                 <a:solidFill>
-                  <a:srgbClr val="8A94A6"/>
+                  <a:srgbClr val="7A88A0"/>
                 </a:solidFill>
                 <a:latin typeface="Inter"/>
               </a:defRPr>
@@ -26677,7 +26740,7 @@
             </a:avLst>
           </a:prstGeom>
           <a:solidFill>
-            <a:srgbClr val="F7F9FC"/>
+            <a:srgbClr val="F5F7FB"/>
           </a:solidFill>
           <a:ln w="12700">
             <a:solidFill>
@@ -26736,7 +26799,7 @@
               </a:lnSpc>
               <a:defRPr sz="1200" b="1">
                 <a:solidFill>
-                  <a:srgbClr val="0F172A"/>
+                  <a:srgbClr val="0B3375"/>
                 </a:solidFill>
                 <a:latin typeface="Inter"/>
               </a:defRPr>
@@ -26775,7 +26838,7 @@
               </a:lnSpc>
               <a:defRPr sz="1100" b="0">
                 <a:solidFill>
-                  <a:srgbClr val="1D4ED8"/>
+                  <a:srgbClr val="1668DC"/>
                 </a:solidFill>
                 <a:latin typeface="Inter"/>
               </a:defRPr>
@@ -26814,7 +26877,7 @@
               </a:lnSpc>
               <a:defRPr sz="1100" b="0">
                 <a:solidFill>
-                  <a:srgbClr val="8A94A6"/>
+                  <a:srgbClr val="7A88A0"/>
                 </a:solidFill>
                 <a:latin typeface="Inter"/>
               </a:defRPr>
@@ -26842,7 +26905,7 @@
             </a:avLst>
           </a:prstGeom>
           <a:solidFill>
-            <a:srgbClr val="F7F9FC"/>
+            <a:srgbClr val="F5F7FB"/>
           </a:solidFill>
           <a:ln w="12700">
             <a:solidFill>
@@ -26901,7 +26964,7 @@
               </a:lnSpc>
               <a:defRPr sz="1200" b="1">
                 <a:solidFill>
-                  <a:srgbClr val="0F172A"/>
+                  <a:srgbClr val="0B3375"/>
                 </a:solidFill>
                 <a:latin typeface="Inter"/>
               </a:defRPr>
@@ -26940,7 +27003,7 @@
               </a:lnSpc>
               <a:defRPr sz="1100" b="0">
                 <a:solidFill>
-                  <a:srgbClr val="1D4ED8"/>
+                  <a:srgbClr val="1668DC"/>
                 </a:solidFill>
                 <a:latin typeface="Inter"/>
               </a:defRPr>
@@ -26979,7 +27042,7 @@
               </a:lnSpc>
               <a:defRPr sz="1100" b="0">
                 <a:solidFill>
-                  <a:srgbClr val="8A94A6"/>
+                  <a:srgbClr val="7A88A0"/>
                 </a:solidFill>
                 <a:latin typeface="Inter"/>
               </a:defRPr>
@@ -27007,7 +27070,7 @@
             </a:avLst>
           </a:prstGeom>
           <a:solidFill>
-            <a:srgbClr val="F7F9FC"/>
+            <a:srgbClr val="F5F7FB"/>
           </a:solidFill>
           <a:ln w="12700">
             <a:solidFill>
@@ -27066,7 +27129,7 @@
               </a:lnSpc>
               <a:defRPr sz="1200" b="1">
                 <a:solidFill>
-                  <a:srgbClr val="0F172A"/>
+                  <a:srgbClr val="0B3375"/>
                 </a:solidFill>
                 <a:latin typeface="Inter"/>
               </a:defRPr>
@@ -27105,7 +27168,7 @@
               </a:lnSpc>
               <a:defRPr sz="1100" b="0">
                 <a:solidFill>
-                  <a:srgbClr val="1D4ED8"/>
+                  <a:srgbClr val="1668DC"/>
                 </a:solidFill>
                 <a:latin typeface="Inter"/>
               </a:defRPr>
@@ -27144,7 +27207,7 @@
               </a:lnSpc>
               <a:defRPr sz="1100" b="0">
                 <a:solidFill>
-                  <a:srgbClr val="8A94A6"/>
+                  <a:srgbClr val="7A88A0"/>
                 </a:solidFill>
                 <a:latin typeface="Inter"/>
               </a:defRPr>
@@ -27172,7 +27235,7 @@
             </a:avLst>
           </a:prstGeom>
           <a:solidFill>
-            <a:srgbClr val="EEF2FF"/>
+            <a:srgbClr val="EEF4FD"/>
           </a:solidFill>
           <a:ln>
             <a:noFill/>
@@ -27229,7 +27292,7 @@
               </a:lnSpc>
               <a:defRPr sz="1400" b="1">
                 <a:solidFill>
-                  <a:srgbClr val="1D4ED8"/>
+                  <a:srgbClr val="1668DC"/>
                 </a:solidFill>
                 <a:latin typeface="Inter"/>
               </a:defRPr>
@@ -27268,7 +27331,7 @@
               </a:lnSpc>
               <a:defRPr sz="900" b="0">
                 <a:solidFill>
-                  <a:srgbClr val="8A94A6"/>
+                  <a:srgbClr val="7A88A0"/>
                 </a:solidFill>
                 <a:latin typeface="Inter"/>
               </a:defRPr>
@@ -27307,7 +27370,7 @@
               </a:lnSpc>
               <a:defRPr sz="900" b="0">
                 <a:solidFill>
-                  <a:srgbClr val="8A94A6"/>
+                  <a:srgbClr val="7A88A0"/>
                 </a:solidFill>
                 <a:latin typeface="Inter"/>
               </a:defRPr>
@@ -27332,7 +27395,7 @@
     <p:bg>
       <p:bgPr>
         <a:solidFill>
-          <a:srgbClr val="0F172A"/>
+          <a:srgbClr val="0B3375"/>
         </a:solidFill>
         <a:effectLst/>
       </p:bgPr>
@@ -27361,7 +27424,7 @@
             </a:avLst>
           </a:prstGeom>
           <a:solidFill>
-            <a:srgbClr val="1D4ED8"/>
+            <a:srgbClr val="1668DC"/>
           </a:solidFill>
           <a:ln>
             <a:noFill/>
@@ -27418,7 +27481,7 @@
               </a:lnSpc>
               <a:defRPr sz="1200" b="1">
                 <a:solidFill>
-                  <a:srgbClr val="0891B2"/>
+                  <a:srgbClr val="35C6F3"/>
                 </a:solidFill>
                 <a:latin typeface="Inter"/>
               </a:defRPr>
@@ -27496,7 +27559,7 @@
               </a:lnSpc>
               <a:defRPr sz="1800" b="1">
                 <a:solidFill>
-                  <a:srgbClr val="1D4ED8"/>
+                  <a:srgbClr val="1668DC"/>
                 </a:solidFill>
                 <a:latin typeface="Inter"/>
               </a:defRPr>
@@ -27574,7 +27637,7 @@
               </a:lnSpc>
               <a:defRPr sz="1300" b="0">
                 <a:solidFill>
-                  <a:srgbClr val="94A3B8"/>
+                  <a:srgbClr val="B8C6E0"/>
                 </a:solidFill>
                 <a:latin typeface="Inter"/>
               </a:defRPr>
@@ -27613,7 +27676,7 @@
               </a:lnSpc>
               <a:defRPr sz="1800" b="1">
                 <a:solidFill>
-                  <a:srgbClr val="1D4ED8"/>
+                  <a:srgbClr val="1668DC"/>
                 </a:solidFill>
                 <a:latin typeface="Inter"/>
               </a:defRPr>
@@ -27691,7 +27754,7 @@
               </a:lnSpc>
               <a:defRPr sz="1300" b="0">
                 <a:solidFill>
-                  <a:srgbClr val="94A3B8"/>
+                  <a:srgbClr val="B8C6E0"/>
                 </a:solidFill>
                 <a:latin typeface="Inter"/>
               </a:defRPr>
@@ -27730,7 +27793,7 @@
               </a:lnSpc>
               <a:defRPr sz="1800" b="1">
                 <a:solidFill>
-                  <a:srgbClr val="1D4ED8"/>
+                  <a:srgbClr val="1668DC"/>
                 </a:solidFill>
                 <a:latin typeface="Inter"/>
               </a:defRPr>
@@ -27808,7 +27871,7 @@
               </a:lnSpc>
               <a:defRPr sz="1300" b="0">
                 <a:solidFill>
-                  <a:srgbClr val="94A3B8"/>
+                  <a:srgbClr val="B8C6E0"/>
                 </a:solidFill>
                 <a:latin typeface="Inter"/>
               </a:defRPr>
@@ -27847,7 +27910,7 @@
               </a:lnSpc>
               <a:defRPr sz="1800" b="1">
                 <a:solidFill>
-                  <a:srgbClr val="1D4ED8"/>
+                  <a:srgbClr val="1668DC"/>
                 </a:solidFill>
                 <a:latin typeface="Inter"/>
               </a:defRPr>
@@ -27925,7 +27988,7 @@
               </a:lnSpc>
               <a:defRPr sz="1300" b="0">
                 <a:solidFill>
-                  <a:srgbClr val="94A3B8"/>
+                  <a:srgbClr val="B8C6E0"/>
                 </a:solidFill>
                 <a:latin typeface="Inter"/>
               </a:defRPr>
@@ -27964,7 +28027,7 @@
               </a:lnSpc>
               <a:defRPr sz="1200" b="0">
                 <a:solidFill>
-                  <a:srgbClr val="64748B"/>
+                  <a:srgbClr val="8EA3C4"/>
                 </a:solidFill>
                 <a:latin typeface="Inter"/>
               </a:defRPr>
@@ -28029,7 +28092,7 @@
               </a:lnSpc>
               <a:defRPr sz="1100" b="1">
                 <a:solidFill>
-                  <a:srgbClr val="1D4ED8"/>
+                  <a:srgbClr val="1668DC"/>
                 </a:solidFill>
                 <a:latin typeface="Inter"/>
               </a:defRPr>
@@ -28068,7 +28131,7 @@
               </a:lnSpc>
               <a:defRPr sz="3000" b="1">
                 <a:solidFill>
-                  <a:srgbClr val="0F172A"/>
+                  <a:srgbClr val="0B3375"/>
                 </a:solidFill>
                 <a:latin typeface="Manrope"/>
               </a:defRPr>
@@ -28107,7 +28170,7 @@
               </a:lnSpc>
               <a:defRPr sz="1400" b="0">
                 <a:solidFill>
-                  <a:srgbClr val="475569"/>
+                  <a:srgbClr val="3A4A66"/>
                 </a:solidFill>
                 <a:latin typeface="Inter"/>
               </a:defRPr>
@@ -28135,7 +28198,7 @@
             </a:avLst>
           </a:prstGeom>
           <a:solidFill>
-            <a:srgbClr val="EEF2FF"/>
+            <a:srgbClr val="EEF4FD"/>
           </a:solidFill>
           <a:ln>
             <a:noFill/>
@@ -28192,7 +28255,7 @@
               </a:lnSpc>
               <a:defRPr sz="1200" b="1">
                 <a:solidFill>
-                  <a:srgbClr val="1D4ED8"/>
+                  <a:srgbClr val="1668DC"/>
                 </a:solidFill>
                 <a:latin typeface="Inter"/>
               </a:defRPr>
@@ -28231,7 +28294,7 @@
               </a:lnSpc>
               <a:defRPr sz="1800" b="0">
                 <a:solidFill>
-                  <a:srgbClr val="8A94A6"/>
+                  <a:srgbClr val="7A88A0"/>
                 </a:solidFill>
                 <a:latin typeface="Inter"/>
               </a:defRPr>
@@ -28259,7 +28322,7 @@
             </a:avLst>
           </a:prstGeom>
           <a:solidFill>
-            <a:srgbClr val="EEF2FF"/>
+            <a:srgbClr val="EEF4FD"/>
           </a:solidFill>
           <a:ln>
             <a:noFill/>
@@ -28316,7 +28379,7 @@
               </a:lnSpc>
               <a:defRPr sz="1200" b="1">
                 <a:solidFill>
-                  <a:srgbClr val="1D4ED8"/>
+                  <a:srgbClr val="1668DC"/>
                 </a:solidFill>
                 <a:latin typeface="Inter"/>
               </a:defRPr>
@@ -28355,7 +28418,7 @@
               </a:lnSpc>
               <a:defRPr sz="1800" b="0">
                 <a:solidFill>
-                  <a:srgbClr val="8A94A6"/>
+                  <a:srgbClr val="7A88A0"/>
                 </a:solidFill>
                 <a:latin typeface="Inter"/>
               </a:defRPr>
@@ -28383,7 +28446,7 @@
             </a:avLst>
           </a:prstGeom>
           <a:solidFill>
-            <a:srgbClr val="EEF2FF"/>
+            <a:srgbClr val="EEF4FD"/>
           </a:solidFill>
           <a:ln>
             <a:noFill/>
@@ -28440,7 +28503,7 @@
               </a:lnSpc>
               <a:defRPr sz="1200" b="1">
                 <a:solidFill>
-                  <a:srgbClr val="1D4ED8"/>
+                  <a:srgbClr val="1668DC"/>
                 </a:solidFill>
                 <a:latin typeface="Inter"/>
               </a:defRPr>
@@ -28479,7 +28542,7 @@
               </a:lnSpc>
               <a:defRPr sz="1800" b="0">
                 <a:solidFill>
-                  <a:srgbClr val="8A94A6"/>
+                  <a:srgbClr val="7A88A0"/>
                 </a:solidFill>
                 <a:latin typeface="Inter"/>
               </a:defRPr>
@@ -28507,7 +28570,7 @@
             </a:avLst>
           </a:prstGeom>
           <a:solidFill>
-            <a:srgbClr val="EEF2FF"/>
+            <a:srgbClr val="EEF4FD"/>
           </a:solidFill>
           <a:ln>
             <a:noFill/>
@@ -28564,7 +28627,7 @@
               </a:lnSpc>
               <a:defRPr sz="1200" b="1">
                 <a:solidFill>
-                  <a:srgbClr val="1D4ED8"/>
+                  <a:srgbClr val="1668DC"/>
                 </a:solidFill>
                 <a:latin typeface="Inter"/>
               </a:defRPr>
@@ -28603,7 +28666,7 @@
               </a:lnSpc>
               <a:defRPr sz="1800" b="0">
                 <a:solidFill>
-                  <a:srgbClr val="8A94A6"/>
+                  <a:srgbClr val="7A88A0"/>
                 </a:solidFill>
                 <a:latin typeface="Inter"/>
               </a:defRPr>
@@ -28631,7 +28694,7 @@
             </a:avLst>
           </a:prstGeom>
           <a:solidFill>
-            <a:srgbClr val="EEF2FF"/>
+            <a:srgbClr val="EEF4FD"/>
           </a:solidFill>
           <a:ln>
             <a:noFill/>
@@ -28688,7 +28751,7 @@
               </a:lnSpc>
               <a:defRPr sz="1200" b="1">
                 <a:solidFill>
-                  <a:srgbClr val="1D4ED8"/>
+                  <a:srgbClr val="1668DC"/>
                 </a:solidFill>
                 <a:latin typeface="Inter"/>
               </a:defRPr>
@@ -28727,7 +28790,7 @@
               </a:lnSpc>
               <a:defRPr sz="1800" b="0">
                 <a:solidFill>
-                  <a:srgbClr val="8A94A6"/>
+                  <a:srgbClr val="7A88A0"/>
                 </a:solidFill>
                 <a:latin typeface="Inter"/>
               </a:defRPr>
@@ -28755,7 +28818,7 @@
             </a:avLst>
           </a:prstGeom>
           <a:solidFill>
-            <a:srgbClr val="EEF2FF"/>
+            <a:srgbClr val="EEF4FD"/>
           </a:solidFill>
           <a:ln>
             <a:noFill/>
@@ -28812,7 +28875,7 @@
               </a:lnSpc>
               <a:defRPr sz="1200" b="1">
                 <a:solidFill>
-                  <a:srgbClr val="1D4ED8"/>
+                  <a:srgbClr val="1668DC"/>
                 </a:solidFill>
                 <a:latin typeface="Inter"/>
               </a:defRPr>
@@ -28851,7 +28914,7 @@
               </a:lnSpc>
               <a:defRPr sz="1800" b="0">
                 <a:solidFill>
-                  <a:srgbClr val="8A94A6"/>
+                  <a:srgbClr val="7A88A0"/>
                 </a:solidFill>
                 <a:latin typeface="Inter"/>
               </a:defRPr>
@@ -28879,7 +28942,7 @@
             </a:avLst>
           </a:prstGeom>
           <a:solidFill>
-            <a:srgbClr val="EEF2FF"/>
+            <a:srgbClr val="EEF4FD"/>
           </a:solidFill>
           <a:ln>
             <a:noFill/>
@@ -28936,7 +28999,7 @@
               </a:lnSpc>
               <a:defRPr sz="1200" b="1">
                 <a:solidFill>
-                  <a:srgbClr val="1D4ED8"/>
+                  <a:srgbClr val="1668DC"/>
                 </a:solidFill>
                 <a:latin typeface="Inter"/>
               </a:defRPr>
@@ -28964,7 +29027,7 @@
             </a:avLst>
           </a:prstGeom>
           <a:solidFill>
-            <a:srgbClr val="057A55"/>
+            <a:srgbClr val="0F9B7A"/>
           </a:solidFill>
           <a:ln>
             <a:noFill/>
@@ -29255,7 +29318,7 @@
               </a:lnSpc>
               <a:defRPr sz="900" b="0">
                 <a:solidFill>
-                  <a:srgbClr val="8A94A6"/>
+                  <a:srgbClr val="7A88A0"/>
                 </a:solidFill>
                 <a:latin typeface="Inter"/>
               </a:defRPr>
@@ -29294,7 +29357,7 @@
               </a:lnSpc>
               <a:defRPr sz="900" b="0">
                 <a:solidFill>
-                  <a:srgbClr val="8A94A6"/>
+                  <a:srgbClr val="7A88A0"/>
                 </a:solidFill>
                 <a:latin typeface="Inter"/>
               </a:defRPr>
@@ -29359,7 +29422,7 @@
               </a:lnSpc>
               <a:defRPr sz="1100" b="1">
                 <a:solidFill>
-                  <a:srgbClr val="1D4ED8"/>
+                  <a:srgbClr val="1668DC"/>
                 </a:solidFill>
                 <a:latin typeface="Inter"/>
               </a:defRPr>
@@ -29398,7 +29461,7 @@
               </a:lnSpc>
               <a:defRPr sz="3000" b="1">
                 <a:solidFill>
-                  <a:srgbClr val="0F172A"/>
+                  <a:srgbClr val="0B3375"/>
                 </a:solidFill>
                 <a:latin typeface="Manrope"/>
               </a:defRPr>
@@ -29474,7 +29537,7 @@
             </a:avLst>
           </a:prstGeom>
           <a:solidFill>
-            <a:srgbClr val="1D4ED8"/>
+            <a:srgbClr val="1668DC"/>
           </a:solidFill>
           <a:ln>
             <a:noFill/>
@@ -29531,7 +29594,7 @@
               </a:lnSpc>
               <a:defRPr sz="1500" b="1">
                 <a:solidFill>
-                  <a:srgbClr val="0F172A"/>
+                  <a:srgbClr val="0B3375"/>
                 </a:solidFill>
                 <a:latin typeface="Inter"/>
               </a:defRPr>
@@ -29570,7 +29633,7 @@
               </a:lnSpc>
               <a:defRPr sz="1200" b="0">
                 <a:solidFill>
-                  <a:srgbClr val="475569"/>
+                  <a:srgbClr val="3A4A66"/>
                 </a:solidFill>
                 <a:latin typeface="Inter"/>
               </a:defRPr>
@@ -29646,7 +29709,7 @@
             </a:avLst>
           </a:prstGeom>
           <a:solidFill>
-            <a:srgbClr val="1D4ED8"/>
+            <a:srgbClr val="1668DC"/>
           </a:solidFill>
           <a:ln>
             <a:noFill/>
@@ -29703,7 +29766,7 @@
               </a:lnSpc>
               <a:defRPr sz="1500" b="1">
                 <a:solidFill>
-                  <a:srgbClr val="0F172A"/>
+                  <a:srgbClr val="0B3375"/>
                 </a:solidFill>
                 <a:latin typeface="Inter"/>
               </a:defRPr>
@@ -29742,7 +29805,7 @@
               </a:lnSpc>
               <a:defRPr sz="1200" b="0">
                 <a:solidFill>
-                  <a:srgbClr val="475569"/>
+                  <a:srgbClr val="3A4A66"/>
                 </a:solidFill>
                 <a:latin typeface="Inter"/>
               </a:defRPr>
@@ -29818,7 +29881,7 @@
             </a:avLst>
           </a:prstGeom>
           <a:solidFill>
-            <a:srgbClr val="1D4ED8"/>
+            <a:srgbClr val="1668DC"/>
           </a:solidFill>
           <a:ln>
             <a:noFill/>
@@ -29875,7 +29938,7 @@
               </a:lnSpc>
               <a:defRPr sz="1500" b="1">
                 <a:solidFill>
-                  <a:srgbClr val="0F172A"/>
+                  <a:srgbClr val="0B3375"/>
                 </a:solidFill>
                 <a:latin typeface="Inter"/>
               </a:defRPr>
@@ -29914,7 +29977,7 @@
               </a:lnSpc>
               <a:defRPr sz="1200" b="0">
                 <a:solidFill>
-                  <a:srgbClr val="475569"/>
+                  <a:srgbClr val="3A4A66"/>
                 </a:solidFill>
                 <a:latin typeface="Inter"/>
               </a:defRPr>
@@ -29990,7 +30053,7 @@
             </a:avLst>
           </a:prstGeom>
           <a:solidFill>
-            <a:srgbClr val="1D4ED8"/>
+            <a:srgbClr val="1668DC"/>
           </a:solidFill>
           <a:ln>
             <a:noFill/>
@@ -30047,7 +30110,7 @@
               </a:lnSpc>
               <a:defRPr sz="1500" b="1">
                 <a:solidFill>
-                  <a:srgbClr val="0F172A"/>
+                  <a:srgbClr val="0B3375"/>
                 </a:solidFill>
                 <a:latin typeface="Inter"/>
               </a:defRPr>
@@ -30086,7 +30149,7 @@
               </a:lnSpc>
               <a:defRPr sz="1200" b="0">
                 <a:solidFill>
-                  <a:srgbClr val="475569"/>
+                  <a:srgbClr val="3A4A66"/>
                 </a:solidFill>
                 <a:latin typeface="Inter"/>
               </a:defRPr>
@@ -30162,7 +30225,7 @@
             </a:avLst>
           </a:prstGeom>
           <a:solidFill>
-            <a:srgbClr val="1D4ED8"/>
+            <a:srgbClr val="1668DC"/>
           </a:solidFill>
           <a:ln>
             <a:noFill/>
@@ -30219,7 +30282,7 @@
               </a:lnSpc>
               <a:defRPr sz="1500" b="1">
                 <a:solidFill>
-                  <a:srgbClr val="0F172A"/>
+                  <a:srgbClr val="0B3375"/>
                 </a:solidFill>
                 <a:latin typeface="Inter"/>
               </a:defRPr>
@@ -30258,7 +30321,7 @@
               </a:lnSpc>
               <a:defRPr sz="1200" b="0">
                 <a:solidFill>
-                  <a:srgbClr val="475569"/>
+                  <a:srgbClr val="3A4A66"/>
                 </a:solidFill>
                 <a:latin typeface="Inter"/>
               </a:defRPr>
@@ -30334,7 +30397,7 @@
             </a:avLst>
           </a:prstGeom>
           <a:solidFill>
-            <a:srgbClr val="0891B2"/>
+            <a:srgbClr val="35C6F3"/>
           </a:solidFill>
           <a:ln>
             <a:noFill/>
@@ -30391,7 +30454,7 @@
               </a:lnSpc>
               <a:defRPr sz="1500" b="1">
                 <a:solidFill>
-                  <a:srgbClr val="0F172A"/>
+                  <a:srgbClr val="0B3375"/>
                 </a:solidFill>
                 <a:latin typeface="Inter"/>
               </a:defRPr>
@@ -30430,7 +30493,7 @@
               </a:lnSpc>
               <a:defRPr sz="1200" b="0">
                 <a:solidFill>
-                  <a:srgbClr val="475569"/>
+                  <a:srgbClr val="3A4A66"/>
                 </a:solidFill>
                 <a:latin typeface="Inter"/>
               </a:defRPr>
@@ -30506,7 +30569,7 @@
             </a:avLst>
           </a:prstGeom>
           <a:solidFill>
-            <a:srgbClr val="1D4ED8"/>
+            <a:srgbClr val="1668DC"/>
           </a:solidFill>
           <a:ln>
             <a:noFill/>
@@ -30563,7 +30626,7 @@
               </a:lnSpc>
               <a:defRPr sz="1500" b="1">
                 <a:solidFill>
-                  <a:srgbClr val="0F172A"/>
+                  <a:srgbClr val="0B3375"/>
                 </a:solidFill>
                 <a:latin typeface="Inter"/>
               </a:defRPr>
@@ -30602,7 +30665,7 @@
               </a:lnSpc>
               <a:defRPr sz="1200" b="0">
                 <a:solidFill>
-                  <a:srgbClr val="475569"/>
+                  <a:srgbClr val="3A4A66"/>
                 </a:solidFill>
                 <a:latin typeface="Inter"/>
               </a:defRPr>
@@ -30678,7 +30741,7 @@
             </a:avLst>
           </a:prstGeom>
           <a:solidFill>
-            <a:srgbClr val="0891B2"/>
+            <a:srgbClr val="35C6F3"/>
           </a:solidFill>
           <a:ln>
             <a:noFill/>
@@ -30735,7 +30798,7 @@
               </a:lnSpc>
               <a:defRPr sz="1500" b="1">
                 <a:solidFill>
-                  <a:srgbClr val="0F172A"/>
+                  <a:srgbClr val="0B3375"/>
                 </a:solidFill>
                 <a:latin typeface="Inter"/>
               </a:defRPr>
@@ -30774,7 +30837,7 @@
               </a:lnSpc>
               <a:defRPr sz="1200" b="0">
                 <a:solidFill>
-                  <a:srgbClr val="475569"/>
+                  <a:srgbClr val="3A4A66"/>
                 </a:solidFill>
                 <a:latin typeface="Inter"/>
               </a:defRPr>
@@ -30813,7 +30876,7 @@
               </a:lnSpc>
               <a:defRPr sz="1200" b="0">
                 <a:solidFill>
-                  <a:srgbClr val="8A94A6"/>
+                  <a:srgbClr val="7A88A0"/>
                 </a:solidFill>
                 <a:latin typeface="Inter"/>
               </a:defRPr>
@@ -30852,7 +30915,7 @@
               </a:lnSpc>
               <a:defRPr sz="900" b="0">
                 <a:solidFill>
-                  <a:srgbClr val="8A94A6"/>
+                  <a:srgbClr val="7A88A0"/>
                 </a:solidFill>
                 <a:latin typeface="Inter"/>
               </a:defRPr>
@@ -30891,7 +30954,7 @@
               </a:lnSpc>
               <a:defRPr sz="900" b="0">
                 <a:solidFill>
-                  <a:srgbClr val="8A94A6"/>
+                  <a:srgbClr val="7A88A0"/>
                 </a:solidFill>
                 <a:latin typeface="Inter"/>
               </a:defRPr>
@@ -30956,7 +31019,7 @@
               </a:lnSpc>
               <a:defRPr sz="1100" b="1">
                 <a:solidFill>
-                  <a:srgbClr val="1D4ED8"/>
+                  <a:srgbClr val="1668DC"/>
                 </a:solidFill>
                 <a:latin typeface="Inter"/>
               </a:defRPr>
@@ -30995,7 +31058,7 @@
               </a:lnSpc>
               <a:defRPr sz="3000" b="1">
                 <a:solidFill>
-                  <a:srgbClr val="0F172A"/>
+                  <a:srgbClr val="0B3375"/>
                 </a:solidFill>
                 <a:latin typeface="Manrope"/>
               </a:defRPr>
@@ -31034,7 +31097,7 @@
               </a:lnSpc>
               <a:defRPr sz="1400" b="0">
                 <a:solidFill>
-                  <a:srgbClr val="475569"/>
+                  <a:srgbClr val="3A4A66"/>
                 </a:solidFill>
                 <a:latin typeface="Inter"/>
               </a:defRPr>
@@ -31062,7 +31125,7 @@
             </a:avLst>
           </a:prstGeom>
           <a:solidFill>
-            <a:srgbClr val="EEF2FF"/>
+            <a:srgbClr val="EEF4FD"/>
           </a:solidFill>
           <a:ln>
             <a:noFill/>
@@ -31119,7 +31182,7 @@
               </a:lnSpc>
               <a:defRPr sz="1200" b="1">
                 <a:solidFill>
-                  <a:srgbClr val="1D4ED8"/>
+                  <a:srgbClr val="1668DC"/>
                 </a:solidFill>
                 <a:latin typeface="Inter"/>
               </a:defRPr>
@@ -31158,7 +31221,7 @@
               </a:lnSpc>
               <a:defRPr sz="1400" b="1">
                 <a:solidFill>
-                  <a:srgbClr val="0F172A"/>
+                  <a:srgbClr val="0B3375"/>
                 </a:solidFill>
                 <a:latin typeface="Inter"/>
               </a:defRPr>
@@ -31197,7 +31260,7 @@
               </a:lnSpc>
               <a:defRPr sz="1100" b="0">
                 <a:solidFill>
-                  <a:srgbClr val="8A94A6"/>
+                  <a:srgbClr val="7A88A0"/>
                 </a:solidFill>
                 <a:latin typeface="Inter"/>
               </a:defRPr>
@@ -31225,7 +31288,7 @@
             </a:avLst>
           </a:prstGeom>
           <a:solidFill>
-            <a:srgbClr val="EEF2FF"/>
+            <a:srgbClr val="EEF4FD"/>
           </a:solidFill>
           <a:ln>
             <a:noFill/>
@@ -31282,7 +31345,7 @@
               </a:lnSpc>
               <a:defRPr sz="1200" b="1">
                 <a:solidFill>
-                  <a:srgbClr val="1D4ED8"/>
+                  <a:srgbClr val="1668DC"/>
                 </a:solidFill>
                 <a:latin typeface="Inter"/>
               </a:defRPr>
@@ -31321,7 +31384,7 @@
               </a:lnSpc>
               <a:defRPr sz="1400" b="1">
                 <a:solidFill>
-                  <a:srgbClr val="0F172A"/>
+                  <a:srgbClr val="0B3375"/>
                 </a:solidFill>
                 <a:latin typeface="Inter"/>
               </a:defRPr>
@@ -31360,7 +31423,7 @@
               </a:lnSpc>
               <a:defRPr sz="1100" b="0">
                 <a:solidFill>
-                  <a:srgbClr val="8A94A6"/>
+                  <a:srgbClr val="7A88A0"/>
                 </a:solidFill>
                 <a:latin typeface="Inter"/>
               </a:defRPr>
@@ -31388,7 +31451,7 @@
             </a:avLst>
           </a:prstGeom>
           <a:solidFill>
-            <a:srgbClr val="EEF2FF"/>
+            <a:srgbClr val="EEF4FD"/>
           </a:solidFill>
           <a:ln>
             <a:noFill/>
@@ -31445,7 +31508,7 @@
               </a:lnSpc>
               <a:defRPr sz="1200" b="1">
                 <a:solidFill>
-                  <a:srgbClr val="1D4ED8"/>
+                  <a:srgbClr val="1668DC"/>
                 </a:solidFill>
                 <a:latin typeface="Inter"/>
               </a:defRPr>
@@ -31484,7 +31547,7 @@
               </a:lnSpc>
               <a:defRPr sz="1400" b="1">
                 <a:solidFill>
-                  <a:srgbClr val="0F172A"/>
+                  <a:srgbClr val="0B3375"/>
                 </a:solidFill>
                 <a:latin typeface="Inter"/>
               </a:defRPr>
@@ -31523,7 +31586,7 @@
               </a:lnSpc>
               <a:defRPr sz="1100" b="0">
                 <a:solidFill>
-                  <a:srgbClr val="8A94A6"/>
+                  <a:srgbClr val="7A88A0"/>
                 </a:solidFill>
                 <a:latin typeface="Inter"/>
               </a:defRPr>
@@ -31551,7 +31614,7 @@
             </a:avLst>
           </a:prstGeom>
           <a:solidFill>
-            <a:srgbClr val="EEF2FF"/>
+            <a:srgbClr val="EEF4FD"/>
           </a:solidFill>
           <a:ln>
             <a:noFill/>
@@ -31608,7 +31671,7 @@
               </a:lnSpc>
               <a:defRPr sz="1200" b="1">
                 <a:solidFill>
-                  <a:srgbClr val="1D4ED8"/>
+                  <a:srgbClr val="1668DC"/>
                 </a:solidFill>
                 <a:latin typeface="Inter"/>
               </a:defRPr>
@@ -31647,7 +31710,7 @@
               </a:lnSpc>
               <a:defRPr sz="1400" b="1">
                 <a:solidFill>
-                  <a:srgbClr val="0F172A"/>
+                  <a:srgbClr val="0B3375"/>
                 </a:solidFill>
                 <a:latin typeface="Inter"/>
               </a:defRPr>
@@ -31686,7 +31749,7 @@
               </a:lnSpc>
               <a:defRPr sz="1100" b="0">
                 <a:solidFill>
-                  <a:srgbClr val="8A94A6"/>
+                  <a:srgbClr val="7A88A0"/>
                 </a:solidFill>
                 <a:latin typeface="Inter"/>
               </a:defRPr>
@@ -31714,7 +31777,7 @@
             </a:avLst>
           </a:prstGeom>
           <a:solidFill>
-            <a:srgbClr val="0F172A"/>
+            <a:srgbClr val="0B3375"/>
           </a:solidFill>
           <a:ln>
             <a:noFill/>
@@ -31826,7 +31889,7 @@
               </a:lnSpc>
               <a:defRPr sz="900" b="0">
                 <a:solidFill>
-                  <a:srgbClr val="8A94A6"/>
+                  <a:srgbClr val="7A88A0"/>
                 </a:solidFill>
                 <a:latin typeface="Inter"/>
               </a:defRPr>
@@ -31865,7 +31928,7 @@
               </a:lnSpc>
               <a:defRPr sz="900" b="0">
                 <a:solidFill>
-                  <a:srgbClr val="8A94A6"/>
+                  <a:srgbClr val="7A88A0"/>
                 </a:solidFill>
                 <a:latin typeface="Inter"/>
               </a:defRPr>
@@ -31930,7 +31993,7 @@
               </a:lnSpc>
               <a:defRPr sz="1100" b="1">
                 <a:solidFill>
-                  <a:srgbClr val="1D4ED8"/>
+                  <a:srgbClr val="1668DC"/>
                 </a:solidFill>
                 <a:latin typeface="Inter"/>
               </a:defRPr>
@@ -31969,7 +32032,7 @@
               </a:lnSpc>
               <a:defRPr sz="3000" b="1">
                 <a:solidFill>
-                  <a:srgbClr val="0F172A"/>
+                  <a:srgbClr val="0B3375"/>
                 </a:solidFill>
                 <a:latin typeface="Manrope"/>
               </a:defRPr>
@@ -31997,7 +32060,7 @@
             </a:avLst>
           </a:prstGeom>
           <a:solidFill>
-            <a:srgbClr val="F7F9FC"/>
+            <a:srgbClr val="F5F7FB"/>
           </a:solidFill>
           <a:ln w="12700">
             <a:solidFill>
@@ -32056,7 +32119,7 @@
               </a:lnSpc>
               <a:defRPr sz="1400" b="1">
                 <a:solidFill>
-                  <a:srgbClr val="0F172A"/>
+                  <a:srgbClr val="0B3375"/>
                 </a:solidFill>
                 <a:latin typeface="Inter"/>
               </a:defRPr>
@@ -32095,7 +32158,7 @@
               </a:lnSpc>
               <a:defRPr sz="1100" b="0">
                 <a:solidFill>
-                  <a:srgbClr val="8A94A6"/>
+                  <a:srgbClr val="7A88A0"/>
                 </a:solidFill>
                 <a:latin typeface="Inter"/>
               </a:defRPr>
@@ -32123,7 +32186,7 @@
             </a:avLst>
           </a:prstGeom>
           <a:solidFill>
-            <a:srgbClr val="F7F9FC"/>
+            <a:srgbClr val="F5F7FB"/>
           </a:solidFill>
           <a:ln w="12700">
             <a:solidFill>
@@ -32182,7 +32245,7 @@
               </a:lnSpc>
               <a:defRPr sz="1400" b="1">
                 <a:solidFill>
-                  <a:srgbClr val="0F172A"/>
+                  <a:srgbClr val="0B3375"/>
                 </a:solidFill>
                 <a:latin typeface="Inter"/>
               </a:defRPr>
@@ -32221,7 +32284,7 @@
               </a:lnSpc>
               <a:defRPr sz="1100" b="0">
                 <a:solidFill>
-                  <a:srgbClr val="8A94A6"/>
+                  <a:srgbClr val="7A88A0"/>
                 </a:solidFill>
                 <a:latin typeface="Inter"/>
               </a:defRPr>
@@ -32249,7 +32312,7 @@
             </a:avLst>
           </a:prstGeom>
           <a:solidFill>
-            <a:srgbClr val="F7F9FC"/>
+            <a:srgbClr val="F5F7FB"/>
           </a:solidFill>
           <a:ln w="12700">
             <a:solidFill>
@@ -32308,7 +32371,7 @@
               </a:lnSpc>
               <a:defRPr sz="1400" b="1">
                 <a:solidFill>
-                  <a:srgbClr val="0F172A"/>
+                  <a:srgbClr val="0B3375"/>
                 </a:solidFill>
                 <a:latin typeface="Inter"/>
               </a:defRPr>
@@ -32347,7 +32410,7 @@
               </a:lnSpc>
               <a:defRPr sz="1100" b="0">
                 <a:solidFill>
-                  <a:srgbClr val="8A94A6"/>
+                  <a:srgbClr val="7A88A0"/>
                 </a:solidFill>
                 <a:latin typeface="Inter"/>
               </a:defRPr>
@@ -32375,7 +32438,7 @@
             </a:avLst>
           </a:prstGeom>
           <a:solidFill>
-            <a:srgbClr val="F7F9FC"/>
+            <a:srgbClr val="F5F7FB"/>
           </a:solidFill>
           <a:ln w="12700">
             <a:solidFill>
@@ -32434,7 +32497,7 @@
               </a:lnSpc>
               <a:defRPr sz="1400" b="1">
                 <a:solidFill>
-                  <a:srgbClr val="0F172A"/>
+                  <a:srgbClr val="0B3375"/>
                 </a:solidFill>
                 <a:latin typeface="Inter"/>
               </a:defRPr>
@@ -32473,7 +32536,7 @@
               </a:lnSpc>
               <a:defRPr sz="1100" b="0">
                 <a:solidFill>
-                  <a:srgbClr val="8A94A6"/>
+                  <a:srgbClr val="7A88A0"/>
                 </a:solidFill>
                 <a:latin typeface="Inter"/>
               </a:defRPr>
@@ -32501,7 +32564,7 @@
             </a:avLst>
           </a:prstGeom>
           <a:solidFill>
-            <a:srgbClr val="F7F9FC"/>
+            <a:srgbClr val="F5F7FB"/>
           </a:solidFill>
           <a:ln w="12700">
             <a:solidFill>
@@ -32560,7 +32623,7 @@
               </a:lnSpc>
               <a:defRPr sz="1400" b="1">
                 <a:solidFill>
-                  <a:srgbClr val="0F172A"/>
+                  <a:srgbClr val="0B3375"/>
                 </a:solidFill>
                 <a:latin typeface="Inter"/>
               </a:defRPr>
@@ -32599,7 +32662,7 @@
               </a:lnSpc>
               <a:defRPr sz="1100" b="0">
                 <a:solidFill>
-                  <a:srgbClr val="8A94A6"/>
+                  <a:srgbClr val="7A88A0"/>
                 </a:solidFill>
                 <a:latin typeface="Inter"/>
               </a:defRPr>
@@ -32627,7 +32690,7 @@
             </a:avLst>
           </a:prstGeom>
           <a:solidFill>
-            <a:srgbClr val="F7F9FC"/>
+            <a:srgbClr val="F5F7FB"/>
           </a:solidFill>
           <a:ln w="12700">
             <a:solidFill>
@@ -32686,7 +32749,7 @@
               </a:lnSpc>
               <a:defRPr sz="1400" b="1">
                 <a:solidFill>
-                  <a:srgbClr val="0F172A"/>
+                  <a:srgbClr val="0B3375"/>
                 </a:solidFill>
                 <a:latin typeface="Inter"/>
               </a:defRPr>
@@ -32725,7 +32788,7 @@
               </a:lnSpc>
               <a:defRPr sz="1100" b="0">
                 <a:solidFill>
-                  <a:srgbClr val="8A94A6"/>
+                  <a:srgbClr val="7A88A0"/>
                 </a:solidFill>
                 <a:latin typeface="Inter"/>
               </a:defRPr>
@@ -32753,7 +32816,7 @@
             </a:avLst>
           </a:prstGeom>
           <a:solidFill>
-            <a:srgbClr val="F7F9FC"/>
+            <a:srgbClr val="F5F7FB"/>
           </a:solidFill>
           <a:ln w="12700">
             <a:solidFill>
@@ -32812,7 +32875,7 @@
               </a:lnSpc>
               <a:defRPr sz="1400" b="1">
                 <a:solidFill>
-                  <a:srgbClr val="0F172A"/>
+                  <a:srgbClr val="0B3375"/>
                 </a:solidFill>
                 <a:latin typeface="Inter"/>
               </a:defRPr>
@@ -32851,7 +32914,7 @@
               </a:lnSpc>
               <a:defRPr sz="1100" b="0">
                 <a:solidFill>
-                  <a:srgbClr val="8A94A6"/>
+                  <a:srgbClr val="7A88A0"/>
                 </a:solidFill>
                 <a:latin typeface="Inter"/>
               </a:defRPr>
@@ -32879,7 +32942,7 @@
             </a:avLst>
           </a:prstGeom>
           <a:solidFill>
-            <a:srgbClr val="F7F9FC"/>
+            <a:srgbClr val="F5F7FB"/>
           </a:solidFill>
           <a:ln w="12700">
             <a:solidFill>
@@ -32938,7 +33001,7 @@
               </a:lnSpc>
               <a:defRPr sz="1400" b="1">
                 <a:solidFill>
-                  <a:srgbClr val="0F172A"/>
+                  <a:srgbClr val="0B3375"/>
                 </a:solidFill>
                 <a:latin typeface="Inter"/>
               </a:defRPr>
@@ -32977,7 +33040,7 @@
               </a:lnSpc>
               <a:defRPr sz="1100" b="0">
                 <a:solidFill>
-                  <a:srgbClr val="8A94A6"/>
+                  <a:srgbClr val="7A88A0"/>
                 </a:solidFill>
                 <a:latin typeface="Inter"/>
               </a:defRPr>
@@ -33005,7 +33068,7 @@
             </a:avLst>
           </a:prstGeom>
           <a:solidFill>
-            <a:srgbClr val="F7F9FC"/>
+            <a:srgbClr val="F5F7FB"/>
           </a:solidFill>
           <a:ln w="12700">
             <a:solidFill>
@@ -33064,7 +33127,7 @@
               </a:lnSpc>
               <a:defRPr sz="1400" b="1">
                 <a:solidFill>
-                  <a:srgbClr val="0F172A"/>
+                  <a:srgbClr val="0B3375"/>
                 </a:solidFill>
                 <a:latin typeface="Inter"/>
               </a:defRPr>
@@ -33103,7 +33166,7 @@
               </a:lnSpc>
               <a:defRPr sz="1100" b="0">
                 <a:solidFill>
-                  <a:srgbClr val="8A94A6"/>
+                  <a:srgbClr val="7A88A0"/>
                 </a:solidFill>
                 <a:latin typeface="Inter"/>
               </a:defRPr>
@@ -33131,7 +33194,7 @@
             </a:avLst>
           </a:prstGeom>
           <a:solidFill>
-            <a:srgbClr val="F7F9FC"/>
+            <a:srgbClr val="F5F7FB"/>
           </a:solidFill>
           <a:ln w="12700">
             <a:solidFill>
@@ -33190,7 +33253,7 @@
               </a:lnSpc>
               <a:defRPr sz="1400" b="1">
                 <a:solidFill>
-                  <a:srgbClr val="0F172A"/>
+                  <a:srgbClr val="0B3375"/>
                 </a:solidFill>
                 <a:latin typeface="Inter"/>
               </a:defRPr>
@@ -33229,7 +33292,7 @@
               </a:lnSpc>
               <a:defRPr sz="1100" b="0">
                 <a:solidFill>
-                  <a:srgbClr val="8A94A6"/>
+                  <a:srgbClr val="7A88A0"/>
                 </a:solidFill>
                 <a:latin typeface="Inter"/>
               </a:defRPr>
@@ -33257,7 +33320,7 @@
             </a:avLst>
           </a:prstGeom>
           <a:solidFill>
-            <a:srgbClr val="F7F9FC"/>
+            <a:srgbClr val="F5F7FB"/>
           </a:solidFill>
           <a:ln w="12700">
             <a:solidFill>
@@ -33316,7 +33379,7 @@
               </a:lnSpc>
               <a:defRPr sz="1400" b="1">
                 <a:solidFill>
-                  <a:srgbClr val="0F172A"/>
+                  <a:srgbClr val="0B3375"/>
                 </a:solidFill>
                 <a:latin typeface="Inter"/>
               </a:defRPr>
@@ -33355,7 +33418,7 @@
               </a:lnSpc>
               <a:defRPr sz="1100" b="0">
                 <a:solidFill>
-                  <a:srgbClr val="8A94A6"/>
+                  <a:srgbClr val="7A88A0"/>
                 </a:solidFill>
                 <a:latin typeface="Inter"/>
               </a:defRPr>
@@ -33394,7 +33457,7 @@
               </a:lnSpc>
               <a:defRPr sz="900" b="0">
                 <a:solidFill>
-                  <a:srgbClr val="8A94A6"/>
+                  <a:srgbClr val="7A88A0"/>
                 </a:solidFill>
                 <a:latin typeface="Inter"/>
               </a:defRPr>
@@ -33433,7 +33496,7 @@
               </a:lnSpc>
               <a:defRPr sz="900" b="0">
                 <a:solidFill>
-                  <a:srgbClr val="8A94A6"/>
+                  <a:srgbClr val="7A88A0"/>
                 </a:solidFill>
                 <a:latin typeface="Inter"/>
               </a:defRPr>
@@ -33498,7 +33561,7 @@
               </a:lnSpc>
               <a:defRPr sz="1100" b="1">
                 <a:solidFill>
-                  <a:srgbClr val="1D4ED8"/>
+                  <a:srgbClr val="1668DC"/>
                 </a:solidFill>
                 <a:latin typeface="Inter"/>
               </a:defRPr>
@@ -33537,7 +33600,7 @@
               </a:lnSpc>
               <a:defRPr sz="3000" b="1">
                 <a:solidFill>
-                  <a:srgbClr val="0F172A"/>
+                  <a:srgbClr val="0B3375"/>
                 </a:solidFill>
                 <a:latin typeface="Manrope"/>
               </a:defRPr>
@@ -33565,7 +33628,7 @@
         <p:spPr>
           <a:xfrm>
             <a:off x="1463040" y="1371600"/>
-            <a:ext cx="2875455" cy="4480560"/>
+            <a:ext cx="2983998" cy="4480560"/>
           </a:xfrm>
           <a:prstGeom prst="rect">
             <a:avLst/>
@@ -33600,7 +33663,7 @@
               </a:lnSpc>
               <a:defRPr sz="1200" b="0">
                 <a:solidFill>
-                  <a:srgbClr val="8A94A6"/>
+                  <a:srgbClr val="7A88A0"/>
                 </a:solidFill>
                 <a:latin typeface="Inter"/>
               </a:defRPr>
@@ -33639,7 +33702,7 @@
               </a:lnSpc>
               <a:defRPr sz="900" b="0">
                 <a:solidFill>
-                  <a:srgbClr val="8A94A6"/>
+                  <a:srgbClr val="7A88A0"/>
                 </a:solidFill>
                 <a:latin typeface="Inter"/>
               </a:defRPr>
@@ -33678,7 +33741,7 @@
               </a:lnSpc>
               <a:defRPr sz="900" b="0">
                 <a:solidFill>
-                  <a:srgbClr val="8A94A6"/>
+                  <a:srgbClr val="7A88A0"/>
                 </a:solidFill>
                 <a:latin typeface="Inter"/>
               </a:defRPr>
